--- a/reports/nn_accel_triage_presentation.pptx
+++ b/reports/nn_accel_triage_presentation.pptx
@@ -3887,7 +3887,7 @@
         <p:spPr>
           <a:xfrm>
             <a:off x="640080" y="1508760"/>
-            <a:ext cx="10911535" cy="4892040"/>
+            <a:ext cx="10911535" cy="777240"/>
           </a:xfrm>
           <a:prstGeom prst="rect">
             <a:avLst/>
@@ -3901,12 +3901,51 @@
           <a:lstStyle/>
           <a:p>
             <a:pPr>
+              <a:lnSpc>
+                <a:spcPct val="115000"/>
+              </a:lnSpc>
+            </a:pPr>
+            <a:r>
+              <a:rPr sz="1400" b="0" i="0">
+                <a:solidFill>
+                  <a:srgbClr val="C7C9D9"/>
+                </a:solidFill>
+                <a:latin typeface="Calibri"/>
+              </a:rPr>
+              <a:t>The repository is organized so each stage of the pipeline — RTL, testbench, triage engine, and benchmark — lives in its own top-level directory with a single clear responsibility. This makes it straightforward for a new contributor to find the exact file that owns a given piece of behavior.</a:t>
+            </a:r>
+          </a:p>
+        </p:txBody>
+      </p:sp>
+      <p:sp>
+        <p:nvSpPr>
+          <p:cNvPr id="10" name="TextBox 9"/>
+          <p:cNvSpPr txBox="1"/>
+          <p:nvPr/>
+        </p:nvSpPr>
+        <p:spPr>
+          <a:xfrm>
+            <a:off x="640080" y="2377440"/>
+            <a:ext cx="10911535" cy="4023360"/>
+          </a:xfrm>
+          <a:prstGeom prst="rect">
+            <a:avLst/>
+          </a:prstGeom>
+          <a:noFill/>
+        </p:spPr>
+        <p:txBody>
+          <a:bodyPr wrap="square" lIns="0" rIns="0" tIns="0" bIns="0">
+            <a:noAutofit/>
+          </a:bodyPr>
+          <a:lstStyle/>
+          <a:p>
+            <a:pPr>
               <a:spcAft>
-                <a:spcPts val="1400"/>
+                <a:spcPts val="1100"/>
               </a:spcAft>
             </a:pPr>
             <a:r>
-              <a:rPr sz="1700" b="1" i="0">
+              <a:rPr sz="1350" b="1" i="0">
                 <a:solidFill>
                   <a:srgbClr val="F0A500"/>
                 </a:solidFill>
@@ -3915,32 +3954,23 @@
               <a:t>•  rtl/:  </a:t>
             </a:r>
             <a:r>
-              <a:rPr sz="1700" b="0" i="0">
+              <a:rPr sz="1350" b="0" i="0">
                 <a:solidFill>
                   <a:srgbClr val="FFFFFF"/>
                 </a:solidFill>
                 <a:latin typeface="Calibri"/>
               </a:rPr>
-              <a:t>SystemVerilog RTL modules + </a:t>
-            </a:r>
-            <a:r>
-              <a:rPr sz="1700" b="1" i="0">
-                <a:solidFill>
-                  <a:srgbClr val="F0A500"/>
-                </a:solidFill>
-                <a:latin typeface="Calibri"/>
-              </a:rPr>
-              <a:t>13 fault variants</a:t>
+              <a:t>SystemVerilog RTL modules for the accelerator, plus the 13 frozen fault variants used to build the ground-truth dataset.</a:t>
             </a:r>
           </a:p>
           <a:p>
             <a:pPr>
               <a:spcAft>
-                <a:spcPts val="1400"/>
+                <a:spcPts val="1100"/>
               </a:spcAft>
             </a:pPr>
             <a:r>
-              <a:rPr sz="1700" b="1" i="0">
+              <a:rPr sz="1350" b="1" i="0">
                 <a:solidFill>
                   <a:srgbClr val="F0A500"/>
                 </a:solidFill>
@@ -3949,23 +3979,23 @@
               <a:t>•  tb/:  </a:t>
             </a:r>
             <a:r>
-              <a:rPr sz="1700" b="0" i="0">
+              <a:rPr sz="1350" b="0" i="0">
                 <a:solidFill>
                   <a:srgbClr val="FFFFFF"/>
                 </a:solidFill>
                 <a:latin typeface="Calibri"/>
               </a:rPr>
-              <a:t>CocoTB testbench + NumPy reference models</a:t>
+              <a:t>CocoTB testbench drivers and monitors, alongside the NumPy reference models that generate every expected value.</a:t>
             </a:r>
           </a:p>
           <a:p>
             <a:pPr>
               <a:spcAft>
-                <a:spcPts val="1400"/>
+                <a:spcPts val="1100"/>
               </a:spcAft>
             </a:pPr>
             <a:r>
-              <a:rPr sz="1700" b="1" i="0">
+              <a:rPr sz="1350" b="1" i="0">
                 <a:solidFill>
                   <a:srgbClr val="F0A500"/>
                 </a:solidFill>
@@ -3974,23 +4004,23 @@
               <a:t>•  triage/:  </a:t>
             </a:r>
             <a:r>
-              <a:rPr sz="1700" b="0" i="0">
+              <a:rPr sz="1350" b="0" i="0">
                 <a:solidFill>
                   <a:srgbClr val="FFFFFF"/>
                 </a:solidFill>
                 <a:latin typeface="Calibri"/>
               </a:rPr>
-              <a:t>Feature extractor, clusterer, triage agent, RAG store, debug loop</a:t>
+              <a:t>The AI triage engine itself: feature extractor, clusterer, triage agent, RAG store, and multi-turn debug loop.</a:t>
             </a:r>
           </a:p>
           <a:p>
             <a:pPr>
               <a:spcAft>
-                <a:spcPts val="1400"/>
+                <a:spcPts val="1100"/>
               </a:spcAft>
             </a:pPr>
             <a:r>
-              <a:rPr sz="1700" b="1" i="0">
+              <a:rPr sz="1350" b="1" i="0">
                 <a:solidFill>
                   <a:srgbClr val="F0A500"/>
                 </a:solidFill>
@@ -3999,23 +4029,23 @@
               <a:t>•  benchmark/:  </a:t>
             </a:r>
             <a:r>
-              <a:rPr sz="1700" b="0" i="0">
+              <a:rPr sz="1350" b="0" i="0">
                 <a:solidFill>
                   <a:srgbClr val="FFFFFF"/>
                 </a:solidFill>
                 <a:latin typeface="Calibri"/>
               </a:rPr>
-              <a:t>Benchmark runner, evaluator, ground truth labels</a:t>
+              <a:t>Benchmark runner, evaluator, and the human-verified ground truth labels used to score accuracy.</a:t>
             </a:r>
           </a:p>
           <a:p>
             <a:pPr>
               <a:spcAft>
-                <a:spcPts val="1400"/>
+                <a:spcPts val="1100"/>
               </a:spcAft>
             </a:pPr>
             <a:r>
-              <a:rPr sz="1700" b="1" i="0">
+              <a:rPr sz="1350" b="1" i="0">
                 <a:solidFill>
                   <a:srgbClr val="F0A500"/>
                 </a:solidFill>
@@ -4024,23 +4054,23 @@
               <a:t>•  dashboard/:  </a:t>
             </a:r>
             <a:r>
-              <a:rPr sz="1700" b="0" i="0">
+              <a:rPr sz="1350" b="0" i="0">
                 <a:solidFill>
                   <a:srgbClr val="FFFFFF"/>
                 </a:solidFill>
                 <a:latin typeface="Calibri"/>
               </a:rPr>
-              <a:t>Static HTML dashboard generator</a:t>
+              <a:t>Generator for the self-contained static HTML dashboard, no server or JS framework required.</a:t>
             </a:r>
           </a:p>
           <a:p>
             <a:pPr>
               <a:spcAft>
-                <a:spcPts val="1400"/>
+                <a:spcPts val="1100"/>
               </a:spcAft>
             </a:pPr>
             <a:r>
-              <a:rPr sz="1700" b="1" i="0">
+              <a:rPr sz="1350" b="1" i="0">
                 <a:solidFill>
                   <a:srgbClr val="F0A500"/>
                 </a:solidFill>
@@ -4049,23 +4079,23 @@
               <a:t>•  reports/:  </a:t>
             </a:r>
             <a:r>
-              <a:rPr sz="1700" b="0" i="0">
+              <a:rPr sz="1350" b="0" i="0">
                 <a:solidFill>
                   <a:srgbClr val="FFFFFF"/>
                 </a:solidFill>
                 <a:latin typeface="Calibri"/>
               </a:rPr>
-              <a:t>Generated outputs (dashboard.html, benchmark JSON, REPORT.md)</a:t>
+              <a:t>Generated outputs: dashboard.html, dated benchmark JSON files, and the written technical report.</a:t>
             </a:r>
           </a:p>
           <a:p>
             <a:pPr>
               <a:spcAft>
-                <a:spcPts val="1400"/>
+                <a:spcPts val="1100"/>
               </a:spcAft>
             </a:pPr>
             <a:r>
-              <a:rPr sz="1700" b="1" i="0">
+              <a:rPr sz="1350" b="1" i="0">
                 <a:solidFill>
                   <a:srgbClr val="F0A500"/>
                 </a:solidFill>
@@ -4074,23 +4104,23 @@
               <a:t>•  docker/:  </a:t>
             </a:r>
             <a:r>
-              <a:rPr sz="1700" b="0" i="0">
+              <a:rPr sz="1350" b="0" i="0">
                 <a:solidFill>
                   <a:srgbClr val="FFFFFF"/>
                 </a:solidFill>
                 <a:latin typeface="Calibri"/>
               </a:rPr>
-              <a:t>Dockerfile, run_pipeline.sh, docker-compose.yml</a:t>
+              <a:t>Dockerfile, run_pipeline.sh, and docker-compose.yml for one-command reproduction on any machine.</a:t>
             </a:r>
           </a:p>
           <a:p>
             <a:pPr>
               <a:spcAft>
-                <a:spcPts val="1400"/>
+                <a:spcPts val="1100"/>
               </a:spcAft>
             </a:pPr>
             <a:r>
-              <a:rPr sz="1700" b="1" i="0">
+              <a:rPr sz="1350" b="1" i="0">
                 <a:solidFill>
                   <a:srgbClr val="F0A500"/>
                 </a:solidFill>
@@ -4099,38 +4129,13 @@
               <a:t>•  regression_db.jsonl:  </a:t>
             </a:r>
             <a:r>
-              <a:rPr sz="1700" b="0" i="0">
+              <a:rPr sz="1350" b="0" i="0">
                 <a:solidFill>
                   <a:srgbClr val="FFFFFF"/>
                 </a:solidFill>
                 <a:latin typeface="Calibri"/>
               </a:rPr>
-              <a:t>255-record append-only central log</a:t>
-            </a:r>
-          </a:p>
-          <a:p>
-            <a:pPr>
-              <a:spcAft>
-                <a:spcPts val="1400"/>
-              </a:spcAft>
-            </a:pPr>
-            <a:r>
-              <a:rPr sz="1700" b="1" i="0">
-                <a:solidFill>
-                  <a:srgbClr val="F0A500"/>
-                </a:solidFill>
-                <a:latin typeface="Calibri"/>
-              </a:rPr>
-              <a:t>•  requirements.txt + pytest.ini:  </a:t>
-            </a:r>
-            <a:r>
-              <a:rPr sz="1700" b="0" i="0">
-                <a:solidFill>
-                  <a:srgbClr val="FFFFFF"/>
-                </a:solidFill>
-                <a:latin typeface="Calibri"/>
-              </a:rPr>
-              <a:t>Python dependencies and test config</a:t>
+              <a:t>The 255-record append-only central log that every other component reads from.</a:t>
             </a:r>
           </a:p>
         </p:txBody>
@@ -4444,7 +4449,7 @@
         <p:spPr>
           <a:xfrm>
             <a:off x="640080" y="1508760"/>
-            <a:ext cx="10911535" cy="4892040"/>
+            <a:ext cx="10911535" cy="960120"/>
           </a:xfrm>
           <a:prstGeom prst="rect">
             <a:avLst/>
@@ -4458,12 +4463,51 @@
           <a:lstStyle/>
           <a:p>
             <a:pPr>
+              <a:lnSpc>
+                <a:spcPct val="120000"/>
+              </a:lnSpc>
+            </a:pPr>
+            <a:r>
+              <a:rPr sz="1600" b="0" i="0">
+                <a:solidFill>
+                  <a:srgbClr val="FFFFFF"/>
+                </a:solidFill>
+                <a:latin typeface="Calibri"/>
+              </a:rPr>
+              <a:t>mac_array.sv is the computational heart of the accelerator: a parameterized NxN array of multiply-accumulate units that performs the core matrix multiplication for each tile. It was designed to be flexible enough to test multiple data types and array sizes while remaining small enough to simulate quickly.</a:t>
+            </a:r>
+          </a:p>
+        </p:txBody>
+      </p:sp>
+      <p:sp>
+        <p:nvSpPr>
+          <p:cNvPr id="10" name="TextBox 9"/>
+          <p:cNvSpPr txBox="1"/>
+          <p:nvPr/>
+        </p:nvSpPr>
+        <p:spPr>
+          <a:xfrm>
+            <a:off x="640080" y="2468880"/>
+            <a:ext cx="10911535" cy="3977640"/>
+          </a:xfrm>
+          <a:prstGeom prst="rect">
+            <a:avLst/>
+          </a:prstGeom>
+          <a:noFill/>
+        </p:spPr>
+        <p:txBody>
+          <a:bodyPr wrap="square" lIns="0" rIns="0" tIns="0" bIns="0">
+            <a:noAutofit/>
+          </a:bodyPr>
+          <a:lstStyle/>
+          <a:p>
+            <a:pPr>
               <a:spcAft>
-                <a:spcPts val="1800"/>
+                <a:spcPts val="900"/>
               </a:spcAft>
             </a:pPr>
             <a:r>
-              <a:rPr sz="2000" b="1" i="0">
+              <a:rPr sz="1400" b="1" i="0">
                 <a:solidFill>
                   <a:srgbClr val="F0A500"/>
                 </a:solidFill>
@@ -4472,23 +4516,23 @@
               <a:t>•  </a:t>
             </a:r>
             <a:r>
-              <a:rPr sz="2000" b="0" i="0">
+              <a:rPr sz="1400" b="0" i="0">
                 <a:solidFill>
                   <a:srgbClr val="FFFFFF"/>
                 </a:solidFill>
                 <a:latin typeface="Calibri"/>
               </a:rPr>
-              <a:t>Parameterized NxN systolic-style MAC array (default N=4)</a:t>
+              <a:t>The array is parameterized by N, defaulting to a 4x4 systolic-style grid of MAC units that can be resized for different experiments.</a:t>
             </a:r>
           </a:p>
           <a:p>
             <a:pPr>
               <a:spcAft>
-                <a:spcPts val="1800"/>
+                <a:spcPts val="900"/>
               </a:spcAft>
             </a:pPr>
             <a:r>
-              <a:rPr sz="2000" b="1" i="0">
+              <a:rPr sz="1400" b="1" i="0">
                 <a:solidFill>
                   <a:srgbClr val="F0A500"/>
                 </a:solidFill>
@@ -4497,23 +4541,23 @@
               <a:t>•  </a:t>
             </a:r>
             <a:r>
-              <a:rPr sz="2000" b="0" i="0">
+              <a:rPr sz="1400" b="0" i="0">
                 <a:solidFill>
                   <a:srgbClr val="FFFFFF"/>
                 </a:solidFill>
                 <a:latin typeface="Calibri"/>
               </a:rPr>
-              <a:t>DATA_TYPE: INT8 (8-bit in, 32-bit acc), INT16 (16-bit in, 48-bit acc), FP16 stub</a:t>
+              <a:t>Three data types are supported: INT8 with an 8-bit input and 32-bit accumulator, INT16 with a 16-bit input and 48-bit accumulator, and a placeholder FP16 mode.</a:t>
             </a:r>
           </a:p>
           <a:p>
             <a:pPr>
               <a:spcAft>
-                <a:spcPts val="1800"/>
+                <a:spcPts val="900"/>
               </a:spcAft>
             </a:pPr>
             <a:r>
-              <a:rPr sz="2000" b="1" i="0">
+              <a:rPr sz="1400" b="1" i="0">
                 <a:solidFill>
                   <a:srgbClr val="F0A500"/>
                 </a:solidFill>
@@ -4522,23 +4566,23 @@
               <a:t>•  </a:t>
             </a:r>
             <a:r>
-              <a:rPr sz="2000" b="0" i="0">
+              <a:rPr sz="1400" b="0" i="0">
                 <a:solidFill>
                   <a:srgbClr val="FFFFFF"/>
                 </a:solidFill>
                 <a:latin typeface="Calibri"/>
               </a:rPr>
-              <a:t>FSM: IDLE → COMPUTE (N cycles) → DONE</a:t>
+              <a:t>A simple three-state FSM — IDLE, COMPUTE for N cycles, then DONE — keeps the control logic easy to reason about and easy to inject faults into.</a:t>
             </a:r>
           </a:p>
           <a:p>
             <a:pPr>
               <a:spcAft>
-                <a:spcPts val="1800"/>
+                <a:spcPts val="900"/>
               </a:spcAft>
             </a:pPr>
             <a:r>
-              <a:rPr sz="2000" b="1" i="0">
+              <a:rPr sz="1400" b="1" i="0">
                 <a:solidFill>
                   <a:srgbClr val="F0A500"/>
                 </a:solidFill>
@@ -4547,23 +4591,23 @@
               <a:t>•  </a:t>
             </a:r>
             <a:r>
-              <a:rPr sz="2000" b="0" i="0">
+              <a:rPr sz="1400" b="0" i="0">
                 <a:solidFill>
                   <a:srgbClr val="FFFFFF"/>
                 </a:solidFill>
                 <a:latin typeface="Calibri"/>
               </a:rPr>
-              <a:t>AXI-style valid/ready handshake on input and output</a:t>
+              <a:t>Input and output ports use an AXI-style valid/ready handshake so the array can stall cleanly when downstream logic is not ready.</a:t>
             </a:r>
           </a:p>
           <a:p>
             <a:pPr>
               <a:spcAft>
-                <a:spcPts val="1800"/>
+                <a:spcPts val="900"/>
               </a:spcAft>
             </a:pPr>
             <a:r>
-              <a:rPr sz="2000" b="1" i="0">
+              <a:rPr sz="1400" b="1" i="0">
                 <a:solidFill>
                   <a:srgbClr val="F0A500"/>
                 </a:solidFill>
@@ -4572,38 +4616,13 @@
               <a:t>•  </a:t>
             </a:r>
             <a:r>
-              <a:rPr sz="2000" b="0" i="0">
+              <a:rPr sz="1400" b="0" i="0">
                 <a:solidFill>
                   <a:srgbClr val="FFFFFF"/>
                 </a:solidFill>
                 <a:latin typeface="Calibri"/>
               </a:rPr>
-              <a:t>Synchronous active-low reset</a:t>
-            </a:r>
-          </a:p>
-          <a:p>
-            <a:pPr>
-              <a:spcAft>
-                <a:spcPts val="1800"/>
-              </a:spcAft>
-            </a:pPr>
-            <a:r>
-              <a:rPr sz="2000" b="1" i="0">
-                <a:solidFill>
-                  <a:srgbClr val="F0A500"/>
-                </a:solidFill>
-                <a:latin typeface="Calibri"/>
-              </a:rPr>
-              <a:t>•  </a:t>
-            </a:r>
-            <a:r>
-              <a:rPr sz="2000" b="0" i="0">
-                <a:solidFill>
-                  <a:srgbClr val="FFFFFF"/>
-                </a:solidFill>
-                <a:latin typeface="Calibri"/>
-              </a:rPr>
-              <a:t>Lint-clean: zero Verilator warnings</a:t>
+              <a:t>The module is lint-clean under Verilator with zero warnings, which matters because every fault variant is a one-line edit to this same clean baseline.</a:t>
             </a:r>
           </a:p>
         </p:txBody>
@@ -4917,7 +4936,7 @@
         <p:spPr>
           <a:xfrm>
             <a:off x="640080" y="1508760"/>
-            <a:ext cx="10911535" cy="4892040"/>
+            <a:ext cx="10911535" cy="1051560"/>
           </a:xfrm>
           <a:prstGeom prst="rect">
             <a:avLst/>
@@ -4931,12 +4950,51 @@
           <a:lstStyle/>
           <a:p>
             <a:pPr>
+              <a:lnSpc>
+                <a:spcPct val="120000"/>
+              </a:lnSpc>
+            </a:pPr>
+            <a:r>
+              <a:rPr sz="1600" b="0" i="0">
+                <a:solidFill>
+                  <a:srgbClr val="FFFFFF"/>
+                </a:solidFill>
+                <a:latin typeface="Calibri"/>
+              </a:rPr>
+              <a:t>quant_unit.sv converts the wide accumulator output of the MAC array back down to INT8, the format the rest of the accelerator expects. This per-channel asymmetric quantization step is also where several of our most subtle injected faults live, because a shift or clamp error only shows up in a narrow range of output values.</a:t>
+            </a:r>
+          </a:p>
+        </p:txBody>
+      </p:sp>
+      <p:sp>
+        <p:nvSpPr>
+          <p:cNvPr id="10" name="TextBox 9"/>
+          <p:cNvSpPr txBox="1"/>
+          <p:nvPr/>
+        </p:nvSpPr>
+        <p:spPr>
+          <a:xfrm>
+            <a:off x="640080" y="2560320"/>
+            <a:ext cx="10911535" cy="3886200"/>
+          </a:xfrm>
+          <a:prstGeom prst="rect">
+            <a:avLst/>
+          </a:prstGeom>
+          <a:noFill/>
+        </p:spPr>
+        <p:txBody>
+          <a:bodyPr wrap="square" lIns="0" rIns="0" tIns="0" bIns="0">
+            <a:noAutofit/>
+          </a:bodyPr>
+          <a:lstStyle/>
+          <a:p>
+            <a:pPr>
               <a:spcAft>
-                <a:spcPts val="2000"/>
+                <a:spcPts val="800"/>
               </a:spcAft>
             </a:pPr>
             <a:r>
-              <a:rPr sz="1900" b="1" i="0">
+              <a:rPr sz="1350" b="1" i="0">
                 <a:solidFill>
                   <a:srgbClr val="F0A500"/>
                 </a:solidFill>
@@ -4945,23 +5003,23 @@
               <a:t>•  </a:t>
             </a:r>
             <a:r>
-              <a:rPr sz="1900" b="0" i="0">
+              <a:rPr sz="1350" b="0" i="0">
                 <a:solidFill>
                   <a:srgbClr val="FFFFFF"/>
                 </a:solidFill>
                 <a:latin typeface="Calibri"/>
               </a:rPr>
-              <a:t>Per-channel INT8 asymmetric quantization</a:t>
+              <a:t>The quantization formula is q[i][j] = clamp(((acc[i][j] * scale[i]) &gt;&gt;&gt; shift[i]) + zero_pt[i], -128, 127), applied independently per output channel.</a:t>
             </a:r>
           </a:p>
           <a:p>
             <a:pPr>
               <a:spcAft>
-                <a:spcPts val="2000"/>
+                <a:spcPts val="800"/>
               </a:spcAft>
             </a:pPr>
             <a:r>
-              <a:rPr sz="1900" b="1" i="0">
+              <a:rPr sz="1350" b="1" i="0">
                 <a:solidFill>
                   <a:srgbClr val="F0A500"/>
                 </a:solidFill>
@@ -4970,23 +5028,23 @@
               <a:t>•  </a:t>
             </a:r>
             <a:r>
-              <a:rPr sz="1900" b="0" i="0">
+              <a:rPr sz="1350" b="0" i="0">
                 <a:solidFill>
                   <a:srgbClr val="FFFFFF"/>
                 </a:solidFill>
                 <a:latin typeface="Calibri"/>
               </a:rPr>
-              <a:t>Formula: q[i][j] = clamp(((acc[i][j] * scale[i]) &gt;&gt;&gt; shift[i]) + zero_pt[i], -128, 127)</a:t>
+              <a:t>The channel axis is the output row index i, and each channel carries its own 16-bit scale, 5-bit shift, and signed INT8 zero-point.</a:t>
             </a:r>
           </a:p>
           <a:p>
             <a:pPr>
               <a:spcAft>
-                <a:spcPts val="2000"/>
+                <a:spcPts val="800"/>
               </a:spcAft>
             </a:pPr>
             <a:r>
-              <a:rPr sz="1900" b="1" i="0">
+              <a:rPr sz="1350" b="1" i="0">
                 <a:solidFill>
                   <a:srgbClr val="F0A500"/>
                 </a:solidFill>
@@ -4995,23 +5053,23 @@
               <a:t>•  </a:t>
             </a:r>
             <a:r>
-              <a:rPr sz="1900" b="0" i="0">
+              <a:rPr sz="1350" b="0" i="0">
                 <a:solidFill>
                   <a:srgbClr val="FFFFFF"/>
                 </a:solidFill>
                 <a:latin typeface="Calibri"/>
               </a:rPr>
-              <a:t>Channel axis = output row; per-channel scale (16-bit), shift (5-bit), zero_pt (INT8)</a:t>
+              <a:t>Quantization is combinational, so the unit adds only a single cycle of latency to the pipeline.</a:t>
             </a:r>
           </a:p>
           <a:p>
             <a:pPr>
               <a:spcAft>
-                <a:spcPts val="2000"/>
+                <a:spcPts val="800"/>
               </a:spcAft>
             </a:pPr>
             <a:r>
-              <a:rPr sz="1900" b="1" i="0">
+              <a:rPr sz="1350" b="1" i="0">
                 <a:solidFill>
                   <a:srgbClr val="F0A500"/>
                 </a:solidFill>
@@ -5020,23 +5078,23 @@
               <a:t>•  </a:t>
             </a:r>
             <a:r>
-              <a:rPr sz="1900" b="0" i="0">
+              <a:rPr sz="1350" b="0" i="0">
                 <a:solidFill>
                   <a:srgbClr val="FFFFFF"/>
                 </a:solidFill>
                 <a:latin typeface="Calibri"/>
               </a:rPr>
-              <a:t>Single-cycle latency (combinational quantization path)</a:t>
+              <a:t>The internal product width is PROD_W = ACC_W + SCALE_W + 1 = 49 bits, wide enough that the multiply-and-shift never itself overflows.</a:t>
             </a:r>
           </a:p>
           <a:p>
             <a:pPr>
               <a:spcAft>
-                <a:spcPts val="2000"/>
+                <a:spcPts val="800"/>
               </a:spcAft>
             </a:pPr>
             <a:r>
-              <a:rPr sz="1900" b="1" i="0">
+              <a:rPr sz="1350" b="1" i="0">
                 <a:solidFill>
                   <a:srgbClr val="F0A500"/>
                 </a:solidFill>
@@ -5045,13 +5103,13 @@
               <a:t>•  </a:t>
             </a:r>
             <a:r>
-              <a:rPr sz="1900" b="0" i="0">
+              <a:rPr sz="1350" b="0" i="0">
                 <a:solidFill>
                   <a:srgbClr val="FFFFFF"/>
                 </a:solidFill>
                 <a:latin typeface="Calibri"/>
               </a:rPr>
-              <a:t>PROD_W = ACC_W + SCALE_W + 1 = 49-bit intermediate precision</a:t>
+              <a:t>Because the formula has three independent operands — scale, shift, and zero-point — each is a natural target for a distinct class of injected fault.</a:t>
             </a:r>
           </a:p>
         </p:txBody>
@@ -5358,13 +5416,52 @@
       </p:sp>
       <p:sp>
         <p:nvSpPr>
-          <p:cNvPr id="9" name="Rectangle 8"/>
+          <p:cNvPr id="9" name="TextBox 8"/>
+          <p:cNvSpPr txBox="1"/>
+          <p:nvPr/>
+        </p:nvSpPr>
+        <p:spPr>
+          <a:xfrm>
+            <a:off x="640080" y="1508760"/>
+            <a:ext cx="10911535" cy="685800"/>
+          </a:xfrm>
+          <a:prstGeom prst="rect">
+            <a:avLst/>
+          </a:prstGeom>
+          <a:noFill/>
+        </p:spPr>
+        <p:txBody>
+          <a:bodyPr wrap="square" lIns="0" rIns="0" tIns="0" bIns="0">
+            <a:noAutofit/>
+          </a:bodyPr>
+          <a:lstStyle/>
+          <a:p>
+            <a:pPr>
+              <a:lnSpc>
+                <a:spcPct val="115000"/>
+              </a:lnSpc>
+            </a:pPr>
+            <a:r>
+              <a:rPr sz="1400" b="0" i="0">
+                <a:solidFill>
+                  <a:srgbClr val="C7C9D9"/>
+                </a:solidFill>
+                <a:latin typeface="Calibri"/>
+              </a:rPr>
+              <a:t>Two supporting modules round out the accelerator: a memory arbiter that resolves contention for shared SRAM, and a top-level FSM that sequences the whole tile through load, compute, quantize, and store.</a:t>
+            </a:r>
+          </a:p>
+        </p:txBody>
+      </p:sp>
+      <p:sp>
+        <p:nvSpPr>
+          <p:cNvPr id="10" name="Rectangle 9"/>
           <p:cNvSpPr/>
           <p:nvPr/>
         </p:nvSpPr>
         <p:spPr>
           <a:xfrm>
-            <a:off x="640080" y="1508760"/>
+            <a:off x="640080" y="2286000"/>
             <a:ext cx="5227167" cy="502920"/>
           </a:xfrm>
           <a:prstGeom prst="rect">
@@ -5402,13 +5499,13 @@
       </p:sp>
       <p:sp>
         <p:nvSpPr>
-          <p:cNvPr id="10" name="TextBox 9"/>
+          <p:cNvPr id="11" name="TextBox 10"/>
           <p:cNvSpPr txBox="1"/>
           <p:nvPr/>
         </p:nvSpPr>
         <p:spPr>
           <a:xfrm>
-            <a:off x="777240" y="1508760"/>
+            <a:off x="777240" y="2286000"/>
             <a:ext cx="4952847" cy="502920"/>
           </a:xfrm>
           <a:prstGeom prst="rect">
@@ -5436,14 +5533,14 @@
       </p:sp>
       <p:sp>
         <p:nvSpPr>
-          <p:cNvPr id="11" name="TextBox 10"/>
+          <p:cNvPr id="12" name="TextBox 11"/>
           <p:cNvSpPr txBox="1"/>
           <p:nvPr/>
         </p:nvSpPr>
         <p:spPr>
           <a:xfrm>
-            <a:off x="731520" y="2194560"/>
-            <a:ext cx="5044287" cy="3840480"/>
+            <a:off x="731520" y="2971800"/>
+            <a:ext cx="5044287" cy="3063240"/>
           </a:xfrm>
           <a:prstGeom prst="rect">
             <a:avLst/>
@@ -5458,11 +5555,11 @@
           <a:p>
             <a:pPr>
               <a:spcAft>
-                <a:spcPts val="1400"/>
+                <a:spcPts val="1000"/>
               </a:spcAft>
             </a:pPr>
             <a:r>
-              <a:rPr sz="1700" b="1" i="0">
+              <a:rPr sz="1450" b="1" i="0">
                 <a:solidFill>
                   <a:srgbClr val="F0A500"/>
                 </a:solidFill>
@@ -5471,23 +5568,23 @@
               <a:t>•  </a:t>
             </a:r>
             <a:r>
-              <a:rPr sz="1700" b="0" i="0">
+              <a:rPr sz="1450" b="0" i="0">
                 <a:solidFill>
                   <a:srgbClr val="FFFFFF"/>
                 </a:solidFill>
                 <a:latin typeface="Calibri"/>
               </a:rPr>
-              <a:t>Shared SRAM arbiter for weight and activation memory</a:t>
+              <a:t>It arbitrates a single shared SRAM port between the weight (A) and activation (B) requestors using simple round-robin priority.</a:t>
             </a:r>
           </a:p>
           <a:p>
             <a:pPr>
               <a:spcAft>
-                <a:spcPts val="1400"/>
+                <a:spcPts val="1000"/>
               </a:spcAft>
             </a:pPr>
             <a:r>
-              <a:rPr sz="1700" b="1" i="0">
+              <a:rPr sz="1450" b="1" i="0">
                 <a:solidFill>
                   <a:srgbClr val="F0A500"/>
                 </a:solidFill>
@@ -5496,23 +5593,23 @@
               <a:t>•  </a:t>
             </a:r>
             <a:r>
-              <a:rPr sz="1700" b="0" i="0">
+              <a:rPr sz="1450" b="0" i="0">
                 <a:solidFill>
                   <a:srgbClr val="FFFFFF"/>
                 </a:solidFill>
                 <a:latin typeface="Calibri"/>
               </a:rPr>
-              <a:t>Round-robin arbitration, bank-conflict detection</a:t>
+              <a:t>Bank-conflict detection compares the low address bits of both requests and flags a conflict when they collide.</a:t>
             </a:r>
           </a:p>
           <a:p>
             <a:pPr>
               <a:spcAft>
-                <a:spcPts val="1400"/>
+                <a:spcPts val="1000"/>
               </a:spcAft>
             </a:pPr>
             <a:r>
-              <a:rPr sz="1700" b="1" i="0">
+              <a:rPr sz="1450" b="1" i="0">
                 <a:solidFill>
                   <a:srgbClr val="F0A500"/>
                 </a:solidFill>
@@ -5521,26 +5618,26 @@
               <a:t>•  </a:t>
             </a:r>
             <a:r>
-              <a:rPr sz="1700" b="0" i="0">
+              <a:rPr sz="1450" b="0" i="0">
                 <a:solidFill>
                   <a:srgbClr val="FFFFFF"/>
                 </a:solidFill>
                 <a:latin typeface="Calibri"/>
               </a:rPr>
-              <a:t>1-cycle stall penalty on conflict</a:t>
-            </a:r>
-          </a:p>
-        </p:txBody>
-      </p:sp>
-      <p:sp>
-        <p:nvSpPr>
-          <p:cNvPr id="12" name="Rectangle 11"/>
+              <a:t>A conflict costs exactly one cycle of stall, keeping the timing model simple and predictable for the testbench.</a:t>
+            </a:r>
+          </a:p>
+        </p:txBody>
+      </p:sp>
+      <p:sp>
+        <p:nvSpPr>
+          <p:cNvPr id="13" name="Rectangle 12"/>
           <p:cNvSpPr/>
           <p:nvPr/>
         </p:nvSpPr>
         <p:spPr>
           <a:xfrm>
-            <a:off x="6324447" y="1508760"/>
+            <a:off x="6324447" y="2286000"/>
             <a:ext cx="5227167" cy="502920"/>
           </a:xfrm>
           <a:prstGeom prst="rect">
@@ -5578,13 +5675,13 @@
       </p:sp>
       <p:sp>
         <p:nvSpPr>
-          <p:cNvPr id="13" name="TextBox 12"/>
+          <p:cNvPr id="14" name="TextBox 13"/>
           <p:cNvSpPr txBox="1"/>
           <p:nvPr/>
         </p:nvSpPr>
         <p:spPr>
           <a:xfrm>
-            <a:off x="6461607" y="1508760"/>
+            <a:off x="6461607" y="2286000"/>
             <a:ext cx="4952847" cy="502920"/>
           </a:xfrm>
           <a:prstGeom prst="rect">
@@ -5612,14 +5709,14 @@
       </p:sp>
       <p:sp>
         <p:nvSpPr>
-          <p:cNvPr id="14" name="TextBox 13"/>
+          <p:cNvPr id="15" name="TextBox 14"/>
           <p:cNvSpPr txBox="1"/>
           <p:nvPr/>
         </p:nvSpPr>
         <p:spPr>
           <a:xfrm>
-            <a:off x="6415887" y="2194560"/>
-            <a:ext cx="5044287" cy="3840480"/>
+            <a:off x="6415887" y="2971800"/>
+            <a:ext cx="5044287" cy="3063240"/>
           </a:xfrm>
           <a:prstGeom prst="rect">
             <a:avLst/>
@@ -5634,11 +5731,11 @@
           <a:p>
             <a:pPr>
               <a:spcAft>
-                <a:spcPts val="1400"/>
+                <a:spcPts val="1000"/>
               </a:spcAft>
             </a:pPr>
             <a:r>
-              <a:rPr sz="1700" b="1" i="0">
+              <a:rPr sz="1450" b="1" i="0">
                 <a:solidFill>
                   <a:srgbClr val="F0A500"/>
                 </a:solidFill>
@@ -5647,23 +5744,23 @@
               <a:t>•  </a:t>
             </a:r>
             <a:r>
-              <a:rPr sz="1700" b="0" i="0">
+              <a:rPr sz="1450" b="0" i="0">
                 <a:solidFill>
                   <a:srgbClr val="FFFFFF"/>
                 </a:solidFill>
                 <a:latin typeface="Calibri"/>
               </a:rPr>
-              <a:t>Top-level sequencer instantiating all 3 modules</a:t>
+              <a:t>It instantiates and sequences all three other modules — mac_array, quant_unit, and mem_arbiter — behind a single start/done interface.</a:t>
             </a:r>
           </a:p>
           <a:p>
             <a:pPr>
               <a:spcAft>
-                <a:spcPts val="1400"/>
+                <a:spcPts val="1000"/>
               </a:spcAft>
             </a:pPr>
             <a:r>
-              <a:rPr sz="1700" b="1" i="0">
+              <a:rPr sz="1450" b="1" i="0">
                 <a:solidFill>
                   <a:srgbClr val="F0A500"/>
                 </a:solidFill>
@@ -5672,23 +5769,23 @@
               <a:t>•  </a:t>
             </a:r>
             <a:r>
-              <a:rPr sz="1700" b="0" i="0">
+              <a:rPr sz="1450" b="0" i="0">
                 <a:solidFill>
                   <a:srgbClr val="FFFFFF"/>
                 </a:solidFill>
                 <a:latin typeface="Calibri"/>
               </a:rPr>
-              <a:t>FSM: IDLE → LOAD → COMPUTE → QUANTIZE → STORE → DONE</a:t>
+              <a:t>The FSM moves through IDLE, LOAD, COMPUTE, QUANTIZE, and STORE states to process one full tile end-to-end.</a:t>
             </a:r>
           </a:p>
           <a:p>
             <a:pPr>
               <a:spcAft>
-                <a:spcPts val="1400"/>
+                <a:spcPts val="1000"/>
               </a:spcAft>
             </a:pPr>
             <a:r>
-              <a:rPr sz="1700" b="1" i="0">
+              <a:rPr sz="1450" b="1" i="0">
                 <a:solidFill>
                   <a:srgbClr val="F0A500"/>
                 </a:solidFill>
@@ -5697,13 +5794,13 @@
               <a:t>•  </a:t>
             </a:r>
             <a:r>
-              <a:rPr sz="1700" b="0" i="0">
+              <a:rPr sz="1450" b="0" i="0">
                 <a:solidFill>
                   <a:srgbClr val="FFFFFF"/>
                 </a:solidFill>
                 <a:latin typeface="Calibri"/>
               </a:rPr>
-              <a:t>Start/done pulse handshake</a:t>
+              <a:t>A single-cycle start/done pulse handshake lets a higher-level controller treat the whole tile computation as one atomic operation.</a:t>
             </a:r>
           </a:p>
         </p:txBody>
@@ -6017,7 +6114,7 @@
         <p:spPr>
           <a:xfrm>
             <a:off x="640080" y="1508760"/>
-            <a:ext cx="10911535" cy="4892040"/>
+            <a:ext cx="10911535" cy="1051560"/>
           </a:xfrm>
           <a:prstGeom prst="rect">
             <a:avLst/>
@@ -6031,12 +6128,51 @@
           <a:lstStyle/>
           <a:p>
             <a:pPr>
+              <a:lnSpc>
+                <a:spcPct val="120000"/>
+              </a:lnSpc>
+            </a:pPr>
+            <a:r>
+              <a:rPr sz="1600" b="0" i="0">
+                <a:solidFill>
+                  <a:srgbClr val="FFFFFF"/>
+                </a:solidFill>
+                <a:latin typeface="Calibri"/>
+              </a:rPr>
+              <a:t>The CocoTB testbench drives every RTL module from Python, using the same NumPy reference models that generate the regression database's expected values. This means a test failure is always a genuine RTL/reference mismatch, never a stale hardcoded number going out of sync with the design.</a:t>
+            </a:r>
+          </a:p>
+        </p:txBody>
+      </p:sp>
+      <p:sp>
+        <p:nvSpPr>
+          <p:cNvPr id="10" name="TextBox 9"/>
+          <p:cNvSpPr txBox="1"/>
+          <p:nvPr/>
+        </p:nvSpPr>
+        <p:spPr>
+          <a:xfrm>
+            <a:off x="640080" y="2560320"/>
+            <a:ext cx="10911535" cy="3886200"/>
+          </a:xfrm>
+          <a:prstGeom prst="rect">
+            <a:avLst/>
+          </a:prstGeom>
+          <a:noFill/>
+        </p:spPr>
+        <p:txBody>
+          <a:bodyPr wrap="square" lIns="0" rIns="0" tIns="0" bIns="0">
+            <a:noAutofit/>
+          </a:bodyPr>
+          <a:lstStyle/>
+          <a:p>
+            <a:pPr>
               <a:spcAft>
-                <a:spcPts val="1600"/>
+                <a:spcPts val="800"/>
               </a:spcAft>
             </a:pPr>
             <a:r>
-              <a:rPr sz="1800" b="1" i="0">
+              <a:rPr sz="1350" b="1" i="0">
                 <a:solidFill>
                   <a:srgbClr val="F0A500"/>
                 </a:solidFill>
@@ -6045,16 +6181,16 @@
               <a:t>•  </a:t>
             </a:r>
             <a:r>
-              <a:rPr sz="1800" b="0" i="0">
+              <a:rPr sz="1350" b="0" i="0">
                 <a:solidFill>
                   <a:srgbClr val="FFFFFF"/>
                 </a:solidFill>
                 <a:latin typeface="Calibri"/>
               </a:rPr>
-              <a:t>CocoTB 2.0.1 with Verilator </a:t>
-            </a:r>
-            <a:r>
-              <a:rPr sz="1800" b="1" i="0">
+              <a:t>CocoTB 2.0.1 runs on top of a Verilator </a:t>
+            </a:r>
+            <a:r>
+              <a:rPr sz="1350" b="1" i="0">
                 <a:solidFill>
                   <a:srgbClr val="F0A500"/>
                 </a:solidFill>
@@ -6063,23 +6199,23 @@
               <a:t>5.x</a:t>
             </a:r>
             <a:r>
-              <a:rPr sz="1800" b="0" i="0">
+              <a:rPr sz="1350" b="0" i="0">
                 <a:solidFill>
                   <a:srgbClr val="FFFFFF"/>
                 </a:solidFill>
                 <a:latin typeface="Calibri"/>
               </a:rPr>
-              <a:t> backend</a:t>
+              <a:t> backend, giving fast, open-source, cycle-accurate simulation.</a:t>
             </a:r>
           </a:p>
           <a:p>
             <a:pPr>
               <a:spcAft>
-                <a:spcPts val="1600"/>
+                <a:spcPts val="800"/>
               </a:spcAft>
             </a:pPr>
             <a:r>
-              <a:rPr sz="1800" b="1" i="0">
+              <a:rPr sz="1350" b="1" i="0">
                 <a:solidFill>
                   <a:srgbClr val="F0A500"/>
                 </a:solidFill>
@@ -6088,23 +6224,23 @@
               <a:t>•  </a:t>
             </a:r>
             <a:r>
-              <a:rPr sz="1800" b="0" i="0">
+              <a:rPr sz="1350" b="0" i="0">
                 <a:solidFill>
                   <a:srgbClr val="FFFFFF"/>
                 </a:solidFill>
                 <a:latin typeface="Calibri"/>
               </a:rPr>
-              <a:t>SV wrapper modules flatten unpacked 2D ports to packed flat buses (VPI limitation)</a:t>
+              <a:t>Because Verilator's VPI cannot see unpacked 2-D SystemVerilog ports directly, thin SV wrapper modules flatten them into packed flat buses before CocoTB drives them.</a:t>
             </a:r>
           </a:p>
           <a:p>
             <a:pPr>
               <a:spcAft>
-                <a:spcPts val="1600"/>
+                <a:spcPts val="800"/>
               </a:spcAft>
             </a:pPr>
             <a:r>
-              <a:rPr sz="1800" b="1" i="0">
+              <a:rPr sz="1350" b="1" i="0">
                 <a:solidFill>
                   <a:srgbClr val="F0A500"/>
                 </a:solidFill>
@@ -6113,23 +6249,41 @@
               <a:t>•  </a:t>
             </a:r>
             <a:r>
-              <a:rPr sz="1800" b="0" i="0">
+              <a:rPr sz="1350" b="0" i="0">
                 <a:solidFill>
                   <a:srgbClr val="FFFFFF"/>
                 </a:solidFill>
                 <a:latin typeface="Calibri"/>
               </a:rPr>
-              <a:t>Handshake protocol: valid/ready, ReadOnly() phase discipline</a:t>
+              <a:t>Every test follows the same valid/ready handshake protocol and CocoTB </a:t>
+            </a:r>
+            <a:r>
+              <a:rPr sz="1350" b="1" i="0">
+                <a:solidFill>
+                  <a:srgbClr val="F0A500"/>
+                </a:solidFill>
+                <a:latin typeface="Calibri"/>
+              </a:rPr>
+              <a:t>2.x</a:t>
+            </a:r>
+            <a:r>
+              <a:rPr sz="1350" b="0" i="0">
+                <a:solidFill>
+                  <a:srgbClr val="FFFFFF"/>
+                </a:solidFill>
+                <a:latin typeface="Calibri"/>
+              </a:rPr>
+              <a:t> ReadOnly() phase discipline to avoid simulator race conditions.</a:t>
             </a:r>
           </a:p>
           <a:p>
             <a:pPr>
               <a:spcAft>
-                <a:spcPts val="1600"/>
+                <a:spcPts val="800"/>
               </a:spcAft>
             </a:pPr>
             <a:r>
-              <a:rPr sz="1800" b="1" i="0">
+              <a:rPr sz="1350" b="1" i="0">
                 <a:solidFill>
                   <a:srgbClr val="F0A500"/>
                 </a:solidFill>
@@ -6138,23 +6292,23 @@
               <a:t>•  </a:t>
             </a:r>
             <a:r>
-              <a:rPr sz="1800" b="0" i="0">
+              <a:rPr sz="1350" b="0" i="0">
                 <a:solidFill>
                   <a:srgbClr val="FFFFFF"/>
                 </a:solidFill>
                 <a:latin typeface="Calibri"/>
               </a:rPr>
-              <a:t>21 mac_array tests × 3 configs = 63 test runs</a:t>
+              <a:t>The mac_array suite runs 21 distinct tests across 3 configurations, for 63 total test runs covering INT8, INT16, and the N=1 edge case.</a:t>
             </a:r>
           </a:p>
           <a:p>
             <a:pPr>
               <a:spcAft>
-                <a:spcPts val="1600"/>
+                <a:spcPts val="800"/>
               </a:spcAft>
             </a:pPr>
             <a:r>
-              <a:rPr sz="1800" b="1" i="0">
+              <a:rPr sz="1350" b="1" i="0">
                 <a:solidFill>
                   <a:srgbClr val="F0A500"/>
                 </a:solidFill>
@@ -6163,38 +6317,31 @@
               <a:t>•  </a:t>
             </a:r>
             <a:r>
-              <a:rPr sz="1800" b="0" i="0">
+              <a:rPr sz="1350" b="0" i="0">
                 <a:solidFill>
                   <a:srgbClr val="FFFFFF"/>
                 </a:solidFill>
                 <a:latin typeface="Calibri"/>
               </a:rPr>
-              <a:t>30 quant_unit tests × 3 configs = 90 test runs</a:t>
-            </a:r>
-          </a:p>
-          <a:p>
-            <a:pPr>
-              <a:spcAft>
-                <a:spcPts val="1600"/>
-              </a:spcAft>
-            </a:pPr>
-            <a:r>
-              <a:rPr sz="1800" b="1" i="0">
+              <a:t>The quant_unit suite runs </a:t>
+            </a:r>
+            <a:r>
+              <a:rPr sz="1350" b="1" i="0">
                 <a:solidFill>
                   <a:srgbClr val="F0A500"/>
                 </a:solidFill>
                 <a:latin typeface="Calibri"/>
               </a:rPr>
-              <a:t>•  </a:t>
-            </a:r>
-            <a:r>
-              <a:rPr sz="1800" b="0" i="0">
+              <a:t>30 tests</a:t>
+            </a:r>
+            <a:r>
+              <a:rPr sz="1350" b="0" i="0">
                 <a:solidFill>
                   <a:srgbClr val="FFFFFF"/>
                 </a:solidFill>
                 <a:latin typeface="Calibri"/>
               </a:rPr>
-              <a:t>All expected values from NumPy reference models — no hardcoded results</a:t>
+              <a:t> across 3 accumulator-width configurations, for 90 total test runs, with every expected value computed rather than hardcoded.</a:t>
             </a:r>
           </a:p>
         </p:txBody>
@@ -6501,13 +6648,52 @@
       </p:sp>
       <p:sp>
         <p:nvSpPr>
-          <p:cNvPr id="9" name="Rectangle 8"/>
+          <p:cNvPr id="9" name="TextBox 8"/>
+          <p:cNvSpPr txBox="1"/>
+          <p:nvPr/>
+        </p:nvSpPr>
+        <p:spPr>
+          <a:xfrm>
+            <a:off x="640080" y="1508760"/>
+            <a:ext cx="10911535" cy="685800"/>
+          </a:xfrm>
+          <a:prstGeom prst="rect">
+            <a:avLst/>
+          </a:prstGeom>
+          <a:noFill/>
+        </p:spPr>
+        <p:txBody>
+          <a:bodyPr wrap="square" lIns="0" rIns="0" tIns="0" bIns="0">
+            <a:noAutofit/>
+          </a:bodyPr>
+          <a:lstStyle/>
+          <a:p>
+            <a:pPr>
+              <a:lnSpc>
+                <a:spcPct val="115000"/>
+              </a:lnSpc>
+            </a:pPr>
+            <a:r>
+              <a:rPr sz="1400" b="0" i="0">
+                <a:solidFill>
+                  <a:srgbClr val="C7C9D9"/>
+                </a:solidFill>
+                <a:latin typeface="Calibri"/>
+              </a:rPr>
+              <a:t>Before any RTL was written, we implemented golden reference models in pure NumPy so every expected value in the test suite — and every ground-truth label in the fault dataset — is computed from first principles rather than hand-derived.</a:t>
+            </a:r>
+          </a:p>
+        </p:txBody>
+      </p:sp>
+      <p:sp>
+        <p:nvSpPr>
+          <p:cNvPr id="10" name="Rectangle 9"/>
           <p:cNvSpPr/>
           <p:nvPr/>
         </p:nvSpPr>
         <p:spPr>
           <a:xfrm>
-            <a:off x="640080" y="1508760"/>
+            <a:off x="640080" y="2286000"/>
             <a:ext cx="5227167" cy="502920"/>
           </a:xfrm>
           <a:prstGeom prst="rect">
@@ -6545,13 +6731,13 @@
       </p:sp>
       <p:sp>
         <p:nvSpPr>
-          <p:cNvPr id="10" name="TextBox 9"/>
+          <p:cNvPr id="11" name="TextBox 10"/>
           <p:cNvSpPr txBox="1"/>
           <p:nvPr/>
         </p:nvSpPr>
         <p:spPr>
           <a:xfrm>
-            <a:off x="777240" y="1508760"/>
+            <a:off x="777240" y="2286000"/>
             <a:ext cx="4952847" cy="502920"/>
           </a:xfrm>
           <a:prstGeom prst="rect">
@@ -6579,14 +6765,14 @@
       </p:sp>
       <p:sp>
         <p:nvSpPr>
-          <p:cNvPr id="11" name="TextBox 10"/>
+          <p:cNvPr id="12" name="TextBox 11"/>
           <p:cNvSpPr txBox="1"/>
           <p:nvPr/>
         </p:nvSpPr>
         <p:spPr>
           <a:xfrm>
-            <a:off x="731520" y="2194560"/>
-            <a:ext cx="5044287" cy="3840480"/>
+            <a:off x="731520" y="2971800"/>
+            <a:ext cx="5044287" cy="3063240"/>
           </a:xfrm>
           <a:prstGeom prst="rect">
             <a:avLst/>
@@ -6601,11 +6787,11 @@
           <a:p>
             <a:pPr>
               <a:spcAft>
-                <a:spcPts val="1400"/>
+                <a:spcPts val="1000"/>
               </a:spcAft>
             </a:pPr>
             <a:r>
-              <a:rPr sz="1700" b="1" i="0">
+              <a:rPr sz="1450" b="1" i="0">
                 <a:solidFill>
                   <a:srgbClr val="F0A500"/>
                 </a:solidFill>
@@ -6614,23 +6800,23 @@
               <a:t>•  </a:t>
             </a:r>
             <a:r>
-              <a:rPr sz="1700" b="0" i="0">
+              <a:rPr sz="1450" b="0" i="0">
                 <a:solidFill>
                   <a:srgbClr val="FFFFFF"/>
                 </a:solidFill>
                 <a:latin typeface="Calibri"/>
               </a:rPr>
-              <a:t>Pure NumPy NxN matrix multiply</a:t>
+              <a:t>It performs a straightforward NxN matrix multiply using standard NumPy operations, with no hardware-specific tricks.</a:t>
             </a:r>
           </a:p>
           <a:p>
             <a:pPr>
               <a:spcAft>
-                <a:spcPts val="1400"/>
+                <a:spcPts val="1000"/>
               </a:spcAft>
             </a:pPr>
             <a:r>
-              <a:rPr sz="1700" b="1" i="0">
+              <a:rPr sz="1450" b="1" i="0">
                 <a:solidFill>
                   <a:srgbClr val="F0A500"/>
                 </a:solidFill>
@@ -6639,23 +6825,23 @@
               <a:t>•  </a:t>
             </a:r>
             <a:r>
-              <a:rPr sz="1700" b="0" i="0">
+              <a:rPr sz="1450" b="0" i="0">
                 <a:solidFill>
                   <a:srgbClr val="FFFFFF"/>
                 </a:solidFill>
                 <a:latin typeface="Calibri"/>
               </a:rPr>
-              <a:t>INT8 → int32 output, INT16 → int64 (48-bit wrapped), FP16 → zeros</a:t>
+              <a:t>INT8 inputs accumulate into a 32-bit result, INT16 inputs accumulate into a 64-bit value wrapped to the RTL's 48-bit accumulator, and the FP16 path is a stub returning zeros.</a:t>
             </a:r>
           </a:p>
           <a:p>
             <a:pPr>
               <a:spcAft>
-                <a:spcPts val="1400"/>
+                <a:spcPts val="1000"/>
               </a:spcAft>
             </a:pPr>
             <a:r>
-              <a:rPr sz="1700" b="1" i="0">
+              <a:rPr sz="1450" b="1" i="0">
                 <a:solidFill>
                   <a:srgbClr val="F0A500"/>
                 </a:solidFill>
@@ -6664,26 +6850,26 @@
               <a:t>•  </a:t>
             </a:r>
             <a:r>
-              <a:rPr sz="1700" b="0" i="0">
+              <a:rPr sz="1450" b="0" i="0">
                 <a:solidFill>
                   <a:srgbClr val="FFFFFF"/>
                 </a:solidFill>
                 <a:latin typeface="Calibri"/>
               </a:rPr>
-              <a:t>Matches mac_array.sv exactly: sign-extension, accumulator wrap</a:t>
-            </a:r>
-          </a:p>
-        </p:txBody>
-      </p:sp>
-      <p:sp>
-        <p:nvSpPr>
-          <p:cNvPr id="12" name="Rectangle 11"/>
+              <a:t>Every detail — sign extension behavior and accumulator wraparound — is matched bit-for-bit against mac_array.sv.</a:t>
+            </a:r>
+          </a:p>
+        </p:txBody>
+      </p:sp>
+      <p:sp>
+        <p:nvSpPr>
+          <p:cNvPr id="13" name="Rectangle 12"/>
           <p:cNvSpPr/>
           <p:nvPr/>
         </p:nvSpPr>
         <p:spPr>
           <a:xfrm>
-            <a:off x="6324447" y="1508760"/>
+            <a:off x="6324447" y="2286000"/>
             <a:ext cx="5227167" cy="502920"/>
           </a:xfrm>
           <a:prstGeom prst="rect">
@@ -6721,13 +6907,13 @@
       </p:sp>
       <p:sp>
         <p:nvSpPr>
-          <p:cNvPr id="13" name="TextBox 12"/>
+          <p:cNvPr id="14" name="TextBox 13"/>
           <p:cNvSpPr txBox="1"/>
           <p:nvPr/>
         </p:nvSpPr>
         <p:spPr>
           <a:xfrm>
-            <a:off x="6461607" y="1508760"/>
+            <a:off x="6461607" y="2286000"/>
             <a:ext cx="4952847" cy="502920"/>
           </a:xfrm>
           <a:prstGeom prst="rect">
@@ -6755,14 +6941,14 @@
       </p:sp>
       <p:sp>
         <p:nvSpPr>
-          <p:cNvPr id="14" name="TextBox 13"/>
+          <p:cNvPr id="15" name="TextBox 14"/>
           <p:cNvSpPr txBox="1"/>
           <p:nvPr/>
         </p:nvSpPr>
         <p:spPr>
           <a:xfrm>
-            <a:off x="6415887" y="2194560"/>
-            <a:ext cx="5044287" cy="3840480"/>
+            <a:off x="6415887" y="2971800"/>
+            <a:ext cx="5044287" cy="3063240"/>
           </a:xfrm>
           <a:prstGeom prst="rect">
             <a:avLst/>
@@ -6777,11 +6963,11 @@
           <a:p>
             <a:pPr>
               <a:spcAft>
-                <a:spcPts val="1400"/>
+                <a:spcPts val="1000"/>
               </a:spcAft>
             </a:pPr>
             <a:r>
-              <a:rPr sz="1700" b="1" i="0">
+              <a:rPr sz="1450" b="1" i="0">
                 <a:solidFill>
                   <a:srgbClr val="F0A500"/>
                 </a:solidFill>
@@ -6790,23 +6976,23 @@
               <a:t>•  </a:t>
             </a:r>
             <a:r>
-              <a:rPr sz="1700" b="0" i="0">
+              <a:rPr sz="1450" b="0" i="0">
                 <a:solidFill>
                   <a:srgbClr val="FFFFFF"/>
                 </a:solidFill>
                 <a:latin typeface="Calibri"/>
               </a:rPr>
-              <a:t>Per-channel asymmetric INT8 quantization</a:t>
+              <a:t>It reproduces the per-channel asymmetric INT8 quantization formula exactly, including the clamp to the signed INT8 range.</a:t>
             </a:r>
           </a:p>
           <a:p>
             <a:pPr>
               <a:spcAft>
-                <a:spcPts val="1400"/>
+                <a:spcPts val="1000"/>
               </a:spcAft>
             </a:pPr>
             <a:r>
-              <a:rPr sz="1700" b="1" i="0">
+              <a:rPr sz="1450" b="1" i="0">
                 <a:solidFill>
                   <a:srgbClr val="F0A500"/>
                 </a:solidFill>
@@ -6815,23 +7001,23 @@
               <a:t>•  </a:t>
             </a:r>
             <a:r>
-              <a:rPr sz="1700" b="0" i="0">
+              <a:rPr sz="1450" b="0" i="0">
                 <a:solidFill>
                   <a:srgbClr val="FFFFFF"/>
                 </a:solidFill>
                 <a:latin typeface="Calibri"/>
               </a:rPr>
-              <a:t>Arithmetic right-shift via Python int (arbitrary precision, no int64 overflow)</a:t>
+              <a:t>The arithmetic right-shift is implemented using Python's arbitrary-precision integers, avoiding the int64 overflow bugs a naive implementation would introduce.</a:t>
             </a:r>
           </a:p>
           <a:p>
             <a:pPr>
               <a:spcAft>
-                <a:spcPts val="1400"/>
+                <a:spcPts val="1000"/>
               </a:spcAft>
             </a:pPr>
             <a:r>
-              <a:rPr sz="1700" b="1" i="0">
+              <a:rPr sz="1450" b="1" i="0">
                 <a:solidFill>
                   <a:srgbClr val="F0A500"/>
                 </a:solidFill>
@@ -6840,13 +7026,13 @@
               <a:t>•  </a:t>
             </a:r>
             <a:r>
-              <a:rPr sz="1700" b="0" i="0">
+              <a:rPr sz="1450" b="0" i="0">
                 <a:solidFill>
                   <a:srgbClr val="FFFFFF"/>
                 </a:solidFill>
                 <a:latin typeface="Calibri"/>
               </a:rPr>
-              <a:t>Matches quant_unit.sv formula exactly</a:t>
+              <a:t>This model matches quant_unit.sv's formula, including the 49-bit intermediate product width, precisely.</a:t>
             </a:r>
           </a:p>
         </p:txBody>
@@ -7160,7 +7346,46 @@
         <p:spPr>
           <a:xfrm>
             <a:off x="640080" y="1508760"/>
-            <a:ext cx="2651760" cy="475488"/>
+            <a:ext cx="10911535" cy="777240"/>
+          </a:xfrm>
+          <a:prstGeom prst="rect">
+            <a:avLst/>
+          </a:prstGeom>
+          <a:noFill/>
+        </p:spPr>
+        <p:txBody>
+          <a:bodyPr wrap="square" lIns="0" rIns="0" tIns="0" bIns="0">
+            <a:noAutofit/>
+          </a:bodyPr>
+          <a:lstStyle/>
+          <a:p>
+            <a:pPr>
+              <a:lnSpc>
+                <a:spcPct val="115000"/>
+              </a:lnSpc>
+            </a:pPr>
+            <a:r>
+              <a:rPr sz="1400" b="0" i="0">
+                <a:solidFill>
+                  <a:srgbClr val="C7C9D9"/>
+                </a:solidFill>
+                <a:latin typeface="Calibri"/>
+              </a:rPr>
+              <a:t>Test count grew steadily and monotonically across all 19 development sessions, because each new pipeline stage shipped with its own dedicated pytest coverage before the project moved on. The chart below shows that growth trajectory — every session added tests, and none of the 131 final tests have ever failed.</a:t>
+            </a:r>
+          </a:p>
+        </p:txBody>
+      </p:sp>
+      <p:sp>
+        <p:nvSpPr>
+          <p:cNvPr id="10" name="TextBox 9"/>
+          <p:cNvSpPr txBox="1"/>
+          <p:nvPr/>
+        </p:nvSpPr>
+        <p:spPr>
+          <a:xfrm>
+            <a:off x="640080" y="2377440"/>
+            <a:ext cx="2651760" cy="384048"/>
           </a:xfrm>
           <a:prstGeom prst="rect">
             <a:avLst/>
@@ -7187,14 +7412,14 @@
       </p:sp>
       <p:sp>
         <p:nvSpPr>
-          <p:cNvPr id="10" name="Rectangle 9"/>
+          <p:cNvPr id="11" name="Rectangle 10"/>
           <p:cNvSpPr/>
           <p:nvPr/>
         </p:nvSpPr>
         <p:spPr>
           <a:xfrm>
-            <a:off x="3474720" y="1581912"/>
-            <a:ext cx="1817547" cy="329184"/>
+            <a:off x="3474720" y="2450592"/>
+            <a:ext cx="1817547" cy="237744"/>
           </a:xfrm>
           <a:prstGeom prst="rect">
             <a:avLst/>
@@ -7233,14 +7458,14 @@
       </p:sp>
       <p:sp>
         <p:nvSpPr>
-          <p:cNvPr id="11" name="TextBox 10"/>
+          <p:cNvPr id="12" name="TextBox 11"/>
           <p:cNvSpPr txBox="1"/>
           <p:nvPr/>
         </p:nvSpPr>
         <p:spPr>
           <a:xfrm>
-            <a:off x="5401995" y="1508760"/>
-            <a:ext cx="1463040" cy="475488"/>
+            <a:off x="5401995" y="2377440"/>
+            <a:ext cx="1463040" cy="384048"/>
           </a:xfrm>
           <a:prstGeom prst="rect">
             <a:avLst/>
@@ -7267,14 +7492,14 @@
       </p:sp>
       <p:sp>
         <p:nvSpPr>
-          <p:cNvPr id="12" name="TextBox 11"/>
+          <p:cNvPr id="13" name="TextBox 12"/>
           <p:cNvSpPr txBox="1"/>
           <p:nvPr/>
         </p:nvSpPr>
         <p:spPr>
           <a:xfrm>
-            <a:off x="640080" y="2057400"/>
-            <a:ext cx="2651760" cy="475488"/>
+            <a:off x="640080" y="2834640"/>
+            <a:ext cx="2651760" cy="384048"/>
           </a:xfrm>
           <a:prstGeom prst="rect">
             <a:avLst/>
@@ -7310,14 +7535,14 @@
       </p:sp>
       <p:sp>
         <p:nvSpPr>
-          <p:cNvPr id="13" name="Rectangle 12"/>
+          <p:cNvPr id="14" name="Rectangle 13"/>
           <p:cNvSpPr/>
           <p:nvPr/>
         </p:nvSpPr>
         <p:spPr>
           <a:xfrm>
-            <a:off x="3474720" y="2130552"/>
-            <a:ext cx="2574859" cy="329184"/>
+            <a:off x="3474720" y="2907792"/>
+            <a:ext cx="2574859" cy="237744"/>
           </a:xfrm>
           <a:prstGeom prst="rect">
             <a:avLst/>
@@ -7356,14 +7581,14 @@
       </p:sp>
       <p:sp>
         <p:nvSpPr>
-          <p:cNvPr id="14" name="TextBox 13"/>
+          <p:cNvPr id="15" name="TextBox 14"/>
           <p:cNvSpPr txBox="1"/>
           <p:nvPr/>
         </p:nvSpPr>
         <p:spPr>
           <a:xfrm>
-            <a:off x="6159307" y="2057400"/>
-            <a:ext cx="1463040" cy="475488"/>
+            <a:off x="6159307" y="2834640"/>
+            <a:ext cx="1463040" cy="384048"/>
           </a:xfrm>
           <a:prstGeom prst="rect">
             <a:avLst/>
@@ -7390,14 +7615,14 @@
       </p:sp>
       <p:sp>
         <p:nvSpPr>
-          <p:cNvPr id="15" name="TextBox 14"/>
+          <p:cNvPr id="16" name="TextBox 15"/>
           <p:cNvSpPr txBox="1"/>
           <p:nvPr/>
         </p:nvSpPr>
         <p:spPr>
           <a:xfrm>
-            <a:off x="640080" y="2606040"/>
-            <a:ext cx="2651760" cy="475488"/>
+            <a:off x="640080" y="3291840"/>
+            <a:ext cx="2651760" cy="384048"/>
           </a:xfrm>
           <a:prstGeom prst="rect">
             <a:avLst/>
@@ -7433,14 +7658,14 @@
       </p:sp>
       <p:sp>
         <p:nvSpPr>
-          <p:cNvPr id="16" name="Rectangle 15"/>
+          <p:cNvPr id="17" name="Rectangle 16"/>
           <p:cNvSpPr/>
           <p:nvPr/>
         </p:nvSpPr>
         <p:spPr>
           <a:xfrm>
-            <a:off x="3474720" y="2679192"/>
-            <a:ext cx="2827296" cy="329184"/>
+            <a:off x="3474720" y="3364992"/>
+            <a:ext cx="2827296" cy="237744"/>
           </a:xfrm>
           <a:prstGeom prst="rect">
             <a:avLst/>
@@ -7479,14 +7704,14 @@
       </p:sp>
       <p:sp>
         <p:nvSpPr>
-          <p:cNvPr id="17" name="TextBox 16"/>
+          <p:cNvPr id="18" name="TextBox 17"/>
           <p:cNvSpPr txBox="1"/>
           <p:nvPr/>
         </p:nvSpPr>
         <p:spPr>
           <a:xfrm>
-            <a:off x="6411744" y="2606040"/>
-            <a:ext cx="1463040" cy="475488"/>
+            <a:off x="6411744" y="3291840"/>
+            <a:ext cx="1463040" cy="384048"/>
           </a:xfrm>
           <a:prstGeom prst="rect">
             <a:avLst/>
@@ -7513,14 +7738,14 @@
       </p:sp>
       <p:sp>
         <p:nvSpPr>
-          <p:cNvPr id="18" name="TextBox 17"/>
+          <p:cNvPr id="19" name="TextBox 18"/>
           <p:cNvSpPr txBox="1"/>
           <p:nvPr/>
         </p:nvSpPr>
         <p:spPr>
           <a:xfrm>
-            <a:off x="640080" y="3154680"/>
-            <a:ext cx="2651760" cy="475488"/>
+            <a:off x="640080" y="3749040"/>
+            <a:ext cx="2651760" cy="384048"/>
           </a:xfrm>
           <a:prstGeom prst="rect">
             <a:avLst/>
@@ -7556,14 +7781,14 @@
       </p:sp>
       <p:sp>
         <p:nvSpPr>
-          <p:cNvPr id="19" name="Rectangle 18"/>
+          <p:cNvPr id="20" name="Rectangle 19"/>
           <p:cNvSpPr/>
           <p:nvPr/>
         </p:nvSpPr>
         <p:spPr>
           <a:xfrm>
-            <a:off x="3474720" y="3227832"/>
-            <a:ext cx="3231196" cy="329184"/>
+            <a:off x="3474720" y="3822192"/>
+            <a:ext cx="3231196" cy="237744"/>
           </a:xfrm>
           <a:prstGeom prst="rect">
             <a:avLst/>
@@ -7602,14 +7827,14 @@
       </p:sp>
       <p:sp>
         <p:nvSpPr>
-          <p:cNvPr id="20" name="TextBox 19"/>
+          <p:cNvPr id="21" name="TextBox 20"/>
           <p:cNvSpPr txBox="1"/>
           <p:nvPr/>
         </p:nvSpPr>
         <p:spPr>
           <a:xfrm>
-            <a:off x="6815644" y="3154680"/>
-            <a:ext cx="1463040" cy="475488"/>
+            <a:off x="6815644" y="3749040"/>
+            <a:ext cx="1463040" cy="384048"/>
           </a:xfrm>
           <a:prstGeom prst="rect">
             <a:avLst/>
@@ -7636,14 +7861,14 @@
       </p:sp>
       <p:sp>
         <p:nvSpPr>
-          <p:cNvPr id="21" name="TextBox 20"/>
+          <p:cNvPr id="22" name="TextBox 21"/>
           <p:cNvSpPr txBox="1"/>
           <p:nvPr/>
         </p:nvSpPr>
         <p:spPr>
           <a:xfrm>
-            <a:off x="640080" y="3703320"/>
-            <a:ext cx="2651760" cy="475488"/>
+            <a:off x="640080" y="4206240"/>
+            <a:ext cx="2651760" cy="384048"/>
           </a:xfrm>
           <a:prstGeom prst="rect">
             <a:avLst/>
@@ -7679,14 +7904,14 @@
       </p:sp>
       <p:sp>
         <p:nvSpPr>
-          <p:cNvPr id="22" name="Rectangle 21"/>
+          <p:cNvPr id="23" name="Rectangle 22"/>
           <p:cNvSpPr/>
           <p:nvPr/>
         </p:nvSpPr>
         <p:spPr>
           <a:xfrm>
-            <a:off x="3474720" y="3776472"/>
-            <a:ext cx="3988507" cy="329184"/>
+            <a:off x="3474720" y="4279392"/>
+            <a:ext cx="3988507" cy="237744"/>
           </a:xfrm>
           <a:prstGeom prst="rect">
             <a:avLst/>
@@ -7725,14 +7950,14 @@
       </p:sp>
       <p:sp>
         <p:nvSpPr>
-          <p:cNvPr id="23" name="TextBox 22"/>
+          <p:cNvPr id="24" name="TextBox 23"/>
           <p:cNvSpPr txBox="1"/>
           <p:nvPr/>
         </p:nvSpPr>
         <p:spPr>
           <a:xfrm>
-            <a:off x="7572955" y="3703320"/>
-            <a:ext cx="1463040" cy="475488"/>
+            <a:off x="7572955" y="4206240"/>
+            <a:ext cx="1463040" cy="384048"/>
           </a:xfrm>
           <a:prstGeom prst="rect">
             <a:avLst/>
@@ -7759,14 +7984,14 @@
       </p:sp>
       <p:sp>
         <p:nvSpPr>
-          <p:cNvPr id="24" name="TextBox 23"/>
+          <p:cNvPr id="25" name="TextBox 24"/>
           <p:cNvSpPr txBox="1"/>
           <p:nvPr/>
         </p:nvSpPr>
         <p:spPr>
           <a:xfrm>
-            <a:off x="640080" y="4251960"/>
-            <a:ext cx="2651760" cy="475488"/>
+            <a:off x="640080" y="4663440"/>
+            <a:ext cx="2651760" cy="384048"/>
           </a:xfrm>
           <a:prstGeom prst="rect">
             <a:avLst/>
@@ -7802,14 +8027,14 @@
       </p:sp>
       <p:sp>
         <p:nvSpPr>
-          <p:cNvPr id="25" name="Rectangle 24"/>
+          <p:cNvPr id="26" name="Rectangle 25"/>
           <p:cNvSpPr/>
           <p:nvPr/>
         </p:nvSpPr>
         <p:spPr>
           <a:xfrm>
-            <a:off x="3474720" y="4325112"/>
-            <a:ext cx="5351668" cy="329184"/>
+            <a:off x="3474720" y="4736592"/>
+            <a:ext cx="5351668" cy="237744"/>
           </a:xfrm>
           <a:prstGeom prst="rect">
             <a:avLst/>
@@ -7848,14 +8073,14 @@
       </p:sp>
       <p:sp>
         <p:nvSpPr>
-          <p:cNvPr id="26" name="TextBox 25"/>
+          <p:cNvPr id="27" name="TextBox 26"/>
           <p:cNvSpPr txBox="1"/>
           <p:nvPr/>
         </p:nvSpPr>
         <p:spPr>
           <a:xfrm>
-            <a:off x="8936116" y="4251960"/>
-            <a:ext cx="1463040" cy="475488"/>
+            <a:off x="8936116" y="4663440"/>
+            <a:ext cx="1463040" cy="384048"/>
           </a:xfrm>
           <a:prstGeom prst="rect">
             <a:avLst/>
@@ -7882,14 +8107,14 @@
       </p:sp>
       <p:sp>
         <p:nvSpPr>
-          <p:cNvPr id="27" name="TextBox 26"/>
+          <p:cNvPr id="28" name="TextBox 27"/>
           <p:cNvSpPr txBox="1"/>
           <p:nvPr/>
         </p:nvSpPr>
         <p:spPr>
           <a:xfrm>
-            <a:off x="640080" y="4800600"/>
-            <a:ext cx="2651760" cy="475488"/>
+            <a:off x="640080" y="5120640"/>
+            <a:ext cx="2651760" cy="384048"/>
           </a:xfrm>
           <a:prstGeom prst="rect">
             <a:avLst/>
@@ -7925,14 +8150,14 @@
       </p:sp>
       <p:sp>
         <p:nvSpPr>
-          <p:cNvPr id="28" name="Rectangle 27"/>
+          <p:cNvPr id="29" name="Rectangle 28"/>
           <p:cNvSpPr/>
           <p:nvPr/>
         </p:nvSpPr>
         <p:spPr>
           <a:xfrm>
-            <a:off x="3474720" y="4873752"/>
-            <a:ext cx="6058493" cy="329184"/>
+            <a:off x="3474720" y="5193792"/>
+            <a:ext cx="6058493" cy="237744"/>
           </a:xfrm>
           <a:prstGeom prst="rect">
             <a:avLst/>
@@ -7971,14 +8196,14 @@
       </p:sp>
       <p:sp>
         <p:nvSpPr>
-          <p:cNvPr id="29" name="TextBox 28"/>
+          <p:cNvPr id="30" name="TextBox 29"/>
           <p:cNvSpPr txBox="1"/>
           <p:nvPr/>
         </p:nvSpPr>
         <p:spPr>
           <a:xfrm>
-            <a:off x="9642941" y="4800600"/>
-            <a:ext cx="1463040" cy="475488"/>
+            <a:off x="9642941" y="5120640"/>
+            <a:ext cx="1463040" cy="384048"/>
           </a:xfrm>
           <a:prstGeom prst="rect">
             <a:avLst/>
@@ -8005,14 +8230,14 @@
       </p:sp>
       <p:sp>
         <p:nvSpPr>
-          <p:cNvPr id="30" name="TextBox 29"/>
+          <p:cNvPr id="31" name="TextBox 30"/>
           <p:cNvSpPr txBox="1"/>
           <p:nvPr/>
         </p:nvSpPr>
         <p:spPr>
           <a:xfrm>
-            <a:off x="640080" y="5349240"/>
-            <a:ext cx="2651760" cy="475488"/>
+            <a:off x="640080" y="5577840"/>
+            <a:ext cx="2651760" cy="384048"/>
           </a:xfrm>
           <a:prstGeom prst="rect">
             <a:avLst/>
@@ -8039,14 +8264,14 @@
       </p:sp>
       <p:sp>
         <p:nvSpPr>
-          <p:cNvPr id="31" name="Rectangle 30"/>
+          <p:cNvPr id="32" name="Rectangle 31"/>
           <p:cNvSpPr/>
           <p:nvPr/>
         </p:nvSpPr>
         <p:spPr>
           <a:xfrm>
-            <a:off x="3474720" y="5422392"/>
-            <a:ext cx="6613855" cy="329184"/>
+            <a:off x="3474720" y="5650992"/>
+            <a:ext cx="6613855" cy="237744"/>
           </a:xfrm>
           <a:prstGeom prst="rect">
             <a:avLst/>
@@ -8085,14 +8310,14 @@
       </p:sp>
       <p:sp>
         <p:nvSpPr>
-          <p:cNvPr id="32" name="TextBox 31"/>
+          <p:cNvPr id="33" name="TextBox 32"/>
           <p:cNvSpPr txBox="1"/>
           <p:nvPr/>
         </p:nvSpPr>
         <p:spPr>
           <a:xfrm>
-            <a:off x="10198303" y="5349240"/>
-            <a:ext cx="1463040" cy="475488"/>
+            <a:off x="10198303" y="5577840"/>
+            <a:ext cx="1463040" cy="384048"/>
           </a:xfrm>
           <a:prstGeom prst="rect">
             <a:avLst/>
@@ -8119,13 +8344,13 @@
       </p:sp>
       <p:sp>
         <p:nvSpPr>
-          <p:cNvPr id="33" name="TextBox 32"/>
+          <p:cNvPr id="34" name="TextBox 33"/>
           <p:cNvSpPr txBox="1"/>
           <p:nvPr/>
         </p:nvSpPr>
         <p:spPr>
           <a:xfrm>
-            <a:off x="640080" y="5989320"/>
+            <a:off x="640080" y="6126480"/>
             <a:ext cx="10911535" cy="457200"/>
           </a:xfrm>
           <a:prstGeom prst="rect">
@@ -8460,7 +8685,7 @@
         <p:spPr>
           <a:xfrm>
             <a:off x="640080" y="1508760"/>
-            <a:ext cx="10911535" cy="4892040"/>
+            <a:ext cx="10911535" cy="1417320"/>
           </a:xfrm>
           <a:prstGeom prst="rect">
             <a:avLst/>
@@ -8474,12 +8699,51 @@
           <a:lstStyle/>
           <a:p>
             <a:pPr>
+              <a:lnSpc>
+                <a:spcPct val="120000"/>
+              </a:lnSpc>
+            </a:pPr>
+            <a:r>
+              <a:rPr sz="1600" b="0" i="0">
+                <a:solidFill>
+                  <a:srgbClr val="FFFFFF"/>
+                </a:solidFill>
+                <a:latin typeface="Calibri"/>
+              </a:rPr>
+              <a:t>To build a realistic ground-truth dataset, we deliberately introduced 13 distinct bugs into copies of the golden RTL rather than relying on random mutation. Each fault targets a specific, plausible engineering mistake — the kind a human designer might actually make — so the resulting failure signatures are representative of real verification work.</a:t>
+            </a:r>
+          </a:p>
+        </p:txBody>
+      </p:sp>
+      <p:sp>
+        <p:nvSpPr>
+          <p:cNvPr id="10" name="TextBox 9"/>
+          <p:cNvSpPr txBox="1"/>
+          <p:nvPr/>
+        </p:nvSpPr>
+        <p:spPr>
+          <a:xfrm>
+            <a:off x="640080" y="2926080"/>
+            <a:ext cx="10911535" cy="3520440"/>
+          </a:xfrm>
+          <a:prstGeom prst="rect">
+            <a:avLst/>
+          </a:prstGeom>
+          <a:noFill/>
+        </p:spPr>
+        <p:txBody>
+          <a:bodyPr wrap="square" lIns="0" rIns="0" tIns="0" bIns="0">
+            <a:noAutofit/>
+          </a:bodyPr>
+          <a:lstStyle/>
+          <a:p>
+            <a:pPr>
               <a:spcAft>
-                <a:spcPts val="1800"/>
+                <a:spcPts val="900"/>
               </a:spcAft>
             </a:pPr>
             <a:r>
-              <a:rPr sz="1900" b="1" i="0">
+              <a:rPr sz="1400" b="1" i="0">
                 <a:solidFill>
                   <a:srgbClr val="F0A500"/>
                 </a:solidFill>
@@ -8488,7 +8752,7 @@
               <a:t>•  </a:t>
             </a:r>
             <a:r>
-              <a:rPr sz="1900" b="1" i="0">
+              <a:rPr sz="1400" b="1" i="0">
                 <a:solidFill>
                   <a:srgbClr val="F0A500"/>
                 </a:solidFill>
@@ -8497,23 +8761,23 @@
               <a:t>13 fault variants</a:t>
             </a:r>
             <a:r>
-              <a:rPr sz="1900" b="0" i="0">
+              <a:rPr sz="1400" b="0" i="0">
                 <a:solidFill>
                   <a:srgbClr val="FFFFFF"/>
                 </a:solidFill>
                 <a:latin typeface="Calibri"/>
               </a:rPr>
-              <a:t> across mac_array.sv and quant_unit.sv</a:t>
+              <a:t> span both mac_array.sv and quant_unit.sv, covering sign extension, accumulator width, loop boundaries, reset polarity, and quantization arithmetic.</a:t>
             </a:r>
           </a:p>
           <a:p>
             <a:pPr>
               <a:spcAft>
-                <a:spcPts val="1800"/>
+                <a:spcPts val="900"/>
               </a:spcAft>
             </a:pPr>
             <a:r>
-              <a:rPr sz="1900" b="1" i="0">
+              <a:rPr sz="1400" b="1" i="0">
                 <a:solidFill>
                   <a:srgbClr val="F0A500"/>
                 </a:solidFill>
@@ -8522,23 +8786,23 @@
               <a:t>•  </a:t>
             </a:r>
             <a:r>
-              <a:rPr sz="1900" b="0" i="0">
+              <a:rPr sz="1400" b="0" i="0">
                 <a:solidFill>
                   <a:srgbClr val="FFFFFF"/>
                 </a:solidFill>
                 <a:latin typeface="Calibri"/>
               </a:rPr>
-              <a:t>Each fault = exactly one targeted string substitution in the RTL</a:t>
+              <a:t>Each fault is exactly one targeted string substitution applied to the golden RTL, keeping the change minimal and auditable.</a:t>
             </a:r>
           </a:p>
           <a:p>
             <a:pPr>
               <a:spcAft>
-                <a:spcPts val="1800"/>
+                <a:spcPts val="900"/>
               </a:spcAft>
             </a:pPr>
             <a:r>
-              <a:rPr sz="1900" b="1" i="0">
+              <a:rPr sz="1400" b="1" i="0">
                 <a:solidFill>
                   <a:srgbClr val="F0A500"/>
                 </a:solidFill>
@@ -8547,23 +8811,23 @@
               <a:t>•  </a:t>
             </a:r>
             <a:r>
-              <a:rPr sz="1900" b="0" i="0">
+              <a:rPr sz="1400" b="0" i="0">
                 <a:solidFill>
                   <a:srgbClr val="FFFFFF"/>
                 </a:solidFill>
                 <a:latin typeface="Calibri"/>
               </a:rPr>
-              <a:t>scripts/generate_faults.py verifies exactly one diff hunk per file</a:t>
+              <a:t>scripts/generate_faults.py programmatically applies each substitution and asserts that exactly one diff hunk changed, preventing accidental multi-line edits.</a:t>
             </a:r>
           </a:p>
           <a:p>
             <a:pPr>
               <a:spcAft>
-                <a:spcPts val="1800"/>
+                <a:spcPts val="900"/>
               </a:spcAft>
             </a:pPr>
             <a:r>
-              <a:rPr sz="1900" b="1" i="0">
+              <a:rPr sz="1400" b="1" i="0">
                 <a:solidFill>
                   <a:srgbClr val="F0A500"/>
                 </a:solidFill>
@@ -8572,23 +8836,23 @@
               <a:t>•  </a:t>
             </a:r>
             <a:r>
-              <a:rPr sz="1900" b="0" i="0">
+              <a:rPr sz="1400" b="0" i="0">
                 <a:solidFill>
                   <a:srgbClr val="FFFFFF"/>
                 </a:solidFill>
                 <a:latin typeface="Calibri"/>
               </a:rPr>
-              <a:t>Software fault models in Python mirror each RTL change for DB population</a:t>
+              <a:t>Every RTL fault has a matching software fault model in Python, so the regression database can be populated without re-running Verilator for every seed.</a:t>
             </a:r>
           </a:p>
           <a:p>
             <a:pPr>
               <a:spcAft>
-                <a:spcPts val="1800"/>
+                <a:spcPts val="900"/>
               </a:spcAft>
             </a:pPr>
             <a:r>
-              <a:rPr sz="1900" b="1" i="0">
+              <a:rPr sz="1400" b="1" i="0">
                 <a:solidFill>
                   <a:srgbClr val="F0A500"/>
                 </a:solidFill>
@@ -8597,13 +8861,13 @@
               <a:t>•  </a:t>
             </a:r>
             <a:r>
-              <a:rPr sz="1900" b="0" i="0">
+              <a:rPr sz="1400" b="0" i="0">
                 <a:solidFill>
                   <a:srgbClr val="FFFFFF"/>
                 </a:solidFill>
                 <a:latin typeface="Calibri"/>
               </a:rPr>
-              <a:t>Two types: detectable faults (cause simulation failures) and latent faults (pass simulation)</a:t>
+              <a:t>Faults fall into two categories: detectable faults that cause simulation mismatches, and latent faults that pass simulation despite containing a real bug.</a:t>
             </a:r>
           </a:p>
         </p:txBody>
@@ -8908,17 +9172,56 @@
           </a:p>
         </p:txBody>
       </p:sp>
+      <p:sp>
+        <p:nvSpPr>
+          <p:cNvPr id="9" name="TextBox 8"/>
+          <p:cNvSpPr txBox="1"/>
+          <p:nvPr/>
+        </p:nvSpPr>
+        <p:spPr>
+          <a:xfrm>
+            <a:off x="640080" y="1508760"/>
+            <a:ext cx="10911535" cy="777240"/>
+          </a:xfrm>
+          <a:prstGeom prst="rect">
+            <a:avLst/>
+          </a:prstGeom>
+          <a:noFill/>
+        </p:spPr>
+        <p:txBody>
+          <a:bodyPr wrap="square" lIns="0" rIns="0" tIns="0" bIns="0">
+            <a:noAutofit/>
+          </a:bodyPr>
+          <a:lstStyle/>
+          <a:p>
+            <a:pPr>
+              <a:lnSpc>
+                <a:spcPct val="115000"/>
+              </a:lnSpc>
+            </a:pPr>
+            <a:r>
+              <a:rPr sz="1400" b="0" i="0">
+                <a:solidFill>
+                  <a:srgbClr val="C7C9D9"/>
+                </a:solidFill>
+                <a:latin typeface="Calibri"/>
+              </a:rPr>
+              <a:t>Nine of the thirteen fault variants live in mac_array.sv, each modifying one aspect of the accumulation datapath — sign handling, loop bounds, reset, or accumulator width. The Detectable column shows whether our N=4 INT8 test vectors are strong enough to expose the bug in simulation; two of the accumulator-width faults are not.</a:t>
+            </a:r>
+          </a:p>
+        </p:txBody>
+      </p:sp>
       <p:graphicFrame>
         <p:nvGraphicFramePr>
-          <p:cNvPr id="9" name="Table 8"/>
+          <p:cNvPr id="10" name="Table 9"/>
           <p:cNvGraphicFramePr>
             <a:graphicFrameLocks noGrp="1"/>
           </p:cNvGraphicFramePr>
           <p:nvPr/>
         </p:nvGraphicFramePr>
         <p:xfrm>
-          <a:off x="640080" y="1600200"/>
-          <a:ext cx="10972800" cy="4023360"/>
+          <a:off x="640080" y="2377440"/>
+          <a:ext cx="10972800" cy="3246120"/>
         </p:xfrm>
         <a:graphic>
           <a:graphicData uri="http://schemas.openxmlformats.org/drawingml/2006/table">
@@ -8932,7 +9235,7 @@
                 <a:gridCol w="3291840"/>
                 <a:gridCol w="2011680"/>
               </a:tblGrid>
-              <a:tr h="402336">
+              <a:tr h="324612">
                 <a:tc>
                   <a:txBody>
                     <a:bodyPr wrap="square"/>
@@ -9026,7 +9329,7 @@
                   </a:tcPr>
                 </a:tc>
               </a:tr>
-              <a:tr h="402336">
+              <a:tr h="324612">
                 <a:tc>
                   <a:txBody>
                     <a:bodyPr wrap="square"/>
@@ -9120,7 +9423,7 @@
                   </a:tcPr>
                 </a:tc>
               </a:tr>
-              <a:tr h="402336">
+              <a:tr h="324612">
                 <a:tc>
                   <a:txBody>
                     <a:bodyPr wrap="square"/>
@@ -9214,7 +9517,7 @@
                   </a:tcPr>
                 </a:tc>
               </a:tr>
-              <a:tr h="402336">
+              <a:tr h="324612">
                 <a:tc>
                   <a:txBody>
                     <a:bodyPr wrap="square"/>
@@ -9308,7 +9611,7 @@
                   </a:tcPr>
                 </a:tc>
               </a:tr>
-              <a:tr h="402336">
+              <a:tr h="324612">
                 <a:tc>
                   <a:txBody>
                     <a:bodyPr wrap="square"/>
@@ -9402,7 +9705,7 @@
                   </a:tcPr>
                 </a:tc>
               </a:tr>
-              <a:tr h="402336">
+              <a:tr h="324612">
                 <a:tc>
                   <a:txBody>
                     <a:bodyPr wrap="square"/>
@@ -9496,7 +9799,7 @@
                   </a:tcPr>
                 </a:tc>
               </a:tr>
-              <a:tr h="402336">
+              <a:tr h="324612">
                 <a:tc>
                   <a:txBody>
                     <a:bodyPr wrap="square"/>
@@ -9590,7 +9893,7 @@
                   </a:tcPr>
                 </a:tc>
               </a:tr>
-              <a:tr h="402336">
+              <a:tr h="324612">
                 <a:tc>
                   <a:txBody>
                     <a:bodyPr wrap="square"/>
@@ -9684,7 +9987,7 @@
                   </a:tcPr>
                 </a:tc>
               </a:tr>
-              <a:tr h="402336">
+              <a:tr h="324612">
                 <a:tc>
                   <a:txBody>
                     <a:bodyPr wrap="square"/>
@@ -9778,7 +10081,7 @@
                   </a:tcPr>
                 </a:tc>
               </a:tr>
-              <a:tr h="402336">
+              <a:tr h="324612">
                 <a:tc>
                   <a:txBody>
                     <a:bodyPr wrap="square"/>
@@ -10176,17 +10479,56 @@
           </a:p>
         </p:txBody>
       </p:sp>
+      <p:sp>
+        <p:nvSpPr>
+          <p:cNvPr id="9" name="TextBox 8"/>
+          <p:cNvSpPr txBox="1"/>
+          <p:nvPr/>
+        </p:nvSpPr>
+        <p:spPr>
+          <a:xfrm>
+            <a:off x="640080" y="1508760"/>
+            <a:ext cx="10911535" cy="777240"/>
+          </a:xfrm>
+          <a:prstGeom prst="rect">
+            <a:avLst/>
+          </a:prstGeom>
+          <a:noFill/>
+        </p:spPr>
+        <p:txBody>
+          <a:bodyPr wrap="square" lIns="0" rIns="0" tIns="0" bIns="0">
+            <a:noAutofit/>
+          </a:bodyPr>
+          <a:lstStyle/>
+          <a:p>
+            <a:pPr>
+              <a:lnSpc>
+                <a:spcPct val="115000"/>
+              </a:lnSpc>
+            </a:pPr>
+            <a:r>
+              <a:rPr sz="1400" b="0" i="0">
+                <a:solidFill>
+                  <a:srgbClr val="C7C9D9"/>
+                </a:solidFill>
+                <a:latin typeface="Calibri"/>
+              </a:rPr>
+              <a:t>The remaining four fault variants target quant_unit.sv, each corrupting one term of the per-channel quantization formula — reset, shift, clamping, or zero-point sign. Three of the four are only 'Partially' detectable because they corrupt output values within a narrow range that not every test vector will land on.</a:t>
+            </a:r>
+          </a:p>
+        </p:txBody>
+      </p:sp>
       <p:graphicFrame>
         <p:nvGraphicFramePr>
-          <p:cNvPr id="9" name="Table 8"/>
+          <p:cNvPr id="10" name="Table 9"/>
           <p:cNvGraphicFramePr>
             <a:graphicFrameLocks noGrp="1"/>
           </p:cNvGraphicFramePr>
           <p:nvPr/>
         </p:nvGraphicFramePr>
         <p:xfrm>
-          <a:off x="640080" y="1737360"/>
-          <a:ext cx="10972800" cy="2103120"/>
+          <a:off x="640080" y="2377440"/>
+          <a:ext cx="10972800" cy="1463040"/>
         </p:xfrm>
         <a:graphic>
           <a:graphicData uri="http://schemas.openxmlformats.org/drawingml/2006/table">
@@ -10200,7 +10542,7 @@
                 <a:gridCol w="3108960"/>
                 <a:gridCol w="1828800"/>
               </a:tblGrid>
-              <a:tr h="420624">
+              <a:tr h="292608">
                 <a:tc>
                   <a:txBody>
                     <a:bodyPr wrap="square"/>
@@ -10294,7 +10636,7 @@
                   </a:tcPr>
                 </a:tc>
               </a:tr>
-              <a:tr h="420624">
+              <a:tr h="292608">
                 <a:tc>
                   <a:txBody>
                     <a:bodyPr wrap="square"/>
@@ -10302,7 +10644,7 @@
                     <a:p>
                       <a:pPr algn="l"/>
                       <a:r>
-                        <a:rPr sz="1400" b="0" i="0">
+                        <a:rPr sz="1300" b="0" i="0">
                           <a:solidFill>
                             <a:srgbClr val="FFFFFF"/>
                           </a:solidFill>
@@ -10325,7 +10667,7 @@
                     <a:p>
                       <a:pPr algn="l"/>
                       <a:r>
-                        <a:rPr sz="1400" b="0" i="0">
+                        <a:rPr sz="1300" b="0" i="0">
                           <a:solidFill>
                             <a:srgbClr val="FFFFFF"/>
                           </a:solidFill>
@@ -10348,7 +10690,7 @@
                     <a:p>
                       <a:pPr algn="l"/>
                       <a:r>
-                        <a:rPr sz="1400" b="0" i="0">
+                        <a:rPr sz="1300" b="0" i="0">
                           <a:solidFill>
                             <a:srgbClr val="FFFFFF"/>
                           </a:solidFill>
@@ -10371,7 +10713,7 @@
                     <a:p>
                       <a:pPr algn="l"/>
                       <a:r>
-                        <a:rPr sz="1400" b="0" i="0">
+                        <a:rPr sz="1300" b="0" i="0">
                           <a:solidFill>
                             <a:srgbClr val="FFFFFF"/>
                           </a:solidFill>
@@ -10388,7 +10730,7 @@
                   </a:tcPr>
                 </a:tc>
               </a:tr>
-              <a:tr h="420624">
+              <a:tr h="292608">
                 <a:tc>
                   <a:txBody>
                     <a:bodyPr wrap="square"/>
@@ -10396,7 +10738,7 @@
                     <a:p>
                       <a:pPr algn="l"/>
                       <a:r>
-                        <a:rPr sz="1400" b="0" i="0">
+                        <a:rPr sz="1300" b="0" i="0">
                           <a:solidFill>
                             <a:srgbClr val="FFFFFF"/>
                           </a:solidFill>
@@ -10419,7 +10761,7 @@
                     <a:p>
                       <a:pPr algn="l"/>
                       <a:r>
-                        <a:rPr sz="1400" b="0" i="0">
+                        <a:rPr sz="1300" b="0" i="0">
                           <a:solidFill>
                             <a:srgbClr val="FFFFFF"/>
                           </a:solidFill>
@@ -10442,7 +10784,7 @@
                     <a:p>
                       <a:pPr algn="l"/>
                       <a:r>
-                        <a:rPr sz="1400" b="0" i="0">
+                        <a:rPr sz="1300" b="0" i="0">
                           <a:solidFill>
                             <a:srgbClr val="FFFFFF"/>
                           </a:solidFill>
@@ -10465,7 +10807,7 @@
                     <a:p>
                       <a:pPr algn="l"/>
                       <a:r>
-                        <a:rPr sz="1400" b="1" i="0">
+                        <a:rPr sz="1300" b="1" i="0">
                           <a:solidFill>
                             <a:srgbClr val="6F9CC4"/>
                           </a:solidFill>
@@ -10482,7 +10824,7 @@
                   </a:tcPr>
                 </a:tc>
               </a:tr>
-              <a:tr h="420624">
+              <a:tr h="292608">
                 <a:tc>
                   <a:txBody>
                     <a:bodyPr wrap="square"/>
@@ -10490,7 +10832,7 @@
                     <a:p>
                       <a:pPr algn="l"/>
                       <a:r>
-                        <a:rPr sz="1400" b="0" i="0">
+                        <a:rPr sz="1300" b="0" i="0">
                           <a:solidFill>
                             <a:srgbClr val="FFFFFF"/>
                           </a:solidFill>
@@ -10513,7 +10855,7 @@
                     <a:p>
                       <a:pPr algn="l"/>
                       <a:r>
-                        <a:rPr sz="1400" b="0" i="0">
+                        <a:rPr sz="1300" b="0" i="0">
                           <a:solidFill>
                             <a:srgbClr val="FFFFFF"/>
                           </a:solidFill>
@@ -10536,7 +10878,7 @@
                     <a:p>
                       <a:pPr algn="l"/>
                       <a:r>
-                        <a:rPr sz="1400" b="0" i="0">
+                        <a:rPr sz="1300" b="0" i="0">
                           <a:solidFill>
                             <a:srgbClr val="FFFFFF"/>
                           </a:solidFill>
@@ -10559,7 +10901,7 @@
                     <a:p>
                       <a:pPr algn="l"/>
                       <a:r>
-                        <a:rPr sz="1400" b="1" i="0">
+                        <a:rPr sz="1300" b="1" i="0">
                           <a:solidFill>
                             <a:srgbClr val="6F9CC4"/>
                           </a:solidFill>
@@ -10576,7 +10918,7 @@
                   </a:tcPr>
                 </a:tc>
               </a:tr>
-              <a:tr h="420624">
+              <a:tr h="292608">
                 <a:tc>
                   <a:txBody>
                     <a:bodyPr wrap="square"/>
@@ -10584,7 +10926,7 @@
                     <a:p>
                       <a:pPr algn="l"/>
                       <a:r>
-                        <a:rPr sz="1400" b="0" i="0">
+                        <a:rPr sz="1300" b="0" i="0">
                           <a:solidFill>
                             <a:srgbClr val="FFFFFF"/>
                           </a:solidFill>
@@ -10607,7 +10949,7 @@
                     <a:p>
                       <a:pPr algn="l"/>
                       <a:r>
-                        <a:rPr sz="1400" b="0" i="0">
+                        <a:rPr sz="1300" b="0" i="0">
                           <a:solidFill>
                             <a:srgbClr val="FFFFFF"/>
                           </a:solidFill>
@@ -10630,7 +10972,7 @@
                     <a:p>
                       <a:pPr algn="l"/>
                       <a:r>
-                        <a:rPr sz="1400" b="0" i="0">
+                        <a:rPr sz="1300" b="0" i="0">
                           <a:solidFill>
                             <a:srgbClr val="FFFFFF"/>
                           </a:solidFill>
@@ -10653,7 +10995,7 @@
                     <a:p>
                       <a:pPr algn="l"/>
                       <a:r>
-                        <a:rPr sz="1400" b="1" i="0">
+                        <a:rPr sz="1300" b="1" i="0">
                           <a:solidFill>
                             <a:srgbClr val="6F9CC4"/>
                           </a:solidFill>
@@ -10676,7 +11018,7 @@
       </p:graphicFrame>
       <p:sp>
         <p:nvSpPr>
-          <p:cNvPr id="10" name="TextBox 9"/>
+          <p:cNvPr id="11" name="TextBox 10"/>
           <p:cNvSpPr txBox="1"/>
           <p:nvPr/>
         </p:nvSpPr>
@@ -11017,7 +11359,7 @@
         <p:spPr>
           <a:xfrm>
             <a:off x="640080" y="1508760"/>
-            <a:ext cx="10911535" cy="4892040"/>
+            <a:ext cx="10911535" cy="1737360"/>
           </a:xfrm>
           <a:prstGeom prst="rect">
             <a:avLst/>
@@ -11031,12 +11373,69 @@
           <a:lstStyle/>
           <a:p>
             <a:pPr>
+              <a:lnSpc>
+                <a:spcPct val="120000"/>
+              </a:lnSpc>
+            </a:pPr>
+            <a:r>
+              <a:rPr sz="1600" b="0" i="0">
+                <a:solidFill>
+                  <a:srgbClr val="FFFFFF"/>
+                </a:solidFill>
+                <a:latin typeface="Calibri"/>
+              </a:rPr>
+              <a:t>Hardware verification is the most time-consuming phase of chip development, consuming 60-</a:t>
+            </a:r>
+            <a:r>
+              <a:rPr sz="1600" b="1" i="0">
+                <a:solidFill>
+                  <a:srgbClr val="F0A500"/>
+                </a:solidFill>
+                <a:latin typeface="Calibri"/>
+              </a:rPr>
+              <a:t>70%</a:t>
+            </a:r>
+            <a:r>
+              <a:rPr sz="1600" b="0" i="0">
+                <a:solidFill>
+                  <a:srgbClr val="FFFFFF"/>
+                </a:solidFill>
+                <a:latin typeface="Calibri"/>
+              </a:rPr>
+              <a:t> of total engineering effort. When a simulation run fails, a verification engineer must manually read hundreds of log lines, form a hypothesis about the root cause, run follow-up directed tests, and document findings — a process that takes 45 minutes per failure cluster on average. As neural network accelerators grow more complex, this bottleneck becomes unsustainable.</a:t>
+            </a:r>
+          </a:p>
+        </p:txBody>
+      </p:sp>
+      <p:sp>
+        <p:nvSpPr>
+          <p:cNvPr id="10" name="TextBox 9"/>
+          <p:cNvSpPr txBox="1"/>
+          <p:nvPr/>
+        </p:nvSpPr>
+        <p:spPr>
+          <a:xfrm>
+            <a:off x="640080" y="3246120"/>
+            <a:ext cx="10911535" cy="3200400"/>
+          </a:xfrm>
+          <a:prstGeom prst="rect">
+            <a:avLst/>
+          </a:prstGeom>
+          <a:noFill/>
+        </p:spPr>
+        <p:txBody>
+          <a:bodyPr wrap="square" lIns="0" rIns="0" tIns="0" bIns="0">
+            <a:noAutofit/>
+          </a:bodyPr>
+          <a:lstStyle/>
+          <a:p>
+            <a:pPr>
               <a:spcAft>
-                <a:spcPts val="1800"/>
+                <a:spcPts val="1200"/>
               </a:spcAft>
             </a:pPr>
             <a:r>
-              <a:rPr sz="2000" b="1" i="0">
+              <a:rPr sz="1500" b="1" i="0">
                 <a:solidFill>
                   <a:srgbClr val="F0A500"/>
                 </a:solidFill>
@@ -11045,41 +11444,23 @@
               <a:t>•  </a:t>
             </a:r>
             <a:r>
-              <a:rPr sz="2000" b="0" i="0">
+              <a:rPr sz="1500" b="0" i="0">
                 <a:solidFill>
                   <a:srgbClr val="FFFFFF"/>
                 </a:solidFill>
                 <a:latin typeface="Calibri"/>
               </a:rPr>
-              <a:t>Verification costs 60-</a:t>
-            </a:r>
-            <a:r>
-              <a:rPr sz="2000" b="1" i="0">
-                <a:solidFill>
-                  <a:srgbClr val="F0A500"/>
-                </a:solidFill>
-                <a:latin typeface="Calibri"/>
-              </a:rPr>
-              <a:t>70%</a:t>
-            </a:r>
-            <a:r>
-              <a:rPr sz="2000" b="0" i="0">
-                <a:solidFill>
-                  <a:srgbClr val="FFFFFF"/>
-                </a:solidFill>
-                <a:latin typeface="Calibri"/>
-              </a:rPr>
-              <a:t> of total chip development time</a:t>
+              <a:t>A single tapeout cycle can generate millions of simulation failures, far more than any team of engineers can triage by hand.</a:t>
             </a:r>
           </a:p>
           <a:p>
             <a:pPr>
               <a:spcAft>
-                <a:spcPts val="1800"/>
+                <a:spcPts val="1200"/>
               </a:spcAft>
             </a:pPr>
             <a:r>
-              <a:rPr sz="2000" b="1" i="0">
+              <a:rPr sz="1500" b="1" i="0">
                 <a:solidFill>
                   <a:srgbClr val="F0A500"/>
                 </a:solidFill>
@@ -11088,23 +11469,23 @@
               <a:t>•  </a:t>
             </a:r>
             <a:r>
-              <a:rPr sz="2000" b="0" i="0">
+              <a:rPr sz="1500" b="0" i="0">
                 <a:solidFill>
                   <a:srgbClr val="FFFFFF"/>
                 </a:solidFill>
                 <a:latin typeface="Calibri"/>
               </a:rPr>
-              <a:t>A single chip has millions of simulation failures per tapeout cycle</a:t>
+              <a:t>Every hour spent manually correlating symptoms across logs, waveforms, and scoreboards is an hour not spent finding new bugs.</a:t>
             </a:r>
           </a:p>
           <a:p>
             <a:pPr>
               <a:spcAft>
-                <a:spcPts val="1800"/>
+                <a:spcPts val="1200"/>
               </a:spcAft>
             </a:pPr>
             <a:r>
-              <a:rPr sz="2000" b="1" i="0">
+              <a:rPr sz="1500" b="1" i="0">
                 <a:solidFill>
                   <a:srgbClr val="F0A500"/>
                 </a:solidFill>
@@ -11113,63 +11494,13 @@
               <a:t>•  </a:t>
             </a:r>
             <a:r>
-              <a:rPr sz="2000" b="0" i="0">
+              <a:rPr sz="1500" b="0" i="0">
                 <a:solidFill>
                   <a:srgbClr val="FFFFFF"/>
                 </a:solidFill>
                 <a:latin typeface="Calibri"/>
               </a:rPr>
-              <a:t>Engineers manually read logs, hypothesize root causes, run follow-up tests</a:t>
-            </a:r>
-          </a:p>
-          <a:p>
-            <a:pPr>
-              <a:spcAft>
-                <a:spcPts val="1800"/>
-              </a:spcAft>
-            </a:pPr>
-            <a:r>
-              <a:rPr sz="2000" b="1" i="0">
-                <a:solidFill>
-                  <a:srgbClr val="F0A500"/>
-                </a:solidFill>
-                <a:latin typeface="Calibri"/>
-              </a:rPr>
-              <a:t>•  </a:t>
-            </a:r>
-            <a:r>
-              <a:rPr sz="2000" b="0" i="0">
-                <a:solidFill>
-                  <a:srgbClr val="FFFFFF"/>
-                </a:solidFill>
-                <a:latin typeface="Calibri"/>
-              </a:rPr>
-              <a:t>Average 45 minutes per failure cluster for an experienced engineer</a:t>
-            </a:r>
-          </a:p>
-          <a:p>
-            <a:pPr>
-              <a:spcAft>
-                <a:spcPts val="1800"/>
-              </a:spcAft>
-            </a:pPr>
-            <a:r>
-              <a:rPr sz="2000" b="1" i="0">
-                <a:solidFill>
-                  <a:srgbClr val="F0A500"/>
-                </a:solidFill>
-                <a:latin typeface="Calibri"/>
-              </a:rPr>
-              <a:t>•  </a:t>
-            </a:r>
-            <a:r>
-              <a:rPr sz="2000" b="0" i="0">
-                <a:solidFill>
-                  <a:srgbClr val="FFFFFF"/>
-                </a:solidFill>
-                <a:latin typeface="Calibri"/>
-              </a:rPr>
-              <a:t>Bottleneck: expert-dependent, slow, error-prone, not scalable</a:t>
+              <a:t>The result is a verification bottleneck that is expert-dependent, slow to onboard new engineers into, and fundamentally unable to scale with design complexity.</a:t>
             </a:r>
           </a:p>
         </p:txBody>
@@ -11483,7 +11814,7 @@
         <p:spPr>
           <a:xfrm>
             <a:off x="640080" y="1508760"/>
-            <a:ext cx="10911535" cy="4892040"/>
+            <a:ext cx="10911535" cy="1965960"/>
           </a:xfrm>
           <a:prstGeom prst="rect">
             <a:avLst/>
@@ -11497,12 +11828,51 @@
           <a:lstStyle/>
           <a:p>
             <a:pPr>
+              <a:lnSpc>
+                <a:spcPct val="120000"/>
+              </a:lnSpc>
+            </a:pPr>
+            <a:r>
+              <a:rPr sz="1600" b="0" i="0">
+                <a:solidFill>
+                  <a:srgbClr val="FFFFFF"/>
+                </a:solidFill>
+                <a:latin typeface="Calibri"/>
+              </a:rPr>
+              <a:t>The most surprising finding of this project is that 33 out of 255 simulation records PASS despite containing injected RTL bugs. This happens because the accumulator narrowed to 20 or 24 bits can never overflow with 8-bit inputs and N=4 accumulation steps — the maximum possible sum is 64,516 which fits comfortably in both. A standard regression run would mark these as green checkmarks and the engineer would move on, never knowing the bug exists. Our system correctly identifies and flags all 33 as latent faults, recommending formal verification or larger test stimuli to expose them.</a:t>
+            </a:r>
+          </a:p>
+        </p:txBody>
+      </p:sp>
+      <p:sp>
+        <p:nvSpPr>
+          <p:cNvPr id="10" name="TextBox 9"/>
+          <p:cNvSpPr txBox="1"/>
+          <p:nvPr/>
+        </p:nvSpPr>
+        <p:spPr>
+          <a:xfrm>
+            <a:off x="640080" y="3474720"/>
+            <a:ext cx="10911535" cy="2971800"/>
+          </a:xfrm>
+          <a:prstGeom prst="rect">
+            <a:avLst/>
+          </a:prstGeom>
+          <a:noFill/>
+        </p:spPr>
+        <p:txBody>
+          <a:bodyPr wrap="square" lIns="0" rIns="0" tIns="0" bIns="0">
+            <a:noAutofit/>
+          </a:bodyPr>
+          <a:lstStyle/>
+          <a:p>
+            <a:pPr>
               <a:spcAft>
-                <a:spcPts val="1500"/>
+                <a:spcPts val="1000"/>
               </a:spcAft>
             </a:pPr>
             <a:r>
-              <a:rPr sz="1800" b="1" i="0">
+              <a:rPr sz="1450" b="1" i="0">
                 <a:solidFill>
                   <a:srgbClr val="F0A500"/>
                 </a:solidFill>
@@ -11511,41 +11881,41 @@
               <a:t>•  </a:t>
             </a:r>
             <a:r>
-              <a:rPr sz="1800" b="0" i="0">
+              <a:rPr sz="1450" b="0" i="0">
                 <a:solidFill>
                   <a:srgbClr val="FFFFFF"/>
                 </a:solidFill>
                 <a:latin typeface="Calibri"/>
               </a:rPr>
-              <a:t>33 out of </a:t>
-            </a:r>
-            <a:r>
-              <a:rPr sz="1800" b="1" i="0">
+              <a:t>The 33 latent passes break down as </a:t>
+            </a:r>
+            <a:r>
+              <a:rPr sz="1450" b="1" i="0">
                 <a:solidFill>
                   <a:srgbClr val="F0A500"/>
                 </a:solidFill>
                 <a:latin typeface="Calibri"/>
               </a:rPr>
-              <a:t>255 records</a:t>
-            </a:r>
-            <a:r>
-              <a:rPr sz="1800" b="0" i="0">
+              <a:t>12 records</a:t>
+            </a:r>
+            <a:r>
+              <a:rPr sz="1450" b="0" i="0">
                 <a:solidFill>
                   <a:srgbClr val="FFFFFF"/>
                 </a:solidFill>
                 <a:latin typeface="Calibri"/>
               </a:rPr>
-              <a:t> PASS simulation despite containing injected RTL bugs</a:t>
+              <a:t> for fault_acc_w24, 12 for fault_acc_w20, and 9 quant_unit latent records spread across three quantization faults.</a:t>
             </a:r>
           </a:p>
           <a:p>
             <a:pPr>
               <a:spcAft>
-                <a:spcPts val="1500"/>
+                <a:spcPts val="1000"/>
               </a:spcAft>
             </a:pPr>
             <a:r>
-              <a:rPr sz="1800" b="1" i="0">
+              <a:rPr sz="1450" b="1" i="0">
                 <a:solidFill>
                   <a:srgbClr val="F0A500"/>
                 </a:solidFill>
@@ -11554,23 +11924,23 @@
               <a:t>•  </a:t>
             </a:r>
             <a:r>
-              <a:rPr sz="1800" b="0" i="0">
+              <a:rPr sz="1450" b="0" i="0">
                 <a:solidFill>
                   <a:srgbClr val="FFFFFF"/>
                 </a:solidFill>
                 <a:latin typeface="Calibri"/>
               </a:rPr>
-              <a:t>Breakdown: fault_acc_w24 (12), fault_acc_w20 (12), 3 quant latent records (9)</a:t>
+              <a:t>Our clusterer catches every one of them with a single structural rule: any record where status is pass but the variant is not golden is automatically routed to the latent_fault cluster.</a:t>
             </a:r>
           </a:p>
           <a:p>
             <a:pPr>
               <a:spcAft>
-                <a:spcPts val="1500"/>
+                <a:spcPts val="1000"/>
               </a:spcAft>
             </a:pPr>
             <a:r>
-              <a:rPr sz="1800" b="1" i="0">
+              <a:rPr sz="1450" b="1" i="0">
                 <a:solidFill>
                   <a:srgbClr val="F0A500"/>
                 </a:solidFill>
@@ -11579,113 +11949,13 @@
               <a:t>•  </a:t>
             </a:r>
             <a:r>
-              <a:rPr sz="1800" b="0" i="0">
+              <a:rPr sz="1450" b="0" i="0">
                 <a:solidFill>
                   <a:srgbClr val="FFFFFF"/>
                 </a:solidFill>
                 <a:latin typeface="Calibri"/>
               </a:rPr>
-              <a:t>Why latent: max possible sum for N=4 INT8 is 64,516 — fits in 20 and 24 bits</a:t>
-            </a:r>
-          </a:p>
-          <a:p>
-            <a:pPr>
-              <a:spcAft>
-                <a:spcPts val="1500"/>
-              </a:spcAft>
-            </a:pPr>
-            <a:r>
-              <a:rPr sz="1800" b="1" i="0">
-                <a:solidFill>
-                  <a:srgbClr val="F0A500"/>
-                </a:solidFill>
-                <a:latin typeface="Calibri"/>
-              </a:rPr>
-              <a:t>•  </a:t>
-            </a:r>
-            <a:r>
-              <a:rPr sz="1800" b="0" i="0">
-                <a:solidFill>
-                  <a:srgbClr val="FFFFFF"/>
-                </a:solidFill>
-                <a:latin typeface="Calibri"/>
-              </a:rPr>
-              <a:t>Standard regression: engineer sees green checkmark, assumes RTL is correct</a:t>
-            </a:r>
-          </a:p>
-          <a:p>
-            <a:pPr>
-              <a:spcAft>
-                <a:spcPts val="1500"/>
-              </a:spcAft>
-            </a:pPr>
-            <a:r>
-              <a:rPr sz="1800" b="1" i="0">
-                <a:solidFill>
-                  <a:srgbClr val="F0A500"/>
-                </a:solidFill>
-                <a:latin typeface="Calibri"/>
-              </a:rPr>
-              <a:t>•  </a:t>
-            </a:r>
-            <a:r>
-              <a:rPr sz="1800" b="0" i="0">
-                <a:solidFill>
-                  <a:srgbClr val="FFFFFF"/>
-                </a:solidFill>
-                <a:latin typeface="Calibri"/>
-              </a:rPr>
-              <a:t>Our system: latent_fault cluster flags these as suspicious</a:t>
-            </a:r>
-          </a:p>
-          <a:p>
-            <a:pPr>
-              <a:spcAft>
-                <a:spcPts val="1500"/>
-              </a:spcAft>
-            </a:pPr>
-            <a:r>
-              <a:rPr sz="1800" b="1" i="0">
-                <a:solidFill>
-                  <a:srgbClr val="F0A500"/>
-                </a:solidFill>
-                <a:latin typeface="Calibri"/>
-              </a:rPr>
-              <a:t>•  </a:t>
-            </a:r>
-            <a:r>
-              <a:rPr sz="1800" b="0" i="0">
-                <a:solidFill>
-                  <a:srgbClr val="FFFFFF"/>
-                </a:solidFill>
-                <a:latin typeface="Calibri"/>
-              </a:rPr>
-              <a:t>Fix: increase N, use larger inputs, or apply formal verification</a:t>
-            </a:r>
-          </a:p>
-          <a:p>
-            <a:pPr>
-              <a:spcAft>
-                <a:spcPts val="1500"/>
-              </a:spcAft>
-            </a:pPr>
-            <a:r>
-              <a:rPr sz="1800" b="1" i="0">
-                <a:solidFill>
-                  <a:srgbClr val="F0A500"/>
-                </a:solidFill>
-                <a:latin typeface="Calibri"/>
-              </a:rPr>
-              <a:t>•  </a:t>
-            </a:r>
-            <a:r>
-              <a:rPr sz="1800" b="0" i="0">
-                <a:solidFill>
-                  <a:srgbClr val="FFFFFF"/>
-                </a:solidFill>
-                <a:latin typeface="Calibri"/>
-              </a:rPr>
-              <a:t>This is a REAL industry problem — latent bugs cause post-silicon failures</a:t>
+              <a:t>This is not a synthetic exercise — undetected latent bugs are exactly the mechanism by which real chips pass verification and then fail in the field.</a:t>
             </a:r>
           </a:p>
         </p:txBody>
@@ -11992,14 +12262,53 @@
       </p:sp>
       <p:sp>
         <p:nvSpPr>
-          <p:cNvPr id="9" name="Rectangle 8"/>
+          <p:cNvPr id="9" name="TextBox 8"/>
+          <p:cNvSpPr txBox="1"/>
+          <p:nvPr/>
+        </p:nvSpPr>
+        <p:spPr>
+          <a:xfrm>
+            <a:off x="640080" y="1508760"/>
+            <a:ext cx="10911535" cy="685800"/>
+          </a:xfrm>
+          <a:prstGeom prst="rect">
+            <a:avLst/>
+          </a:prstGeom>
+          <a:noFill/>
+        </p:spPr>
+        <p:txBody>
+          <a:bodyPr wrap="square" lIns="0" rIns="0" tIns="0" bIns="0">
+            <a:noAutofit/>
+          </a:bodyPr>
+          <a:lstStyle/>
+          <a:p>
+            <a:pPr>
+              <a:lnSpc>
+                <a:spcPct val="115000"/>
+              </a:lnSpc>
+            </a:pPr>
+            <a:r>
+              <a:rPr sz="1400" b="0" i="0">
+                <a:solidFill>
+                  <a:srgbClr val="C7C9D9"/>
+                </a:solidFill>
+                <a:latin typeface="Calibri"/>
+              </a:rPr>
+              <a:t>Every simulation run in this project — golden or faulty, passing or failing — appends exactly one JSON line to regression_db.jsonl, an append-only log that is never rewritten or edited in place. This single schema is what makes the entire downstream pipeline, from feature extraction to the dashboard, possible.</a:t>
+            </a:r>
+          </a:p>
+        </p:txBody>
+      </p:sp>
+      <p:sp>
+        <p:nvSpPr>
+          <p:cNvPr id="10" name="Rectangle 9"/>
           <p:cNvSpPr/>
           <p:nvPr/>
         </p:nvSpPr>
         <p:spPr>
           <a:xfrm>
-            <a:off x="640080" y="1508760"/>
-            <a:ext cx="6035040" cy="4206240"/>
+            <a:off x="640080" y="2286000"/>
+            <a:ext cx="6035040" cy="3429000"/>
           </a:xfrm>
           <a:prstGeom prst="rect">
             <a:avLst/>
@@ -12038,14 +12347,14 @@
       </p:sp>
       <p:sp>
         <p:nvSpPr>
-          <p:cNvPr id="10" name="TextBox 9"/>
+          <p:cNvPr id="11" name="TextBox 10"/>
           <p:cNvSpPr txBox="1"/>
           <p:nvPr/>
         </p:nvSpPr>
         <p:spPr>
           <a:xfrm>
-            <a:off x="868680" y="1691640"/>
-            <a:ext cx="5577840" cy="3840480"/>
+            <a:off x="868680" y="2468880"/>
+            <a:ext cx="5577840" cy="3154680"/>
           </a:xfrm>
           <a:prstGeom prst="rect">
             <a:avLst/>
@@ -12060,11 +12369,11 @@
           <a:p>
             <a:pPr>
               <a:spcAft>
-                <a:spcPts val="1000"/>
+                <a:spcPts val="900"/>
               </a:spcAft>
             </a:pPr>
             <a:r>
-              <a:rPr sz="1500" b="1" i="0">
+              <a:rPr sz="1400" b="1" i="0">
                 <a:solidFill>
                   <a:srgbClr val="F0A500"/>
                 </a:solidFill>
@@ -12073,7 +12382,7 @@
               <a:t>run_id</a:t>
             </a:r>
             <a:r>
-              <a:rPr sz="1400" b="0" i="0">
+              <a:rPr sz="1300" b="0" i="0">
                 <a:solidFill>
                   <a:srgbClr val="FFFFFF"/>
                 </a:solidFill>
@@ -12085,11 +12394,11 @@
           <a:p>
             <a:pPr>
               <a:spcAft>
-                <a:spcPts val="1000"/>
+                <a:spcPts val="900"/>
               </a:spcAft>
             </a:pPr>
             <a:r>
-              <a:rPr sz="1500" b="1" i="0">
+              <a:rPr sz="1400" b="1" i="0">
                 <a:solidFill>
                   <a:srgbClr val="F0A500"/>
                 </a:solidFill>
@@ -12098,7 +12407,7 @@
               <a:t>timestamp</a:t>
             </a:r>
             <a:r>
-              <a:rPr sz="1400" b="0" i="0">
+              <a:rPr sz="1300" b="0" i="0">
                 <a:solidFill>
                   <a:srgbClr val="FFFFFF"/>
                 </a:solidFill>
@@ -12110,11 +12419,11 @@
           <a:p>
             <a:pPr>
               <a:spcAft>
-                <a:spcPts val="1000"/>
+                <a:spcPts val="900"/>
               </a:spcAft>
             </a:pPr>
             <a:r>
-              <a:rPr sz="1500" b="1" i="0">
+              <a:rPr sz="1400" b="1" i="0">
                 <a:solidFill>
                   <a:srgbClr val="F0A500"/>
                 </a:solidFill>
@@ -12123,7 +12432,7 @@
               <a:t>dut</a:t>
             </a:r>
             <a:r>
-              <a:rPr sz="1400" b="0" i="0">
+              <a:rPr sz="1300" b="0" i="0">
                 <a:solidFill>
                   <a:srgbClr val="FFFFFF"/>
                 </a:solidFill>
@@ -12135,11 +12444,11 @@
           <a:p>
             <a:pPr>
               <a:spcAft>
-                <a:spcPts val="1000"/>
+                <a:spcPts val="900"/>
               </a:spcAft>
             </a:pPr>
             <a:r>
-              <a:rPr sz="1500" b="1" i="0">
+              <a:rPr sz="1400" b="1" i="0">
                 <a:solidFill>
                   <a:srgbClr val="F0A500"/>
                 </a:solidFill>
@@ -12148,7 +12457,7 @@
               <a:t>variant</a:t>
             </a:r>
             <a:r>
-              <a:rPr sz="1400" b="0" i="0">
+              <a:rPr sz="1300" b="0" i="0">
                 <a:solidFill>
                   <a:srgbClr val="FFFFFF"/>
                 </a:solidFill>
@@ -12160,11 +12469,11 @@
           <a:p>
             <a:pPr>
               <a:spcAft>
-                <a:spcPts val="1000"/>
+                <a:spcPts val="900"/>
               </a:spcAft>
             </a:pPr>
             <a:r>
-              <a:rPr sz="1500" b="1" i="0">
+              <a:rPr sz="1400" b="1" i="0">
                 <a:solidFill>
                   <a:srgbClr val="F0A500"/>
                 </a:solidFill>
@@ -12173,7 +12482,7 @@
               <a:t>config</a:t>
             </a:r>
             <a:r>
-              <a:rPr sz="1400" b="0" i="0">
+              <a:rPr sz="1300" b="0" i="0">
                 <a:solidFill>
                   <a:srgbClr val="FFFFFF"/>
                 </a:solidFill>
@@ -12185,11 +12494,11 @@
           <a:p>
             <a:pPr>
               <a:spcAft>
-                <a:spcPts val="1000"/>
+                <a:spcPts val="900"/>
               </a:spcAft>
             </a:pPr>
             <a:r>
-              <a:rPr sz="1500" b="1" i="0">
+              <a:rPr sz="1400" b="1" i="0">
                 <a:solidFill>
                   <a:srgbClr val="F0A500"/>
                 </a:solidFill>
@@ -12198,7 +12507,7 @@
               <a:t>test_name</a:t>
             </a:r>
             <a:r>
-              <a:rPr sz="1400" b="0" i="0">
+              <a:rPr sz="1300" b="0" i="0">
                 <a:solidFill>
                   <a:srgbClr val="FFFFFF"/>
                 </a:solidFill>
@@ -12210,11 +12519,11 @@
           <a:p>
             <a:pPr>
               <a:spcAft>
-                <a:spcPts val="1000"/>
+                <a:spcPts val="900"/>
               </a:spcAft>
             </a:pPr>
             <a:r>
-              <a:rPr sz="1500" b="1" i="0">
+              <a:rPr sz="1400" b="1" i="0">
                 <a:solidFill>
                   <a:srgbClr val="F0A500"/>
                 </a:solidFill>
@@ -12223,7 +12532,7 @@
               <a:t>status</a:t>
             </a:r>
             <a:r>
-              <a:rPr sz="1400" b="0" i="0">
+              <a:rPr sz="1300" b="0" i="0">
                 <a:solidFill>
                   <a:srgbClr val="FFFFFF"/>
                 </a:solidFill>
@@ -12235,11 +12544,11 @@
           <a:p>
             <a:pPr>
               <a:spcAft>
-                <a:spcPts val="1000"/>
+                <a:spcPts val="900"/>
               </a:spcAft>
             </a:pPr>
             <a:r>
-              <a:rPr sz="1500" b="1" i="0">
+              <a:rPr sz="1400" b="1" i="0">
                 <a:solidFill>
                   <a:srgbClr val="F0A500"/>
                 </a:solidFill>
@@ -12248,7 +12557,7 @@
               <a:t>mismatch_details</a:t>
             </a:r>
             <a:r>
-              <a:rPr sz="1400" b="0" i="0">
+              <a:rPr sz="1300" b="0" i="0">
                 <a:solidFill>
                   <a:srgbClr val="FFFFFF"/>
                 </a:solidFill>
@@ -12260,11 +12569,11 @@
           <a:p>
             <a:pPr>
               <a:spcAft>
-                <a:spcPts val="1000"/>
+                <a:spcPts val="900"/>
               </a:spcAft>
             </a:pPr>
             <a:r>
-              <a:rPr sz="1500" b="1" i="0">
+              <a:rPr sz="1400" b="1" i="0">
                 <a:solidFill>
                   <a:srgbClr val="F0A500"/>
                 </a:solidFill>
@@ -12273,7 +12582,7 @@
               <a:t/>
             </a:r>
             <a:r>
-              <a:rPr sz="1400" b="0" i="0">
+              <a:rPr sz="1300" b="0" i="0">
                 <a:solidFill>
                   <a:srgbClr val="FFFFFF"/>
                 </a:solidFill>
@@ -12286,14 +12595,14 @@
       </p:sp>
       <p:sp>
         <p:nvSpPr>
-          <p:cNvPr id="11" name="Rectangle 10"/>
+          <p:cNvPr id="12" name="Rectangle 11"/>
           <p:cNvSpPr/>
           <p:nvPr/>
         </p:nvSpPr>
         <p:spPr>
           <a:xfrm>
-            <a:off x="7040880" y="1508760"/>
-            <a:ext cx="4510735" cy="960120"/>
+            <a:off x="7040880" y="2286000"/>
+            <a:ext cx="4510735" cy="720090"/>
           </a:xfrm>
           <a:prstGeom prst="rect">
             <a:avLst/>
@@ -12323,12 +12632,12 @@
           </a:fontRef>
         </p:style>
         <p:txBody>
-          <a:bodyPr rtlCol="0" anchor="ctr" lIns="127000"/>
+          <a:bodyPr rtlCol="0" anchor="ctr" lIns="127000" rIns="127000" wrap="square"/>
           <a:lstStyle/>
           <a:p>
             <a:pPr algn="ctr"/>
             <a:r>
-              <a:rPr sz="2000" b="1" i="0">
+              <a:rPr sz="1900" b="1" i="0">
                 <a:solidFill>
                   <a:srgbClr val="F0A500"/>
                 </a:solidFill>
@@ -12339,7 +12648,7 @@
           </a:p>
           <a:p>
             <a:r>
-              <a:rPr sz="1200" b="0" i="0">
+              <a:rPr sz="1150" b="0" i="0">
                 <a:solidFill>
                   <a:srgbClr val="C7C9D9"/>
                 </a:solidFill>
@@ -12352,14 +12661,14 @@
       </p:sp>
       <p:sp>
         <p:nvSpPr>
-          <p:cNvPr id="12" name="Rectangle 11"/>
+          <p:cNvPr id="13" name="Rectangle 12"/>
           <p:cNvSpPr/>
           <p:nvPr/>
         </p:nvSpPr>
         <p:spPr>
           <a:xfrm>
-            <a:off x="7040880" y="2606040"/>
-            <a:ext cx="4510735" cy="960120"/>
+            <a:off x="7040880" y="3143250"/>
+            <a:ext cx="4510735" cy="720090"/>
           </a:xfrm>
           <a:prstGeom prst="rect">
             <a:avLst/>
@@ -12389,12 +12698,12 @@
           </a:fontRef>
         </p:style>
         <p:txBody>
-          <a:bodyPr rtlCol="0" anchor="ctr" lIns="127000"/>
+          <a:bodyPr rtlCol="0" anchor="ctr" lIns="127000" rIns="127000" wrap="square"/>
           <a:lstStyle/>
           <a:p>
             <a:pPr algn="ctr"/>
             <a:r>
-              <a:rPr sz="2000" b="1" i="0">
+              <a:rPr sz="1900" b="1" i="0">
                 <a:solidFill>
                   <a:srgbClr val="F0A500"/>
                 </a:solidFill>
@@ -12405,7 +12714,7 @@
           </a:p>
           <a:p>
             <a:r>
-              <a:rPr sz="1200" b="0" i="0">
+              <a:rPr sz="1150" b="0" i="0">
                 <a:solidFill>
                   <a:srgbClr val="C7C9D9"/>
                 </a:solidFill>
@@ -12418,14 +12727,14 @@
       </p:sp>
       <p:sp>
         <p:nvSpPr>
-          <p:cNvPr id="13" name="Rectangle 12"/>
+          <p:cNvPr id="14" name="Rectangle 13"/>
           <p:cNvSpPr/>
           <p:nvPr/>
         </p:nvSpPr>
         <p:spPr>
           <a:xfrm>
-            <a:off x="7040880" y="3703320"/>
-            <a:ext cx="4510735" cy="960120"/>
+            <a:off x="7040880" y="4000500"/>
+            <a:ext cx="4510735" cy="720090"/>
           </a:xfrm>
           <a:prstGeom prst="rect">
             <a:avLst/>
@@ -12455,12 +12764,12 @@
           </a:fontRef>
         </p:style>
         <p:txBody>
-          <a:bodyPr rtlCol="0" anchor="ctr" lIns="127000"/>
+          <a:bodyPr rtlCol="0" anchor="ctr" lIns="127000" rIns="127000" wrap="square"/>
           <a:lstStyle/>
           <a:p>
             <a:pPr algn="ctr"/>
             <a:r>
-              <a:rPr sz="2000" b="1" i="0">
+              <a:rPr sz="1900" b="1" i="0">
                 <a:solidFill>
                   <a:srgbClr val="F0A500"/>
                 </a:solidFill>
@@ -12471,7 +12780,7 @@
           </a:p>
           <a:p>
             <a:r>
-              <a:rPr sz="1200" b="0" i="0">
+              <a:rPr sz="1150" b="0" i="0">
                 <a:solidFill>
                   <a:srgbClr val="C7C9D9"/>
                 </a:solidFill>
@@ -12484,14 +12793,14 @@
       </p:sp>
       <p:sp>
         <p:nvSpPr>
-          <p:cNvPr id="14" name="Rectangle 13"/>
+          <p:cNvPr id="15" name="Rectangle 14"/>
           <p:cNvSpPr/>
           <p:nvPr/>
         </p:nvSpPr>
         <p:spPr>
           <a:xfrm>
-            <a:off x="7040880" y="4800600"/>
-            <a:ext cx="4510735" cy="960120"/>
+            <a:off x="7040880" y="4857750"/>
+            <a:ext cx="4510735" cy="720090"/>
           </a:xfrm>
           <a:prstGeom prst="rect">
             <a:avLst/>
@@ -12521,12 +12830,12 @@
           </a:fontRef>
         </p:style>
         <p:txBody>
-          <a:bodyPr rtlCol="0" anchor="ctr" lIns="127000"/>
+          <a:bodyPr rtlCol="0" anchor="ctr" lIns="127000" rIns="127000" wrap="square"/>
           <a:lstStyle/>
           <a:p>
             <a:pPr algn="ctr"/>
             <a:r>
-              <a:rPr sz="2000" b="1" i="0">
+              <a:rPr sz="1900" b="1" i="0">
                 <a:solidFill>
                   <a:srgbClr val="F0A500"/>
                 </a:solidFill>
@@ -12537,7 +12846,7 @@
           </a:p>
           <a:p>
             <a:r>
-              <a:rPr sz="1200" b="0" i="0">
+              <a:rPr sz="1150" b="0" i="0">
                 <a:solidFill>
                   <a:srgbClr val="C7C9D9"/>
                 </a:solidFill>
@@ -12872,167 +13181,201 @@
           <a:p>
             <a:pPr>
               <a:spcAft>
-                <a:spcPts val="1400"/>
+                <a:spcPts val="800"/>
               </a:spcAft>
             </a:pPr>
             <a:r>
-              <a:rPr sz="1700" b="1" i="0">
+              <a:rPr sz="1300" b="1" i="0">
                 <a:solidFill>
                   <a:srgbClr val="F0A500"/>
                 </a:solidFill>
                 <a:latin typeface="Calibri"/>
               </a:rPr>
-              <a:t>•  Identity:  </a:t>
-            </a:r>
-            <a:r>
-              <a:rPr sz="1700" b="0" i="0">
+              <a:t>•  </a:t>
+            </a:r>
+            <a:r>
+              <a:rPr sz="1300" b="0" i="0">
                 <a:solidFill>
                   <a:srgbClr val="FFFFFF"/>
                 </a:solidFill>
                 <a:latin typeface="Calibri"/>
               </a:rPr>
-              <a:t>run_id, dut, variant, test_name, status</a:t>
+              <a:t>Before any failure can be clustered or explained, it is first reduced to 13 structured features that capture everything relevant about the mismatch in a fixed, comparable format.</a:t>
             </a:r>
           </a:p>
           <a:p>
             <a:pPr>
               <a:spcAft>
-                <a:spcPts val="1400"/>
+                <a:spcPts val="800"/>
               </a:spcAft>
             </a:pPr>
             <a:r>
-              <a:rPr sz="1700" b="1" i="0">
+              <a:rPr sz="1300" b="1" i="0">
                 <a:solidFill>
                   <a:srgbClr val="F0A500"/>
                 </a:solidFill>
                 <a:latin typeface="Calibri"/>
               </a:rPr>
-              <a:t>•  Config:  </a:t>
-            </a:r>
-            <a:r>
-              <a:rPr sz="1700" b="0" i="0">
+              <a:t>•  </a:t>
+            </a:r>
+            <a:r>
+              <a:rPr sz="1300" b="0" i="0">
                 <a:solidFill>
                   <a:srgbClr val="FFFFFF"/>
                 </a:solidFill>
                 <a:latin typeface="Calibri"/>
               </a:rPr>
-              <a:t>config_n, config_data_type, config_acc_w</a:t>
+              <a:t>Identity fields — run_id, dut, variant, test_name, and status — are passed through unchanged so every feature vector can always be traced back to its original regression record.</a:t>
             </a:r>
           </a:p>
           <a:p>
             <a:pPr>
               <a:spcAft>
-                <a:spcPts val="1400"/>
+                <a:spcPts val="800"/>
               </a:spcAft>
             </a:pPr>
             <a:r>
-              <a:rPr sz="1700" b="1" i="0">
+              <a:rPr sz="1300" b="1" i="0">
                 <a:solidFill>
                   <a:srgbClr val="F0A500"/>
                 </a:solidFill>
                 <a:latin typeface="Calibri"/>
               </a:rPr>
-              <a:t>•  Numeric:  </a:t>
-            </a:r>
-            <a:r>
-              <a:rPr sz="1700" b="0" i="0">
+              <a:t>•  </a:t>
+            </a:r>
+            <a:r>
+              <a:rPr sz="1300" b="0" i="0">
                 <a:solidFill>
                   <a:srgbClr val="FFFFFF"/>
                 </a:solidFill>
                 <a:latin typeface="Calibri"/>
               </a:rPr>
-              <a:t>mismatch_rate (0.0-1.0), max_abs_error</a:t>
+              <a:t>Configuration fields flatten the nested test config into config_n, config_data_type, and config_acc_w, making it easy to group failures by hardware configuration.</a:t>
             </a:r>
           </a:p>
           <a:p>
             <a:pPr>
               <a:spcAft>
-                <a:spcPts val="1400"/>
+                <a:spcPts val="800"/>
               </a:spcAft>
             </a:pPr>
             <a:r>
-              <a:rPr sz="1700" b="1" i="0">
+              <a:rPr sz="1300" b="1" i="0">
                 <a:solidFill>
                   <a:srgbClr val="F0A500"/>
                 </a:solidFill>
                 <a:latin typeface="Calibri"/>
               </a:rPr>
-              <a:t>•  Bucketed:  </a:t>
-            </a:r>
-            <a:r>
-              <a:rPr sz="1700" b="0" i="0">
+              <a:t>•  </a:t>
+            </a:r>
+            <a:r>
+              <a:rPr sz="1300" b="0" i="0">
                 <a:solidFill>
                   <a:srgbClr val="FFFFFF"/>
                 </a:solidFill>
                 <a:latin typeface="Calibri"/>
               </a:rPr>
-              <a:t>error_magnitude_bucket (none/small/medium/large)</a:t>
+              <a:t>Two numeric fields, mismatch_rate and max_abs_error, quantify how wrong the output was, ranging from a single off-by-one element to a completely diverged tensor.</a:t>
             </a:r>
           </a:p>
           <a:p>
             <a:pPr>
               <a:spcAft>
-                <a:spcPts val="1400"/>
+                <a:spcPts val="800"/>
               </a:spcAft>
             </a:pPr>
             <a:r>
-              <a:rPr sz="1700" b="1" i="0">
+              <a:rPr sz="1300" b="1" i="0">
                 <a:solidFill>
                   <a:srgbClr val="F0A500"/>
                 </a:solidFill>
                 <a:latin typeface="Calibri"/>
               </a:rPr>
-              <a:t>•  Symptom flags:  </a:t>
-            </a:r>
-            <a:r>
-              <a:rPr sz="1700" b="0" i="0">
+              <a:t>•  </a:t>
+            </a:r>
+            <a:r>
+              <a:rPr sz="1300" b="0" i="0">
                 <a:solidFill>
                   <a:srgbClr val="FFFFFF"/>
                 </a:solidFill>
                 <a:latin typeface="Calibri"/>
               </a:rPr>
-              <a:t>has_reset_symptom, has_overflow_symptom</a:t>
+              <a:t>The error_magnitude_bucket field collapses max_abs_error into none, small, medium, or large, which turns out to be one of the strongest signals for distinguishing fault types.</a:t>
             </a:r>
           </a:p>
           <a:p>
             <a:pPr>
               <a:spcAft>
-                <a:spcPts val="1400"/>
+                <a:spcPts val="800"/>
               </a:spcAft>
             </a:pPr>
             <a:r>
-              <a:rPr sz="1700" b="1" i="0">
+              <a:rPr sz="1300" b="1" i="0">
                 <a:solidFill>
                   <a:srgbClr val="F0A500"/>
                 </a:solidFill>
                 <a:latin typeface="Calibri"/>
               </a:rPr>
-              <a:t>•  Waveform:  </a:t>
-            </a:r>
-            <a:r>
-              <a:rPr sz="1700" b="0" i="0">
+              <a:t>•  </a:t>
+            </a:r>
+            <a:r>
+              <a:rPr sz="1300" b="0" i="0">
                 <a:solidFill>
                   <a:srgbClr val="FFFFFF"/>
                 </a:solidFill>
                 <a:latin typeface="Calibri"/>
               </a:rPr>
-              <a:t>first_divergence_cycle, total_cycles (from VCD parser)</a:t>
+              <a:t>Two boolean symptom flags, has_reset_symptom and has_overflow_symptom, encode domain knowledge directly, such as an output stuck at reset versus one wrapping at a power-of-two boundary.</a:t>
             </a:r>
           </a:p>
           <a:p>
             <a:pPr>
               <a:spcAft>
-                <a:spcPts val="0"/>
+                <a:spcPts val="800"/>
               </a:spcAft>
             </a:pPr>
             <a:r>
-              <a:rPr sz="1500" b="1" i="0">
+              <a:rPr sz="1300" b="1" i="0">
                 <a:solidFill>
                   <a:srgbClr val="F0A500"/>
                 </a:solidFill>
                 <a:latin typeface="Calibri"/>
               </a:rPr>
-              <a:t>13 features extracted per record</a:t>
+              <a:t>•  </a:t>
+            </a:r>
+            <a:r>
+              <a:rPr sz="1300" b="0" i="0">
+                <a:solidFill>
+                  <a:srgbClr val="FFFFFF"/>
+                </a:solidFill>
+                <a:latin typeface="Calibri"/>
+              </a:rPr>
+              <a:t>When a waveform dump is available, first_divergence_cycle and total_cycles add temporal context from the VCD parser.</a:t>
+            </a:r>
+          </a:p>
+          <a:p>
+            <a:pPr>
+              <a:spcAft>
+                <a:spcPts val="800"/>
+              </a:spcAft>
+            </a:pPr>
+            <a:r>
+              <a:rPr sz="1300" b="1" i="0">
+                <a:solidFill>
+                  <a:srgbClr val="F0A500"/>
+                </a:solidFill>
+                <a:latin typeface="Calibri"/>
+              </a:rPr>
+              <a:t>•  </a:t>
+            </a:r>
+            <a:r>
+              <a:rPr sz="1300" b="0" i="0">
+                <a:solidFill>
+                  <a:srgbClr val="FFFFFF"/>
+                </a:solidFill>
+                <a:latin typeface="Calibri"/>
+              </a:rPr>
+              <a:t>Together these 13 features are dense enough to drive both the rule-based clusterer and the DBSCAN outlier detector without ever re-parsing the raw log.</a:t>
             </a:r>
           </a:p>
         </p:txBody>
@@ -13361,11 +13704,11 @@
           <a:p>
             <a:pPr>
               <a:spcAft>
-                <a:spcPts val="1000"/>
+                <a:spcPts val="800"/>
               </a:spcAft>
             </a:pPr>
             <a:r>
-              <a:rPr sz="1700" b="1" i="0">
+              <a:rPr sz="1300" b="1" i="0">
                 <a:solidFill>
                   <a:srgbClr val="F0A500"/>
                 </a:solidFill>
@@ -13374,23 +13717,23 @@
               <a:t>•  </a:t>
             </a:r>
             <a:r>
-              <a:rPr sz="1700" b="0" i="0">
+              <a:rPr sz="1300" b="0" i="0">
                 <a:solidFill>
                   <a:srgbClr val="FFFFFF"/>
                 </a:solidFill>
                 <a:latin typeface="Calibri"/>
               </a:rPr>
-              <a:t>1.  has_reset_symptom=True → reset_fault</a:t>
+              <a:t>The clusterer applies eight priority-ordered rules to each feature vector, and the first rule that matches determines the failure's cluster label.</a:t>
             </a:r>
           </a:p>
           <a:p>
             <a:pPr>
               <a:spcAft>
-                <a:spcPts val="1000"/>
+                <a:spcPts val="800"/>
               </a:spcAft>
             </a:pPr>
             <a:r>
-              <a:rPr sz="1700" b="1" i="0">
+              <a:rPr sz="1300" b="1" i="0">
                 <a:solidFill>
                   <a:srgbClr val="F0A500"/>
                 </a:solidFill>
@@ -13399,23 +13742,23 @@
               <a:t>•  </a:t>
             </a:r>
             <a:r>
-              <a:rPr sz="1700" b="0" i="0">
+              <a:rPr sz="1300" b="0" i="0">
                 <a:solidFill>
                   <a:srgbClr val="FFFFFF"/>
                 </a:solidFill>
                 <a:latin typeface="Calibri"/>
               </a:rPr>
-              <a:t>2.  has_overflow_symptom=True → overflow_fault</a:t>
+              <a:t>A record with has_reset_symptom set to true is always routed to reset_fault first, because a stuck-at-reset output is unambiguous regardless of error magnitude.</a:t>
             </a:r>
           </a:p>
           <a:p>
             <a:pPr>
               <a:spcAft>
-                <a:spcPts val="1000"/>
+                <a:spcPts val="800"/>
               </a:spcAft>
             </a:pPr>
             <a:r>
-              <a:rPr sz="1700" b="1" i="0">
+              <a:rPr sz="1300" b="1" i="0">
                 <a:solidFill>
                   <a:srgbClr val="F0A500"/>
                 </a:solidFill>
@@ -13424,23 +13767,23 @@
               <a:t>•  </a:t>
             </a:r>
             <a:r>
-              <a:rPr sz="1700" b="0" i="0">
+              <a:rPr sz="1300" b="0" i="0">
                 <a:solidFill>
                   <a:srgbClr val="FFFFFF"/>
                 </a:solidFill>
                 <a:latin typeface="Calibri"/>
               </a:rPr>
-              <a:t>3.  bucket=large, no overflow/reset → sign_error OR arithmetic_error</a:t>
+              <a:t>A record with has_overflow_symptom set to true is routed to overflow_fault next, catching the characteristic power-of-two wraparound pattern.</a:t>
             </a:r>
           </a:p>
           <a:p>
             <a:pPr>
               <a:spcAft>
-                <a:spcPts val="1000"/>
+                <a:spcPts val="800"/>
               </a:spcAft>
             </a:pPr>
             <a:r>
-              <a:rPr sz="1700" b="1" i="0">
+              <a:rPr sz="1300" b="1" i="0">
                 <a:solidFill>
                   <a:srgbClr val="F0A500"/>
                 </a:solidFill>
@@ -13449,23 +13792,23 @@
               <a:t>•  </a:t>
             </a:r>
             <a:r>
-              <a:rPr sz="1700" b="0" i="0">
+              <a:rPr sz="1300" b="0" i="0">
                 <a:solidFill>
                   <a:srgbClr val="FFFFFF"/>
                 </a:solidFill>
                 <a:latin typeface="Calibri"/>
               </a:rPr>
-              <a:t>4.  bucket=medium, rate≥0.999 → off_by_one</a:t>
+              <a:t>A large error bucket with no reset or overflow symptom is split between sign_error and arithmetic_error depending on whether the mismatch shows the negated-sum pattern.</a:t>
             </a:r>
           </a:p>
           <a:p>
             <a:pPr>
               <a:spcAft>
-                <a:spcPts val="1000"/>
+                <a:spcPts val="800"/>
               </a:spcAft>
             </a:pPr>
             <a:r>
-              <a:rPr sz="1700" b="1" i="0">
+              <a:rPr sz="1300" b="1" i="0">
                 <a:solidFill>
                   <a:srgbClr val="F0A500"/>
                 </a:solidFill>
@@ -13474,23 +13817,23 @@
               <a:t>•  </a:t>
             </a:r>
             <a:r>
-              <a:rPr sz="1700" b="0" i="0">
+              <a:rPr sz="1300" b="0" i="0">
                 <a:solidFill>
                   <a:srgbClr val="FFFFFF"/>
                 </a:solidFill>
                 <a:latin typeface="Calibri"/>
               </a:rPr>
-              <a:t>5.  quant faults by error range → shift_error / saturation_error / zero_point_error</a:t>
+              <a:t>A medium error bucket with a mismatch rate at or above 0.999 is labeled off_by_one, matching the signature of a loop that terminates one iteration early.</a:t>
             </a:r>
           </a:p>
           <a:p>
             <a:pPr>
               <a:spcAft>
-                <a:spcPts val="1000"/>
+                <a:spcPts val="800"/>
               </a:spcAft>
             </a:pPr>
             <a:r>
-              <a:rPr sz="1700" b="1" i="0">
+              <a:rPr sz="1300" b="1" i="0">
                 <a:solidFill>
                   <a:srgbClr val="F0A500"/>
                 </a:solidFill>
@@ -13499,23 +13842,23 @@
               <a:t>•  </a:t>
             </a:r>
             <a:r>
-              <a:rPr sz="1700" b="0" i="0">
+              <a:rPr sz="1300" b="0" i="0">
                 <a:solidFill>
                   <a:srgbClr val="FFFFFF"/>
                 </a:solidFill>
                 <a:latin typeface="Calibri"/>
               </a:rPr>
-              <a:t>6.  status=pass, variant≠golden → latent_fault</a:t>
+              <a:t>Quantization failures in the small error bucket are further split into shift_error, saturation_error, or zero_point_error based on the exact error range they fall into.</a:t>
             </a:r>
           </a:p>
           <a:p>
             <a:pPr>
               <a:spcAft>
-                <a:spcPts val="1000"/>
+                <a:spcPts val="800"/>
               </a:spcAft>
             </a:pPr>
             <a:r>
-              <a:rPr sz="1700" b="1" i="0">
+              <a:rPr sz="1300" b="1" i="0">
                 <a:solidFill>
                   <a:srgbClr val="F0A500"/>
                 </a:solidFill>
@@ -13524,23 +13867,23 @@
               <a:t>•  </a:t>
             </a:r>
             <a:r>
-              <a:rPr sz="1700" b="0" i="0">
+              <a:rPr sz="1300" b="0" i="0">
                 <a:solidFill>
                   <a:srgbClr val="FFFFFF"/>
                 </a:solidFill>
                 <a:latin typeface="Calibri"/>
               </a:rPr>
-              <a:t>7.  status=pass, variant=golden → clean_pass</a:t>
+              <a:t>Any record that passed simulation on a non-golden variant is labeled latent_fault, and any record that passed on the golden variant is labeled clean_pass.</a:t>
             </a:r>
           </a:p>
           <a:p>
             <a:pPr>
               <a:spcAft>
-                <a:spcPts val="1000"/>
+                <a:spcPts val="800"/>
               </a:spcAft>
             </a:pPr>
             <a:r>
-              <a:rPr sz="1700" b="1" i="0">
+              <a:rPr sz="1300" b="1" i="0">
                 <a:solidFill>
                   <a:srgbClr val="F0A500"/>
                 </a:solidFill>
@@ -13549,38 +13892,13 @@
               <a:t>•  </a:t>
             </a:r>
             <a:r>
-              <a:rPr sz="1700" b="0" i="0">
+              <a:rPr sz="1300" b="0" i="0">
                 <a:solidFill>
                   <a:srgbClr val="FFFFFF"/>
                 </a:solidFill>
                 <a:latin typeface="Calibri"/>
               </a:rPr>
-              <a:t>8.  else → uncategorized</a:t>
-            </a:r>
-          </a:p>
-          <a:p>
-            <a:pPr>
-              <a:spcAft>
-                <a:spcPts val="1000"/>
-              </a:spcAft>
-            </a:pPr>
-            <a:r>
-              <a:rPr sz="1700" b="1" i="0">
-                <a:solidFill>
-                  <a:srgbClr val="6F9CC4"/>
-                </a:solidFill>
-                <a:latin typeface="Calibri"/>
-              </a:rPr>
-              <a:t/>
-            </a:r>
-            <a:r>
-              <a:rPr sz="1700" b="0" i="0">
-                <a:solidFill>
-                  <a:srgbClr val="FFFFFF"/>
-                </a:solidFill>
-                <a:latin typeface="Calibri"/>
-              </a:rPr>
-              <a:t>Plus DBSCAN on 5-element normalized feature vector for outlier detection</a:t>
+              <a:t>On top of these rules, DBSCAN runs over a 5-element normalized feature vector to flag statistical outliers the rules alone might miss.</a:t>
             </a:r>
           </a:p>
         </p:txBody>
@@ -13909,11 +14227,11 @@
           <a:p>
             <a:pPr>
               <a:spcAft>
-                <a:spcPts val="1300"/>
+                <a:spcPts val="800"/>
               </a:spcAft>
             </a:pPr>
             <a:r>
-              <a:rPr sz="1650" b="1" i="0">
+              <a:rPr sz="1300" b="1" i="0">
                 <a:solidFill>
                   <a:srgbClr val="F0A500"/>
                 </a:solidFill>
@@ -13922,23 +14240,23 @@
               <a:t>•  </a:t>
             </a:r>
             <a:r>
-              <a:rPr sz="1650" b="0" i="0">
+              <a:rPr sz="1300" b="0" i="0">
                 <a:solidFill>
                   <a:srgbClr val="FFFFFF"/>
                 </a:solidFill>
                 <a:latin typeface="Calibri"/>
               </a:rPr>
-              <a:t>Groups clustered records by cluster_label</a:t>
+              <a:t>The triage agent groups every clustered record by its cluster_label so Claude only reasons about one coherent failure pattern at a time, not the full unsorted log.</a:t>
             </a:r>
           </a:p>
           <a:p>
             <a:pPr>
               <a:spcAft>
-                <a:spcPts val="1300"/>
+                <a:spcPts val="800"/>
               </a:spcAft>
             </a:pPr>
             <a:r>
-              <a:rPr sz="1650" b="1" i="0">
+              <a:rPr sz="1300" b="1" i="0">
                 <a:solidFill>
                   <a:srgbClr val="F0A500"/>
                 </a:solidFill>
@@ -13947,23 +14265,23 @@
               <a:t>•  </a:t>
             </a:r>
             <a:r>
-              <a:rPr sz="1650" b="0" i="0">
+              <a:rPr sz="1300" b="0" i="0">
                 <a:solidFill>
                   <a:srgbClr val="FFFFFF"/>
                 </a:solidFill>
                 <a:latin typeface="Calibri"/>
               </a:rPr>
-              <a:t>Skips clean_pass (no API call needed)</a:t>
+              <a:t>clean_pass records are skipped entirely and never sent to the API, because a passing golden-RTL test carries no root cause to explain and would only waste tokens and money.</a:t>
             </a:r>
           </a:p>
           <a:p>
             <a:pPr>
               <a:spcAft>
-                <a:spcPts val="1300"/>
+                <a:spcPts val="800"/>
               </a:spcAft>
             </a:pPr>
             <a:r>
-              <a:rPr sz="1650" b="1" i="0">
+              <a:rPr sz="1300" b="1" i="0">
                 <a:solidFill>
                   <a:srgbClr val="F0A500"/>
                 </a:solidFill>
@@ -13972,23 +14290,23 @@
               <a:t>•  </a:t>
             </a:r>
             <a:r>
-              <a:rPr sz="1650" b="0" i="0">
+              <a:rPr sz="1300" b="0" i="0">
                 <a:solidFill>
                   <a:srgbClr val="FFFFFF"/>
                 </a:solidFill>
                 <a:latin typeface="Calibri"/>
               </a:rPr>
-              <a:t>For each failure cluster: builds rich prompt with test names, mismatch rates, error ranges, symptom flags</a:t>
+              <a:t>For each failure cluster, the agent builds a rich prompt with representative test names, mismatch rates, error ranges, and symptom flags — the same structured evidence a human engineer would gather.</a:t>
             </a:r>
           </a:p>
           <a:p>
             <a:pPr>
               <a:spcAft>
-                <a:spcPts val="1300"/>
+                <a:spcPts val="800"/>
               </a:spcAft>
             </a:pPr>
             <a:r>
-              <a:rPr sz="1650" b="1" i="0">
+              <a:rPr sz="1300" b="1" i="0">
                 <a:solidFill>
                   <a:srgbClr val="F0A500"/>
                 </a:solidFill>
@@ -13997,23 +14315,41 @@
               <a:t>•  </a:t>
             </a:r>
             <a:r>
-              <a:rPr sz="1650" b="0" i="0">
+              <a:rPr sz="1300" b="0" i="0">
                 <a:solidFill>
                   <a:srgbClr val="FFFFFF"/>
                 </a:solidFill>
                 <a:latin typeface="Calibri"/>
               </a:rPr>
-              <a:t>Calls claude-sonnet-4-6 (max_tokens=1024 for large clusters)</a:t>
+              <a:t>The model called is claude-sonnet-4-6, with max_tokens raised to 1024 for clusters larger than </a:t>
+            </a:r>
+            <a:r>
+              <a:rPr sz="1300" b="1" i="0">
+                <a:solidFill>
+                  <a:srgbClr val="F0A500"/>
+                </a:solidFill>
+                <a:latin typeface="Calibri"/>
+              </a:rPr>
+              <a:t>10 records</a:t>
+            </a:r>
+            <a:r>
+              <a:rPr sz="1300" b="0" i="0">
+                <a:solidFill>
+                  <a:srgbClr val="FFFFFF"/>
+                </a:solidFill>
+                <a:latin typeface="Calibri"/>
+              </a:rPr>
+              <a:t> specifically to prevent the JSON response from being truncated mid-report.</a:t>
             </a:r>
           </a:p>
           <a:p>
             <a:pPr>
               <a:spcAft>
-                <a:spcPts val="1300"/>
+                <a:spcPts val="800"/>
               </a:spcAft>
             </a:pPr>
             <a:r>
-              <a:rPr sz="1650" b="1" i="0">
+              <a:rPr sz="1300" b="1" i="0">
                 <a:solidFill>
                   <a:srgbClr val="F0A500"/>
                 </a:solidFill>
@@ -14022,23 +14358,23 @@
               <a:t>•  </a:t>
             </a:r>
             <a:r>
-              <a:rPr sz="1650" b="0" i="0">
+              <a:rPr sz="1300" b="0" i="0">
                 <a:solidFill>
                   <a:srgbClr val="FFFFFF"/>
                 </a:solidFill>
                 <a:latin typeface="Calibri"/>
               </a:rPr>
-              <a:t>Parses JSON response: likely_cause, confidence, recommended_debug_steps, affected_configs</a:t>
+              <a:t>The response is parsed as structured JSON containing likely_cause, confidence, recommended_debug_steps, and affected_configs, so downstream code never has to regex-parse free text.</a:t>
             </a:r>
           </a:p>
           <a:p>
             <a:pPr>
               <a:spcAft>
-                <a:spcPts val="1300"/>
+                <a:spcPts val="800"/>
               </a:spcAft>
             </a:pPr>
             <a:r>
-              <a:rPr sz="1650" b="1" i="0">
+              <a:rPr sz="1300" b="1" i="0">
                 <a:solidFill>
                   <a:srgbClr val="F0A500"/>
                 </a:solidFill>
@@ -14047,23 +14383,23 @@
               <a:t>•  </a:t>
             </a:r>
             <a:r>
-              <a:rPr sz="1650" b="0" i="0">
+              <a:rPr sz="1300" b="0" i="0">
                 <a:solidFill>
                   <a:srgbClr val="FFFFFF"/>
                 </a:solidFill>
                 <a:latin typeface="Calibri"/>
               </a:rPr>
-              <a:t>affected_configs built deterministically from records (not from Claude) to prevent hallucination</a:t>
+              <a:t>affected_configs is computed deterministically from the records in the cluster rather than left to the model, preventing the LLM from hallucinating a configuration that was never observed.</a:t>
             </a:r>
           </a:p>
           <a:p>
             <a:pPr>
               <a:spcAft>
-                <a:spcPts val="1300"/>
+                <a:spcPts val="800"/>
               </a:spcAft>
             </a:pPr>
             <a:r>
-              <a:rPr sz="1650" b="1" i="0">
+              <a:rPr sz="1300" b="1" i="0">
                 <a:solidFill>
                   <a:srgbClr val="F0A500"/>
                 </a:solidFill>
@@ -14072,13 +14408,13 @@
               <a:t>•  </a:t>
             </a:r>
             <a:r>
-              <a:rPr sz="1650" b="0" i="0">
+              <a:rPr sz="1300" b="0" i="0">
                 <a:solidFill>
                   <a:srgbClr val="FFFFFF"/>
                 </a:solidFill>
                 <a:latin typeface="Calibri"/>
               </a:rPr>
-              <a:t>Falls back gracefully on API error or malformed JSON</a:t>
+              <a:t>If the API call fails or returns malformed JSON, the agent falls back gracefully to a low-confidence placeholder report instead of crashing the whole benchmark run.</a:t>
             </a:r>
           </a:p>
         </p:txBody>
@@ -14407,11 +14743,11 @@
           <a:p>
             <a:pPr>
               <a:spcAft>
-                <a:spcPts val="1300"/>
+                <a:spcPts val="700"/>
               </a:spcAft>
             </a:pPr>
             <a:r>
-              <a:rPr sz="1650" b="1" i="0">
+              <a:rPr sz="1250" b="1" i="0">
                 <a:solidFill>
                   <a:srgbClr val="F0A500"/>
                 </a:solidFill>
@@ -14420,23 +14756,23 @@
               <a:t>•  </a:t>
             </a:r>
             <a:r>
-              <a:rPr sz="1650" b="0" i="0">
+              <a:rPr sz="1250" b="0" i="0">
                 <a:solidFill>
                   <a:srgbClr val="FFFFFF"/>
                 </a:solidFill>
                 <a:latin typeface="Calibri"/>
               </a:rPr>
-              <a:t>Stores historical triage reports for retrieval</a:t>
+              <a:t>The RAG store remembers every past triage report so future failures can be explained in the context of failures the system has already solved.</a:t>
             </a:r>
           </a:p>
           <a:p>
             <a:pPr>
               <a:spcAft>
-                <a:spcPts val="1300"/>
+                <a:spcPts val="700"/>
               </a:spcAft>
             </a:pPr>
             <a:r>
-              <a:rPr sz="1650" b="1" i="0">
+              <a:rPr sz="1250" b="1" i="0">
                 <a:solidFill>
                   <a:srgbClr val="F0A500"/>
                 </a:solidFill>
@@ -14445,23 +14781,23 @@
               <a:t>•  </a:t>
             </a:r>
             <a:r>
-              <a:rPr sz="1650" b="0" i="0">
+              <a:rPr sz="1250" b="0" i="0">
                 <a:solidFill>
                   <a:srgbClr val="FFFFFF"/>
                 </a:solidFill>
                 <a:latin typeface="Calibri"/>
               </a:rPr>
-              <a:t>Each record converted to token string: label_overflow_fault bucket_large dut_mac_array n_4 rate_very_high overflow_symptom</a:t>
+              <a:t>Each stored record is converted into a short token string — for example label_overflow_fault bucket_large dut_mac_array n_4 rate_very_high overflow_symptom — summarizing its key attributes as plain words.</a:t>
             </a:r>
           </a:p>
           <a:p>
             <a:pPr>
               <a:spcAft>
-                <a:spcPts val="1300"/>
+                <a:spcPts val="700"/>
               </a:spcAft>
             </a:pPr>
             <a:r>
-              <a:rPr sz="1650" b="1" i="0">
+              <a:rPr sz="1250" b="1" i="0">
                 <a:solidFill>
                   <a:srgbClr val="F0A500"/>
                 </a:solidFill>
@@ -14470,23 +14806,23 @@
               <a:t>•  </a:t>
             </a:r>
             <a:r>
-              <a:rPr sz="1650" b="0" i="0">
+              <a:rPr sz="1250" b="0" i="0">
                 <a:solidFill>
                   <a:srgbClr val="FFFFFF"/>
                 </a:solidFill>
                 <a:latin typeface="Calibri"/>
               </a:rPr>
-              <a:t>TF-IDF vectorizer fits on all stored tokens</a:t>
+              <a:t>TF-IDF, short for term frequency-inverse document frequency, is a simple text-similarity technique: it scores how much two token strings overlap while automatically down-weighting words that appear in almost every record and are therefore uninformative.</a:t>
             </a:r>
           </a:p>
           <a:p>
             <a:pPr>
               <a:spcAft>
-                <a:spcPts val="1300"/>
+                <a:spcPts val="700"/>
               </a:spcAft>
             </a:pPr>
             <a:r>
-              <a:rPr sz="1650" b="1" i="0">
+              <a:rPr sz="1250" b="1" i="0">
                 <a:solidFill>
                   <a:srgbClr val="F0A500"/>
                 </a:solidFill>
@@ -14495,23 +14831,23 @@
               <a:t>•  </a:t>
             </a:r>
             <a:r>
-              <a:rPr sz="1650" b="0" i="0">
+              <a:rPr sz="1250" b="0" i="0">
                 <a:solidFill>
                   <a:srgbClr val="FFFFFF"/>
                 </a:solidFill>
                 <a:latin typeface="Calibri"/>
               </a:rPr>
-              <a:t>Cosine similarity query returns top-k most similar past failures</a:t>
+              <a:t>A cosine-similarity query against this TF-IDF index returns the top-k most similar past failures for any new cluster, effectively answering 'have we seen something like this before?'</a:t>
             </a:r>
           </a:p>
           <a:p>
             <a:pPr>
               <a:spcAft>
-                <a:spcPts val="1300"/>
+                <a:spcPts val="700"/>
               </a:spcAft>
             </a:pPr>
             <a:r>
-              <a:rPr sz="1650" b="1" i="0">
+              <a:rPr sz="1250" b="1" i="0">
                 <a:solidFill>
                   <a:srgbClr val="F0A500"/>
                 </a:solidFill>
@@ -14520,23 +14856,23 @@
               <a:t>•  </a:t>
             </a:r>
             <a:r>
-              <a:rPr sz="1650" b="0" i="0">
+              <a:rPr sz="1250" b="0" i="0">
                 <a:solidFill>
                   <a:srgbClr val="FFFFFF"/>
                 </a:solidFill>
                 <a:latin typeface="Calibri"/>
               </a:rPr>
-              <a:t>Each result includes: similarity score + matched_fields list (explainable)</a:t>
+              <a:t>Each retrieved match includes both a numeric similarity score and a matched_fields list naming exactly which attributes lined up, so retrieval is explainable rather than a black box.</a:t>
             </a:r>
           </a:p>
           <a:p>
             <a:pPr>
               <a:spcAft>
-                <a:spcPts val="1300"/>
+                <a:spcPts val="700"/>
               </a:spcAft>
             </a:pPr>
             <a:r>
-              <a:rPr sz="1650" b="1" i="0">
+              <a:rPr sz="1250" b="1" i="0">
                 <a:solidFill>
                   <a:srgbClr val="F0A500"/>
                 </a:solidFill>
@@ -14545,23 +14881,23 @@
               <a:t>•  </a:t>
             </a:r>
             <a:r>
-              <a:rPr sz="1650" b="0" i="0">
+              <a:rPr sz="1250" b="0" i="0">
                 <a:solidFill>
                   <a:srgbClr val="FFFFFF"/>
                 </a:solidFill>
                 <a:latin typeface="Calibri"/>
               </a:rPr>
-              <a:t>Lazy index rebuild: only refit when new entries added</a:t>
+              <a:t>The index is rebuilt lazily, only when new entries have actually been added, which keeps repeated queries fast during a single benchmark run.</a:t>
             </a:r>
           </a:p>
           <a:p>
             <a:pPr>
               <a:spcAft>
-                <a:spcPts val="1300"/>
+                <a:spcPts val="700"/>
               </a:spcAft>
             </a:pPr>
             <a:r>
-              <a:rPr sz="1650" b="1" i="0">
+              <a:rPr sz="1250" b="1" i="0">
                 <a:solidFill>
                   <a:srgbClr val="F0A500"/>
                 </a:solidFill>
@@ -14570,13 +14906,13 @@
               <a:t>•  </a:t>
             </a:r>
             <a:r>
-              <a:rPr sz="1650" b="0" i="0">
+              <a:rPr sz="1250" b="0" i="0">
                 <a:solidFill>
                   <a:srgbClr val="FFFFFF"/>
                 </a:solidFill>
                 <a:latin typeface="Calibri"/>
               </a:rPr>
-              <a:t>Save/load to JSON for persistence across sessions</a:t>
+              <a:t>The store can be saved to and loaded from JSON, so triage knowledge accumulated in one session carries over and improves retrieval in the next.</a:t>
             </a:r>
           </a:p>
         </p:txBody>
@@ -14905,11 +15241,11 @@
           <a:p>
             <a:pPr>
               <a:spcAft>
-                <a:spcPts val="1000"/>
+                <a:spcPts val="700"/>
               </a:spcAft>
             </a:pPr>
             <a:r>
-              <a:rPr sz="1650" b="1" i="0">
+              <a:rPr sz="1250" b="1" i="0">
                 <a:solidFill>
                   <a:srgbClr val="F0A500"/>
                 </a:solidFill>
@@ -14918,23 +15254,23 @@
               <a:t>•  </a:t>
             </a:r>
             <a:r>
-              <a:rPr sz="1650" b="0" i="0">
+              <a:rPr sz="1250" b="0" i="0">
                 <a:solidFill>
                   <a:srgbClr val="FFFFFF"/>
                 </a:solidFill>
                 <a:latin typeface="Calibri"/>
               </a:rPr>
-              <a:t>Wraps triage agent in iterative conversation</a:t>
+              <a:t>A single LLM call is sometimes not enough — Claude's first hypothesis can be underspecified or low-confidence for ambiguous clusters, so the debug loop gives it a chance to reconsider.</a:t>
             </a:r>
           </a:p>
           <a:p>
             <a:pPr>
               <a:spcAft>
-                <a:spcPts val="1000"/>
+                <a:spcPts val="700"/>
               </a:spcAft>
             </a:pPr>
             <a:r>
-              <a:rPr sz="1650" b="1" i="0">
+              <a:rPr sz="1250" b="1" i="0">
                 <a:solidFill>
                   <a:srgbClr val="F0A500"/>
                 </a:solidFill>
@@ -14943,23 +15279,23 @@
               <a:t>•  </a:t>
             </a:r>
             <a:r>
-              <a:rPr sz="1650" b="0" i="0">
+              <a:rPr sz="1250" b="0" i="0">
                 <a:solidFill>
                   <a:srgbClr val="FFFFFF"/>
                 </a:solidFill>
                 <a:latin typeface="Calibri"/>
               </a:rPr>
-              <a:t>Turn 1: initial hypothesis from cluster summary</a:t>
+              <a:t>Turn 1 always starts from the same rich cluster summary used by the single-shot triage agent, so the loop's first answer is directly comparable to the non-looping baseline.</a:t>
             </a:r>
           </a:p>
           <a:p>
             <a:pPr>
               <a:spcAft>
-                <a:spcPts val="1000"/>
+                <a:spcPts val="700"/>
               </a:spcAft>
             </a:pPr>
             <a:r>
-              <a:rPr sz="1650" b="1" i="0">
+              <a:rPr sz="1250" b="1" i="0">
                 <a:solidFill>
                   <a:srgbClr val="F0A500"/>
                 </a:solidFill>
@@ -14968,98 +15304,98 @@
               <a:t>•  </a:t>
             </a:r>
             <a:r>
-              <a:rPr sz="1650" b="0" i="0">
+              <a:rPr sz="1250" b="0" i="0">
                 <a:solidFill>
                   <a:srgbClr val="FFFFFF"/>
                 </a:solidFill>
                 <a:latin typeface="Calibri"/>
               </a:rPr>
-              <a:t>If confidence &lt; high: generates programmatic follow-up question</a:t>
+              <a:t>If reported confidence is below high, the loop does not just ask Claude to 'try again' — it generates a targeted, programmatic follow-up question based on what the first answer got wrong.</a:t>
             </a:r>
           </a:p>
           <a:p>
             <a:pPr>
               <a:spcAft>
-                <a:spcPts val="1000"/>
+                <a:spcPts val="700"/>
               </a:spcAft>
             </a:pPr>
             <a:r>
-              <a:rPr sz="1650" b="1" i="0">
-                <a:solidFill>
-                  <a:srgbClr val="6F9CC4"/>
-                </a:solidFill>
-                <a:latin typeface="Calibri"/>
-              </a:rPr>
-              <a:t>      ‣  </a:t>
-            </a:r>
-            <a:r>
-              <a:rPr sz="1650" b="0" i="0">
+              <a:rPr sz="1250" b="1" i="0">
+                <a:solidFill>
+                  <a:srgbClr val="F0A500"/>
+                </a:solidFill>
+                <a:latin typeface="Calibri"/>
+              </a:rPr>
+              <a:t>•  </a:t>
+            </a:r>
+            <a:r>
+              <a:rPr sz="1250" b="0" i="0">
                 <a:solidFill>
                   <a:srgbClr val="FFFFFF"/>
                 </a:solidFill>
                 <a:latin typeface="Calibri"/>
               </a:rPr>
-              <a:t>overflow symptom not mentioned → ask about accumulator width</a:t>
+              <a:t>When an overflow symptom is present but the first hypothesis never mentioned the accumulator, the follow-up explicitly asks Claude to consider the accumulator width.</a:t>
             </a:r>
           </a:p>
           <a:p>
             <a:pPr>
               <a:spcAft>
-                <a:spcPts val="1000"/>
+                <a:spcPts val="700"/>
               </a:spcAft>
             </a:pPr>
             <a:r>
-              <a:rPr sz="1650" b="1" i="0">
-                <a:solidFill>
-                  <a:srgbClr val="6F9CC4"/>
-                </a:solidFill>
-                <a:latin typeface="Calibri"/>
-              </a:rPr>
-              <a:t>      ‣  </a:t>
-            </a:r>
-            <a:r>
-              <a:rPr sz="1650" b="0" i="0">
+              <a:rPr sz="1250" b="1" i="0">
+                <a:solidFill>
+                  <a:srgbClr val="F0A500"/>
+                </a:solidFill>
+                <a:latin typeface="Calibri"/>
+              </a:rPr>
+              <a:t>•  </a:t>
+            </a:r>
+            <a:r>
+              <a:rPr sz="1250" b="0" i="0">
                 <a:solidFill>
                   <a:srgbClr val="FFFFFF"/>
                 </a:solidFill>
                 <a:latin typeface="Calibri"/>
               </a:rPr>
-              <a:t>reset symptom not mentioned → ask about reset polarity</a:t>
+              <a:t>When a reset symptom is present but unaddressed, the follow-up asks Claude to consider reset polarity specifically; otherwise it asks for an alternative hypothesis entirely.</a:t>
             </a:r>
           </a:p>
           <a:p>
             <a:pPr>
               <a:spcAft>
-                <a:spcPts val="1000"/>
+                <a:spcPts val="700"/>
               </a:spcAft>
             </a:pPr>
             <a:r>
-              <a:rPr sz="1650" b="1" i="0">
-                <a:solidFill>
-                  <a:srgbClr val="6F9CC4"/>
-                </a:solidFill>
-                <a:latin typeface="Calibri"/>
-              </a:rPr>
-              <a:t>      ‣  </a:t>
-            </a:r>
-            <a:r>
-              <a:rPr sz="1650" b="0" i="0">
+              <a:rPr sz="1250" b="1" i="0">
+                <a:solidFill>
+                  <a:srgbClr val="F0A500"/>
+                </a:solidFill>
+                <a:latin typeface="Calibri"/>
+              </a:rPr>
+              <a:t>•  </a:t>
+            </a:r>
+            <a:r>
+              <a:rPr sz="1250" b="0" i="0">
                 <a:solidFill>
                   <a:srgbClr val="FFFFFF"/>
                 </a:solidFill>
                 <a:latin typeface="Calibri"/>
               </a:rPr>
-              <a:t>otherwise → ask for alternative hypothesis</a:t>
+              <a:t>The loop continues refining its hypothesis across turns until confidence reaches high or a maximum of 3 turns is reached, whichever comes first.</a:t>
             </a:r>
           </a:p>
           <a:p>
             <a:pPr>
               <a:spcAft>
-                <a:spcPts val="1000"/>
+                <a:spcPts val="700"/>
               </a:spcAft>
             </a:pPr>
             <a:r>
-              <a:rPr sz="1650" b="1" i="0">
+              <a:rPr sz="1250" b="1" i="0">
                 <a:solidFill>
                   <a:srgbClr val="F0A500"/>
                 </a:solidFill>
@@ -15068,63 +15404,13 @@
               <a:t>•  </a:t>
             </a:r>
             <a:r>
-              <a:rPr sz="1650" b="0" i="0">
+              <a:rPr sz="1250" b="0" i="0">
                 <a:solidFill>
                   <a:srgbClr val="FFFFFF"/>
                 </a:solidFill>
                 <a:latin typeface="Calibri"/>
               </a:rPr>
-              <a:t>Turn N: refined hypothesis with updated confidence</a:t>
-            </a:r>
-          </a:p>
-          <a:p>
-            <a:pPr>
-              <a:spcAft>
-                <a:spcPts val="1000"/>
-              </a:spcAft>
-            </a:pPr>
-            <a:r>
-              <a:rPr sz="1650" b="1" i="0">
-                <a:solidFill>
-                  <a:srgbClr val="F0A500"/>
-                </a:solidFill>
-                <a:latin typeface="Calibri"/>
-              </a:rPr>
-              <a:t>•  </a:t>
-            </a:r>
-            <a:r>
-              <a:rPr sz="1650" b="0" i="0">
-                <a:solidFill>
-                  <a:srgbClr val="FFFFFF"/>
-                </a:solidFill>
-                <a:latin typeface="Calibri"/>
-              </a:rPr>
-              <a:t>Converges when confidence = high OR max_turns reached (default 3)</a:t>
-            </a:r>
-          </a:p>
-          <a:p>
-            <a:pPr>
-              <a:spcAft>
-                <a:spcPts val="1000"/>
-              </a:spcAft>
-            </a:pPr>
-            <a:r>
-              <a:rPr sz="1650" b="1" i="0">
-                <a:solidFill>
-                  <a:srgbClr val="F0A500"/>
-                </a:solidFill>
-                <a:latin typeface="Calibri"/>
-              </a:rPr>
-              <a:t>•  </a:t>
-            </a:r>
-            <a:r>
-              <a:rPr sz="1650" b="0" i="0">
-                <a:solidFill>
-                  <a:srgbClr val="FFFFFF"/>
-                </a:solidFill>
-                <a:latin typeface="Calibri"/>
-              </a:rPr>
-              <a:t>Returns: final report + full conversation history + converged flag</a:t>
+              <a:t>The final result includes not just the best report but the full multi-turn conversation history and a converged flag, so a reviewer can see exactly how the conclusion was reached.</a:t>
             </a:r>
           </a:p>
         </p:txBody>
@@ -15431,14 +15717,53 @@
       </p:sp>
       <p:sp>
         <p:nvSpPr>
-          <p:cNvPr id="9" name="Rectangle 8"/>
+          <p:cNvPr id="9" name="TextBox 8"/>
+          <p:cNvSpPr txBox="1"/>
+          <p:nvPr/>
+        </p:nvSpPr>
+        <p:spPr>
+          <a:xfrm>
+            <a:off x="640080" y="1280160"/>
+            <a:ext cx="10911535" cy="384048"/>
+          </a:xfrm>
+          <a:prstGeom prst="rect">
+            <a:avLst/>
+          </a:prstGeom>
+          <a:noFill/>
+        </p:spPr>
+        <p:txBody>
+          <a:bodyPr wrap="square" lIns="0" rIns="0" tIns="0" bIns="0">
+            <a:noAutofit/>
+          </a:bodyPr>
+          <a:lstStyle/>
+          <a:p>
+            <a:pPr>
+              <a:lnSpc>
+                <a:spcPct val="110000"/>
+              </a:lnSpc>
+            </a:pPr>
+            <a:r>
+              <a:rPr sz="1250" b="0" i="0">
+                <a:solidFill>
+                  <a:srgbClr val="C7C9D9"/>
+                </a:solidFill>
+                <a:latin typeface="Calibri"/>
+              </a:rPr>
+              <a:t>This is an actual triage report generated by the pipeline, not a mocked example — it shows the exact structured output an engineer receives for the overflow_fault cluster.</a:t>
+            </a:r>
+          </a:p>
+        </p:txBody>
+      </p:sp>
+      <p:sp>
+        <p:nvSpPr>
+          <p:cNvPr id="10" name="Rectangle 9"/>
           <p:cNvSpPr/>
           <p:nvPr/>
         </p:nvSpPr>
         <p:spPr>
           <a:xfrm>
-            <a:off x="640080" y="1508760"/>
-            <a:ext cx="10911535" cy="4846320"/>
+            <a:off x="640080" y="1700784"/>
+            <a:ext cx="10911535" cy="4654296"/>
           </a:xfrm>
           <a:prstGeom prst="rect">
             <a:avLst/>
@@ -15477,13 +15802,13 @@
       </p:sp>
       <p:sp>
         <p:nvSpPr>
-          <p:cNvPr id="10" name="Rectangle 9"/>
+          <p:cNvPr id="11" name="Rectangle 10"/>
           <p:cNvSpPr/>
           <p:nvPr/>
         </p:nvSpPr>
         <p:spPr>
           <a:xfrm>
-            <a:off x="640080" y="1508760"/>
+            <a:off x="640080" y="1700784"/>
             <a:ext cx="10911535" cy="594360"/>
           </a:xfrm>
           <a:prstGeom prst="rect">
@@ -15521,13 +15846,13 @@
       </p:sp>
       <p:sp>
         <p:nvSpPr>
-          <p:cNvPr id="11" name="TextBox 10"/>
+          <p:cNvPr id="12" name="TextBox 11"/>
           <p:cNvSpPr txBox="1"/>
           <p:nvPr/>
         </p:nvSpPr>
         <p:spPr>
           <a:xfrm>
-            <a:off x="868680" y="1508760"/>
+            <a:off x="868680" y="1700784"/>
             <a:ext cx="7772400" cy="594360"/>
           </a:xfrm>
           <a:prstGeom prst="rect">
@@ -15564,13 +15889,13 @@
       </p:sp>
       <p:sp>
         <p:nvSpPr>
-          <p:cNvPr id="12" name="Rounded Rectangle 11"/>
+          <p:cNvPr id="13" name="Rounded Rectangle 12"/>
           <p:cNvSpPr/>
           <p:nvPr/>
         </p:nvSpPr>
         <p:spPr>
           <a:xfrm>
-            <a:off x="9722815" y="1618488"/>
+            <a:off x="9722815" y="1810512"/>
             <a:ext cx="1645920" cy="384048"/>
           </a:xfrm>
           <a:prstGeom prst="roundRect">
@@ -15617,13 +15942,13 @@
       </p:sp>
       <p:sp>
         <p:nvSpPr>
-          <p:cNvPr id="13" name="TextBox 12"/>
+          <p:cNvPr id="14" name="TextBox 13"/>
           <p:cNvSpPr txBox="1"/>
           <p:nvPr/>
         </p:nvSpPr>
         <p:spPr>
           <a:xfrm>
-            <a:off x="868680" y="2286000"/>
+            <a:off x="868680" y="2478024"/>
             <a:ext cx="10454335" cy="1554480"/>
           </a:xfrm>
           <a:prstGeom prst="rect">
@@ -15660,13 +15985,13 @@
       </p:sp>
       <p:sp>
         <p:nvSpPr>
-          <p:cNvPr id="14" name="TextBox 13"/>
+          <p:cNvPr id="15" name="TextBox 14"/>
           <p:cNvSpPr txBox="1"/>
           <p:nvPr/>
         </p:nvSpPr>
         <p:spPr>
           <a:xfrm>
-            <a:off x="868680" y="3886200"/>
+            <a:off x="868680" y="4078224"/>
             <a:ext cx="10454335" cy="1828800"/>
           </a:xfrm>
           <a:prstGeom prst="rect">
@@ -15774,7 +16099,7 @@
       </p:sp>
       <p:sp>
         <p:nvSpPr>
-          <p:cNvPr id="15" name="TextBox 14"/>
+          <p:cNvPr id="16" name="TextBox 15"/>
           <p:cNvSpPr txBox="1"/>
           <p:nvPr/>
         </p:nvSpPr>
@@ -16117,14 +16442,53 @@
       </p:sp>
       <p:sp>
         <p:nvSpPr>
-          <p:cNvPr id="9" name="Rectangle 8"/>
+          <p:cNvPr id="9" name="TextBox 8"/>
+          <p:cNvSpPr txBox="1"/>
+          <p:nvPr/>
+        </p:nvSpPr>
+        <p:spPr>
+          <a:xfrm>
+            <a:off x="640080" y="1280160"/>
+            <a:ext cx="10911535" cy="384048"/>
+          </a:xfrm>
+          <a:prstGeom prst="rect">
+            <a:avLst/>
+          </a:prstGeom>
+          <a:noFill/>
+        </p:spPr>
+        <p:txBody>
+          <a:bodyPr wrap="square" lIns="0" rIns="0" tIns="0" bIns="0">
+            <a:noAutofit/>
+          </a:bodyPr>
+          <a:lstStyle/>
+          <a:p>
+            <a:pPr>
+              <a:lnSpc>
+                <a:spcPct val="110000"/>
+              </a:lnSpc>
+            </a:pPr>
+            <a:r>
+              <a:rPr sz="1250" b="0" i="0">
+                <a:solidFill>
+                  <a:srgbClr val="C7C9D9"/>
+                </a:solidFill>
+                <a:latin typeface="Calibri"/>
+              </a:rPr>
+              <a:t>This report shows the hardest case the system handles: a cluster of records that passed simulation, where the real 'bug' is that the test suite cannot see the fault.</a:t>
+            </a:r>
+          </a:p>
+        </p:txBody>
+      </p:sp>
+      <p:sp>
+        <p:nvSpPr>
+          <p:cNvPr id="10" name="Rectangle 9"/>
           <p:cNvSpPr/>
           <p:nvPr/>
         </p:nvSpPr>
         <p:spPr>
           <a:xfrm>
-            <a:off x="640080" y="1508760"/>
-            <a:ext cx="10911535" cy="4846320"/>
+            <a:off x="640080" y="1700784"/>
+            <a:ext cx="10911535" cy="4654296"/>
           </a:xfrm>
           <a:prstGeom prst="rect">
             <a:avLst/>
@@ -16163,13 +16527,13 @@
       </p:sp>
       <p:sp>
         <p:nvSpPr>
-          <p:cNvPr id="10" name="Rectangle 9"/>
+          <p:cNvPr id="11" name="Rectangle 10"/>
           <p:cNvSpPr/>
           <p:nvPr/>
         </p:nvSpPr>
         <p:spPr>
           <a:xfrm>
-            <a:off x="640080" y="1508760"/>
+            <a:off x="640080" y="1700784"/>
             <a:ext cx="10911535" cy="594360"/>
           </a:xfrm>
           <a:prstGeom prst="rect">
@@ -16207,13 +16571,13 @@
       </p:sp>
       <p:sp>
         <p:nvSpPr>
-          <p:cNvPr id="11" name="TextBox 10"/>
+          <p:cNvPr id="12" name="TextBox 11"/>
           <p:cNvSpPr txBox="1"/>
           <p:nvPr/>
         </p:nvSpPr>
         <p:spPr>
           <a:xfrm>
-            <a:off x="868680" y="1508760"/>
+            <a:off x="868680" y="1700784"/>
             <a:ext cx="7772400" cy="594360"/>
           </a:xfrm>
           <a:prstGeom prst="rect">
@@ -16250,13 +16614,13 @@
       </p:sp>
       <p:sp>
         <p:nvSpPr>
-          <p:cNvPr id="12" name="Rounded Rectangle 11"/>
+          <p:cNvPr id="13" name="Rounded Rectangle 12"/>
           <p:cNvSpPr/>
           <p:nvPr/>
         </p:nvSpPr>
         <p:spPr>
           <a:xfrm>
-            <a:off x="9722815" y="1618488"/>
+            <a:off x="9722815" y="1810512"/>
             <a:ext cx="1645920" cy="384048"/>
           </a:xfrm>
           <a:prstGeom prst="roundRect">
@@ -16303,13 +16667,13 @@
       </p:sp>
       <p:sp>
         <p:nvSpPr>
-          <p:cNvPr id="13" name="TextBox 12"/>
+          <p:cNvPr id="14" name="TextBox 13"/>
           <p:cNvSpPr txBox="1"/>
           <p:nvPr/>
         </p:nvSpPr>
         <p:spPr>
           <a:xfrm>
-            <a:off x="868680" y="2286000"/>
+            <a:off x="868680" y="2478024"/>
             <a:ext cx="10454335" cy="1554480"/>
           </a:xfrm>
           <a:prstGeom prst="rect">
@@ -16346,13 +16710,13 @@
       </p:sp>
       <p:sp>
         <p:nvSpPr>
-          <p:cNvPr id="14" name="TextBox 13"/>
+          <p:cNvPr id="15" name="TextBox 14"/>
           <p:cNvSpPr txBox="1"/>
           <p:nvPr/>
         </p:nvSpPr>
         <p:spPr>
           <a:xfrm>
-            <a:off x="868680" y="3886200"/>
+            <a:off x="868680" y="4078224"/>
             <a:ext cx="10454335" cy="1828800"/>
           </a:xfrm>
           <a:prstGeom prst="rect">
@@ -16460,7 +16824,7 @@
       </p:sp>
       <p:sp>
         <p:nvSpPr>
-          <p:cNvPr id="15" name="TextBox 14"/>
+          <p:cNvPr id="16" name="TextBox 15"/>
           <p:cNvSpPr txBox="1"/>
           <p:nvPr/>
         </p:nvSpPr>
@@ -16825,11 +17189,11 @@
           <a:p>
             <a:pPr>
               <a:spcAft>
-                <a:spcPts val="1600"/>
+                <a:spcPts val="800"/>
               </a:spcAft>
             </a:pPr>
             <a:r>
-              <a:rPr sz="1800" b="1" i="0">
+              <a:rPr sz="1300" b="1" i="0">
                 <a:solidFill>
                   <a:srgbClr val="F0A500"/>
                 </a:solidFill>
@@ -16838,23 +17202,23 @@
               <a:t>•  </a:t>
             </a:r>
             <a:r>
-              <a:rPr sz="1800" b="0" i="0">
+              <a:rPr sz="1300" b="0" i="0">
                 <a:solidFill>
                   <a:srgbClr val="FFFFFF"/>
                 </a:solidFill>
                 <a:latin typeface="Calibri"/>
               </a:rPr>
-              <a:t>Verilator generates dump.vcd in sim_build_*/ directories</a:t>
+              <a:t>Verilator writes a full signal-level waveform dump, dump.vcd, into each sim_build_* directory during simulation, and this file normally goes unused once a pass/fail verdict is recorded.</a:t>
             </a:r>
           </a:p>
           <a:p>
             <a:pPr>
               <a:spcAft>
-                <a:spcPts val="1600"/>
+                <a:spcPts val="800"/>
               </a:spcAft>
             </a:pPr>
             <a:r>
-              <a:rPr sz="1800" b="1" i="0">
+              <a:rPr sz="1300" b="1" i="0">
                 <a:solidFill>
                   <a:srgbClr val="F0A500"/>
                 </a:solidFill>
@@ -16863,23 +17227,23 @@
               <a:t>•  </a:t>
             </a:r>
             <a:r>
-              <a:rPr sz="1800" b="0" i="0">
+              <a:rPr sz="1300" b="0" i="0">
                 <a:solidFill>
                   <a:srgbClr val="FFFFFF"/>
                 </a:solidFill>
                 <a:latin typeface="Calibri"/>
               </a:rPr>
-              <a:t>triage/vcd_parser.py parses VCD using Python stdlib only</a:t>
+              <a:t>triage/vcd_parser.py extracts value from that waveform using only the Python standard library, with no external VCD-parsing dependency to install or maintain.</a:t>
             </a:r>
           </a:p>
           <a:p>
             <a:pPr>
               <a:spcAft>
-                <a:spcPts val="1600"/>
+                <a:spcPts val="800"/>
               </a:spcAft>
             </a:pPr>
             <a:r>
-              <a:rPr sz="1800" b="1" i="0">
+              <a:rPr sz="1300" b="1" i="0">
                 <a:solidFill>
                   <a:srgbClr val="F0A500"/>
                 </a:solidFill>
@@ -16888,23 +17252,23 @@
               <a:t>•  </a:t>
             </a:r>
             <a:r>
-              <a:rPr sz="1800" b="0" i="0">
+              <a:rPr sz="1300" b="0" i="0">
                 <a:solidFill>
                   <a:srgbClr val="FFFFFF"/>
                 </a:solidFill>
                 <a:latin typeface="Calibri"/>
               </a:rPr>
-              <a:t>Extracts: first_divergence_cycle, total_cycles, diverging_signals</a:t>
+              <a:t>It extracts three fields — first_divergence_cycle, total_cycles, and diverging_signals — adding a temporal dimension to the otherwise purely numeric feature vector.</a:t>
             </a:r>
           </a:p>
           <a:p>
             <a:pPr>
               <a:spcAft>
-                <a:spcPts val="1600"/>
+                <a:spcPts val="800"/>
               </a:spcAft>
             </a:pPr>
             <a:r>
-              <a:rPr sz="1800" b="1" i="0">
+              <a:rPr sz="1300" b="1" i="0">
                 <a:solidFill>
                   <a:srgbClr val="F0A500"/>
                 </a:solidFill>
@@ -16913,23 +17277,23 @@
               <a:t>•  </a:t>
             </a:r>
             <a:r>
-              <a:rPr sz="1800" b="0" i="0">
+              <a:rPr sz="1300" b="0" i="0">
                 <a:solidFill>
                   <a:srgbClr val="FFFFFF"/>
                 </a:solidFill>
                 <a:latin typeface="Calibri"/>
               </a:rPr>
-              <a:t>first_divergence_cycle: clock cycle when out_valid first goes high</a:t>
+              <a:t>first_divergence_cycle records the clock cycle on which the out_valid signal first rises, acting as a proxy for when the DUT first produced meaningful output.</a:t>
             </a:r>
           </a:p>
           <a:p>
             <a:pPr>
               <a:spcAft>
-                <a:spcPts val="1600"/>
+                <a:spcPts val="800"/>
               </a:spcAft>
             </a:pPr>
             <a:r>
-              <a:rPr sz="1800" b="1" i="0">
+              <a:rPr sz="1300" b="1" i="0">
                 <a:solidFill>
                   <a:srgbClr val="F0A500"/>
                 </a:solidFill>
@@ -16938,23 +17302,23 @@
               <a:t>•  </a:t>
             </a:r>
             <a:r>
-              <a:rPr sz="1800" b="0" i="0">
+              <a:rPr sz="1300" b="0" i="0">
                 <a:solidFill>
                   <a:srgbClr val="FFFFFF"/>
                 </a:solidFill>
                 <a:latin typeface="Calibri"/>
               </a:rPr>
-              <a:t>Reset faults diverge at cycle 0-2; accumulator faults diverge later</a:t>
+              <a:t>Reset faults tend to diverge almost immediately, within cycles 0 through 2, while accumulator and quantization faults typically diverge much later in COMPUTE or QUANTIZE.</a:t>
             </a:r>
           </a:p>
           <a:p>
             <a:pPr>
               <a:spcAft>
-                <a:spcPts val="1600"/>
+                <a:spcPts val="800"/>
               </a:spcAft>
             </a:pPr>
             <a:r>
-              <a:rPr sz="1800" b="1" i="0">
+              <a:rPr sz="1300" b="1" i="0">
                 <a:solidFill>
                   <a:srgbClr val="F0A500"/>
                 </a:solidFill>
@@ -16963,23 +17327,23 @@
               <a:t>•  </a:t>
             </a:r>
             <a:r>
-              <a:rPr sz="1800" b="0" i="0">
+              <a:rPr sz="1300" b="0" i="0">
                 <a:solidFill>
                   <a:srgbClr val="FFFFFF"/>
                 </a:solidFill>
                 <a:latin typeface="Calibri"/>
               </a:rPr>
-              <a:t>Adds temporal context to feature vectors for clustering</a:t>
+              <a:t>Adding this timing context to the feature vector gives the clusterer another axis to separate fault types that look similar in error magnitude alone.</a:t>
             </a:r>
           </a:p>
           <a:p>
             <a:pPr>
               <a:spcAft>
-                <a:spcPts val="1600"/>
+                <a:spcPts val="800"/>
               </a:spcAft>
             </a:pPr>
             <a:r>
-              <a:rPr sz="1800" b="1" i="0">
+              <a:rPr sz="1300" b="1" i="0">
                 <a:solidFill>
                   <a:srgbClr val="F0A500"/>
                 </a:solidFill>
@@ -16988,13 +17352,13 @@
               <a:t>•  </a:t>
             </a:r>
             <a:r>
-              <a:rPr sz="1800" b="0" i="0">
+              <a:rPr sz="1300" b="0" i="0">
                 <a:solidFill>
                   <a:srgbClr val="FFFFFF"/>
                 </a:solidFill>
                 <a:latin typeface="Calibri"/>
               </a:rPr>
-              <a:t>Handles missing/empty VCD gracefully (returns None)</a:t>
+              <a:t>If the VCD file is missing or empty, the parser fails gracefully and returns an all-None result rather than raising an exception that would crash the pipeline.</a:t>
             </a:r>
           </a:p>
         </p:txBody>
@@ -17308,7 +17672,7 @@
         <p:spPr>
           <a:xfrm>
             <a:off x="640080" y="1508760"/>
-            <a:ext cx="10911535" cy="4892040"/>
+            <a:ext cx="10911535" cy="1737360"/>
           </a:xfrm>
           <a:prstGeom prst="rect">
             <a:avLst/>
@@ -17322,12 +17686,51 @@
           <a:lstStyle/>
           <a:p>
             <a:pPr>
+              <a:lnSpc>
+                <a:spcPct val="120000"/>
+              </a:lnSpc>
+            </a:pPr>
+            <a:r>
+              <a:rPr sz="1600" b="0" i="0">
+                <a:solidFill>
+                  <a:srgbClr val="FFFFFF"/>
+                </a:solidFill>
+                <a:latin typeface="Calibri"/>
+              </a:rPr>
+              <a:t>Neural network accelerators present unique verification challenges because they combine fixed-point arithmetic, per-channel quantization, and complex memory access patterns in a single design. A sign extension error in the weight register, an accumulator that is one bit too narrow, or a quantization shift applied in the wrong direction can all produce subtly incorrect outputs that are hard to distinguish without understanding the full datapath. These are the exact failure modes our system is designed to triage.</a:t>
+            </a:r>
+          </a:p>
+        </p:txBody>
+      </p:sp>
+      <p:sp>
+        <p:nvSpPr>
+          <p:cNvPr id="10" name="TextBox 9"/>
+          <p:cNvSpPr txBox="1"/>
+          <p:nvPr/>
+        </p:nvSpPr>
+        <p:spPr>
+          <a:xfrm>
+            <a:off x="640080" y="3246120"/>
+            <a:ext cx="10911535" cy="3200400"/>
+          </a:xfrm>
+          <a:prstGeom prst="rect">
+            <a:avLst/>
+          </a:prstGeom>
+          <a:noFill/>
+        </p:spPr>
+        <p:txBody>
+          <a:bodyPr wrap="square" lIns="0" rIns="0" tIns="0" bIns="0">
+            <a:noAutofit/>
+          </a:bodyPr>
+          <a:lstStyle/>
+          <a:p>
+            <a:pPr>
               <a:spcAft>
-                <a:spcPts val="1800"/>
+                <a:spcPts val="1200"/>
               </a:spcAft>
             </a:pPr>
             <a:r>
-              <a:rPr sz="2000" b="1" i="0">
+              <a:rPr sz="1500" b="1" i="0">
                 <a:solidFill>
                   <a:srgbClr val="F0A500"/>
                 </a:solidFill>
@@ -17336,23 +17739,23 @@
               <a:t>•  </a:t>
             </a:r>
             <a:r>
-              <a:rPr sz="2000" b="0" i="0">
+              <a:rPr sz="1500" b="0" i="0">
                 <a:solidFill>
                   <a:srgbClr val="FFFFFF"/>
                 </a:solidFill>
                 <a:latin typeface="Calibri"/>
               </a:rPr>
-              <a:t>NN accelerators are the fastest-growing chip category (GPUs, TPUs, NPUs)</a:t>
+              <a:t>NN accelerators are the fastest-growing category of custom silicon, spanning data-center GPUs and TPUs down to edge NPUs in phones and sensors.</a:t>
             </a:r>
           </a:p>
           <a:p>
             <a:pPr>
               <a:spcAft>
-                <a:spcPts val="1800"/>
+                <a:spcPts val="1200"/>
               </a:spcAft>
             </a:pPr>
             <a:r>
-              <a:rPr sz="2000" b="1" i="0">
+              <a:rPr sz="1500" b="1" i="0">
                 <a:solidFill>
                   <a:srgbClr val="F0A500"/>
                 </a:solidFill>
@@ -17361,23 +17764,23 @@
               <a:t>•  </a:t>
             </a:r>
             <a:r>
-              <a:rPr sz="2000" b="0" i="0">
+              <a:rPr sz="1500" b="0" i="0">
                 <a:solidFill>
                   <a:srgbClr val="FFFFFF"/>
                 </a:solidFill>
                 <a:latin typeface="Calibri"/>
               </a:rPr>
-              <a:t>Complex fixed-point arithmetic: quantization, accumulation, memory arbitration</a:t>
+              <a:t>Verification complexity scales with model size and numeric precision, so bugs that are invisible at small tensor shapes can reappear at production scale.</a:t>
             </a:r>
           </a:p>
           <a:p>
             <a:pPr>
               <a:spcAft>
-                <a:spcPts val="1800"/>
+                <a:spcPts val="1200"/>
               </a:spcAft>
             </a:pPr>
             <a:r>
-              <a:rPr sz="2000" b="1" i="0">
+              <a:rPr sz="1500" b="1" i="0">
                 <a:solidFill>
                   <a:srgbClr val="F0A500"/>
                 </a:solidFill>
@@ -17386,38 +17789,13 @@
               <a:t>•  </a:t>
             </a:r>
             <a:r>
-              <a:rPr sz="2000" b="0" i="0">
+              <a:rPr sz="1500" b="0" i="0">
                 <a:solidFill>
                   <a:srgbClr val="FFFFFF"/>
                 </a:solidFill>
                 <a:latin typeface="Calibri"/>
               </a:rPr>
-              <a:t>Unique failure modes: sign extension errors, accumulator overflow, quantization drift</a:t>
-            </a:r>
-          </a:p>
-          <a:p>
-            <a:pPr>
-              <a:spcAft>
-                <a:spcPts val="1800"/>
-              </a:spcAft>
-            </a:pPr>
-            <a:r>
-              <a:rPr sz="2000" b="1" i="0">
-                <a:solidFill>
-                  <a:srgbClr val="F0A500"/>
-                </a:solidFill>
-                <a:latin typeface="Calibri"/>
-              </a:rPr>
-              <a:t>•  </a:t>
-            </a:r>
-            <a:r>
-              <a:rPr sz="2000" b="0" i="0">
-                <a:solidFill>
-                  <a:srgbClr val="FFFFFF"/>
-                </a:solidFill>
-                <a:latin typeface="Calibri"/>
-              </a:rPr>
-              <a:t>Verification complexity grows with model size and precision requirements</a:t>
+              <a:t>Because the failure symptoms are numeric rather than structural, distinguishing an overflow from a sign error often requires deep datapath knowledge that our triage agent encodes directly.</a:t>
             </a:r>
           </a:p>
         </p:txBody>
@@ -17746,11 +18124,11 @@
           <a:p>
             <a:pPr>
               <a:spcAft>
-                <a:spcPts val="1500"/>
+                <a:spcPts val="1000"/>
               </a:spcAft>
             </a:pPr>
             <a:r>
-              <a:rPr sz="1700" b="1" i="0">
+              <a:rPr sz="1400" b="1" i="0">
                 <a:solidFill>
                   <a:srgbClr val="F0A500"/>
                 </a:solidFill>
@@ -17759,23 +18137,23 @@
               <a:t>•  </a:t>
             </a:r>
             <a:r>
-              <a:rPr sz="1700" b="0" i="0">
+              <a:rPr sz="1400" b="0" i="0">
                 <a:solidFill>
                   <a:srgbClr val="FFFFFF"/>
                 </a:solidFill>
                 <a:latin typeface="Calibri"/>
               </a:rPr>
-              <a:t>Ground truth: benchmark/ground_truth.json maps each variant to canonical label</a:t>
+              <a:t>To measure triage quality objectively, we built benchmark/ground_truth.json, which maps every RTL variant to one canonical, human-verified label.</a:t>
             </a:r>
           </a:p>
           <a:p>
             <a:pPr>
               <a:spcAft>
-                <a:spcPts val="1500"/>
+                <a:spcPts val="1000"/>
               </a:spcAft>
             </a:pPr>
             <a:r>
-              <a:rPr sz="1700" b="1" i="0">
+              <a:rPr sz="1400" b="1" i="0">
                 <a:solidFill>
                   <a:srgbClr val="F0A500"/>
                 </a:solidFill>
@@ -17784,23 +18162,23 @@
               <a:t>•  </a:t>
             </a:r>
             <a:r>
-              <a:rPr sz="1700" b="0" i="0">
+              <a:rPr sz="1400" b="0" i="0">
                 <a:solidFill>
                   <a:srgbClr val="FFFFFF"/>
                 </a:solidFill>
                 <a:latin typeface="Calibri"/>
               </a:rPr>
-              <a:t>9 ground truth labels: no_fault, accumulator_overflow, sign_extension_error, loop_boundary_error, arithmetic_error, reset_polarity_error, shift_error, saturation_error, zero_point_error</a:t>
+              <a:t>The ground truth defines nine labels — no_fault, accumulator_overflow, sign_extension_error, loop_boundary_error, arithmetic_error, reset_polarity_error, shift_error, saturation_error, and zero_point_error.</a:t>
             </a:r>
           </a:p>
           <a:p>
             <a:pPr>
               <a:spcAft>
-                <a:spcPts val="1500"/>
+                <a:spcPts val="1000"/>
               </a:spcAft>
             </a:pPr>
             <a:r>
-              <a:rPr sz="1700" b="1" i="0">
+              <a:rPr sz="1400" b="1" i="0">
                 <a:solidFill>
                   <a:srgbClr val="F0A500"/>
                 </a:solidFill>
@@ -17809,23 +18187,41 @@
               <a:t>•  </a:t>
             </a:r>
             <a:r>
-              <a:rPr sz="1700" b="0" i="0">
+              <a:rPr sz="1400" b="0" i="0">
                 <a:solidFill>
                   <a:srgbClr val="FFFFFF"/>
                 </a:solidFill>
                 <a:latin typeface="Calibri"/>
               </a:rPr>
-              <a:t>Metrics: precision, recall, F1 per label + overall accuracy</a:t>
+              <a:t>For each label we compute precision, recall, and F1 score, alongside one overall accuracy number across all </a:t>
+            </a:r>
+            <a:r>
+              <a:rPr sz="1400" b="1" i="0">
+                <a:solidFill>
+                  <a:srgbClr val="F0A500"/>
+                </a:solidFill>
+                <a:latin typeface="Calibri"/>
+              </a:rPr>
+              <a:t>255 records</a:t>
+            </a:r>
+            <a:r>
+              <a:rPr sz="1400" b="0" i="0">
+                <a:solidFill>
+                  <a:srgbClr val="FFFFFF"/>
+                </a:solidFill>
+                <a:latin typeface="Calibri"/>
+              </a:rPr>
+              <a:t>.</a:t>
             </a:r>
           </a:p>
           <a:p>
             <a:pPr>
               <a:spcAft>
-                <a:spcPts val="1500"/>
+                <a:spcPts val="1000"/>
               </a:spcAft>
             </a:pPr>
             <a:r>
-              <a:rPr sz="1700" b="1" i="0">
+              <a:rPr sz="1400" b="1" i="0">
                 <a:solidFill>
                   <a:srgbClr val="F0A500"/>
                 </a:solidFill>
@@ -17834,23 +18230,23 @@
               <a:t>•  </a:t>
             </a:r>
             <a:r>
-              <a:rPr sz="1700" b="0" i="0">
+              <a:rPr sz="1400" b="0" i="0">
                 <a:solidFill>
                   <a:srgbClr val="FFFFFF"/>
                 </a:solidFill>
                 <a:latin typeface="Calibri"/>
               </a:rPr>
-              <a:t>Implemented from scratch (no sklearn) using confusion matrix</a:t>
+              <a:t>The evaluator is implemented from scratch using a confusion matrix, with no dependency on scikit-learn's metrics module, so the scoring logic is fully auditable.</a:t>
             </a:r>
           </a:p>
           <a:p>
             <a:pPr>
               <a:spcAft>
-                <a:spcPts val="1500"/>
+                <a:spcPts val="1000"/>
               </a:spcAft>
             </a:pPr>
             <a:r>
-              <a:rPr sz="1700" b="1" i="0">
+              <a:rPr sz="1400" b="1" i="0">
                 <a:solidFill>
                   <a:srgbClr val="F0A500"/>
                 </a:solidFill>
@@ -17859,23 +18255,23 @@
               <a:t>•  </a:t>
             </a:r>
             <a:r>
-              <a:rPr sz="1700" b="0" i="0">
+              <a:rPr sz="1400" b="0" i="0">
                 <a:solidFill>
                   <a:srgbClr val="FFFFFF"/>
                 </a:solidFill>
                 <a:latin typeface="Calibri"/>
               </a:rPr>
-              <a:t>Manual baseline: 45 minutes per failure cluster (industry estimate)</a:t>
+              <a:t>The manual triage baseline is set at 45 minutes per failure cluster, a conservative industry estimate for an experienced verification engineer reading logs and forming a hypothesis by hand.</a:t>
             </a:r>
           </a:p>
           <a:p>
             <a:pPr>
               <a:spcAft>
-                <a:spcPts val="1500"/>
+                <a:spcPts val="1000"/>
               </a:spcAft>
             </a:pPr>
             <a:r>
-              <a:rPr sz="1700" b="1" i="0">
+              <a:rPr sz="1400" b="1" i="0">
                 <a:solidFill>
                   <a:srgbClr val="F0A500"/>
                 </a:solidFill>
@@ -17884,13 +18280,13 @@
               <a:t>•  </a:t>
             </a:r>
             <a:r>
-              <a:rPr sz="1700" b="0" i="0">
+              <a:rPr sz="1400" b="0" i="0">
                 <a:solidFill>
                   <a:srgbClr val="FFFFFF"/>
                 </a:solidFill>
                 <a:latin typeface="Calibri"/>
               </a:rPr>
-              <a:t>Speedup = manual_baseline_seconds / total_ai_time</a:t>
+              <a:t>Speedup is computed simply as the manual baseline time in seconds divided by the AI pipeline's total measured time, giving a single honest multiplier.</a:t>
             </a:r>
           </a:p>
         </p:txBody>
@@ -18195,17 +18591,74 @@
           </a:p>
         </p:txBody>
       </p:sp>
+      <p:sp>
+        <p:nvSpPr>
+          <p:cNvPr id="9" name="TextBox 8"/>
+          <p:cNvSpPr txBox="1"/>
+          <p:nvPr/>
+        </p:nvSpPr>
+        <p:spPr>
+          <a:xfrm>
+            <a:off x="640080" y="1508760"/>
+            <a:ext cx="10911535" cy="777240"/>
+          </a:xfrm>
+          <a:prstGeom prst="rect">
+            <a:avLst/>
+          </a:prstGeom>
+          <a:noFill/>
+        </p:spPr>
+        <p:txBody>
+          <a:bodyPr wrap="square" lIns="0" rIns="0" tIns="0" bIns="0">
+            <a:noAutofit/>
+          </a:bodyPr>
+          <a:lstStyle/>
+          <a:p>
+            <a:pPr>
+              <a:lnSpc>
+                <a:spcPct val="115000"/>
+              </a:lnSpc>
+            </a:pPr>
+            <a:r>
+              <a:rPr sz="1400" b="0" i="0">
+                <a:solidFill>
+                  <a:srgbClr val="C7C9D9"/>
+                </a:solidFill>
+                <a:latin typeface="Calibri"/>
+              </a:rPr>
+              <a:t>This table is the headline result of the project: the same 255-record benchmark scored twice, once with Claude generating explanations and once using only the rule-based clusterer. Both approaches land on identical </a:t>
+            </a:r>
+            <a:r>
+              <a:rPr sz="1400" b="1" i="0">
+                <a:solidFill>
+                  <a:srgbClr val="F0A500"/>
+                </a:solidFill>
+                <a:latin typeface="Calibri"/>
+              </a:rPr>
+              <a:t>96.5%</a:t>
+            </a:r>
+            <a:r>
+              <a:rPr sz="1400" b="0" i="0">
+                <a:solidFill>
+                  <a:srgbClr val="C7C9D9"/>
+                </a:solidFill>
+                <a:latin typeface="Calibri"/>
+              </a:rPr>
+              <a:t> accuracy, but they differ enormously in confidence, latency, and the value they add beyond a bare label.</a:t>
+            </a:r>
+          </a:p>
+        </p:txBody>
+      </p:sp>
       <p:graphicFrame>
         <p:nvGraphicFramePr>
-          <p:cNvPr id="9" name="Table 8"/>
+          <p:cNvPr id="10" name="Table 9"/>
           <p:cNvGraphicFramePr>
             <a:graphicFrameLocks noGrp="1"/>
           </p:cNvGraphicFramePr>
           <p:nvPr/>
         </p:nvGraphicFramePr>
         <p:xfrm>
-          <a:off x="640080" y="1691640"/>
-          <a:ext cx="10789920" cy="3931920"/>
+          <a:off x="640080" y="2377440"/>
+          <a:ext cx="10789920" cy="3246120"/>
         </p:xfrm>
         <a:graphic>
           <a:graphicData uri="http://schemas.openxmlformats.org/drawingml/2006/table">
@@ -18218,7 +18671,7 @@
                 <a:gridCol w="3840480"/>
                 <a:gridCol w="2834640"/>
               </a:tblGrid>
-              <a:tr h="436880">
+              <a:tr h="360680">
                 <a:tc>
                   <a:txBody>
                     <a:bodyPr wrap="square"/>
@@ -18289,7 +18742,7 @@
                   </a:tcPr>
                 </a:tc>
               </a:tr>
-              <a:tr h="436880">
+              <a:tr h="360680">
                 <a:tc>
                   <a:txBody>
                     <a:bodyPr wrap="square"/>
@@ -18360,7 +18813,7 @@
                   </a:tcPr>
                 </a:tc>
               </a:tr>
-              <a:tr h="436880">
+              <a:tr h="360680">
                 <a:tc>
                   <a:txBody>
                     <a:bodyPr wrap="square"/>
@@ -18431,7 +18884,7 @@
                   </a:tcPr>
                 </a:tc>
               </a:tr>
-              <a:tr h="436880">
+              <a:tr h="360680">
                 <a:tc>
                   <a:txBody>
                     <a:bodyPr wrap="square"/>
@@ -18502,7 +18955,7 @@
                   </a:tcPr>
                 </a:tc>
               </a:tr>
-              <a:tr h="436880">
+              <a:tr h="360680">
                 <a:tc>
                   <a:txBody>
                     <a:bodyPr wrap="square"/>
@@ -18573,7 +19026,7 @@
                   </a:tcPr>
                 </a:tc>
               </a:tr>
-              <a:tr h="436880">
+              <a:tr h="360680">
                 <a:tc>
                   <a:txBody>
                     <a:bodyPr wrap="square"/>
@@ -18644,7 +19097,7 @@
                   </a:tcPr>
                 </a:tc>
               </a:tr>
-              <a:tr h="436880">
+              <a:tr h="360680">
                 <a:tc>
                   <a:txBody>
                     <a:bodyPr wrap="square"/>
@@ -18715,7 +19168,7 @@
                   </a:tcPr>
                 </a:tc>
               </a:tr>
-              <a:tr h="436880">
+              <a:tr h="360680">
                 <a:tc>
                   <a:txBody>
                     <a:bodyPr wrap="square"/>
@@ -18786,7 +19239,7 @@
                   </a:tcPr>
                 </a:tc>
               </a:tr>
-              <a:tr h="436880">
+              <a:tr h="360680">
                 <a:tc>
                   <a:txBody>
                     <a:bodyPr wrap="square"/>
@@ -19161,17 +19614,56 @@
           </a:p>
         </p:txBody>
       </p:sp>
+      <p:sp>
+        <p:nvSpPr>
+          <p:cNvPr id="9" name="TextBox 8"/>
+          <p:cNvSpPr txBox="1"/>
+          <p:nvPr/>
+        </p:nvSpPr>
+        <p:spPr>
+          <a:xfrm>
+            <a:off x="640080" y="1508760"/>
+            <a:ext cx="10911535" cy="777240"/>
+          </a:xfrm>
+          <a:prstGeom prst="rect">
+            <a:avLst/>
+          </a:prstGeom>
+          <a:noFill/>
+        </p:spPr>
+        <p:txBody>
+          <a:bodyPr wrap="square" lIns="0" rIns="0" tIns="0" bIns="0">
+            <a:noAutofit/>
+          </a:bodyPr>
+          <a:lstStyle/>
+          <a:p>
+            <a:pPr>
+              <a:lnSpc>
+                <a:spcPct val="115000"/>
+              </a:lnSpc>
+            </a:pPr>
+            <a:r>
+              <a:rPr sz="1400" b="0" i="0">
+                <a:solidFill>
+                  <a:srgbClr val="C7C9D9"/>
+                </a:solidFill>
+                <a:latin typeface="Calibri"/>
+              </a:rPr>
+              <a:t>Breaking accuracy down by individual fault category shows exactly where the system is strong and where it struggles. Every category reaches perfect or near-perfect precision, and the only meaningful weak spot is recall on saturation_error, shift_error, and zero_point_error — the categories that include undetectable latent quant faults.</a:t>
+            </a:r>
+          </a:p>
+        </p:txBody>
+      </p:sp>
       <p:graphicFrame>
         <p:nvGraphicFramePr>
-          <p:cNvPr id="9" name="Table 8"/>
+          <p:cNvPr id="10" name="Table 9"/>
           <p:cNvGraphicFramePr>
             <a:graphicFrameLocks noGrp="1"/>
           </p:cNvGraphicFramePr>
           <p:nvPr/>
         </p:nvGraphicFramePr>
         <p:xfrm>
-          <a:off x="640080" y="1554480"/>
-          <a:ext cx="10789920" cy="4480560"/>
+          <a:off x="640080" y="2377440"/>
+          <a:ext cx="10789920" cy="3657600"/>
         </p:xfrm>
         <a:graphic>
           <a:graphicData uri="http://schemas.openxmlformats.org/drawingml/2006/table">
@@ -19186,7 +19678,7 @@
                 <a:gridCol w="1554480"/>
                 <a:gridCol w="1737360"/>
               </a:tblGrid>
-              <a:tr h="407323">
+              <a:tr h="332509">
                 <a:tc>
                   <a:txBody>
                     <a:bodyPr wrap="square"/>
@@ -19303,7 +19795,7 @@
                   </a:tcPr>
                 </a:tc>
               </a:tr>
-              <a:tr h="407323">
+              <a:tr h="332509">
                 <a:tc>
                   <a:txBody>
                     <a:bodyPr wrap="square"/>
@@ -19420,7 +19912,7 @@
                   </a:tcPr>
                 </a:tc>
               </a:tr>
-              <a:tr h="407323">
+              <a:tr h="332509">
                 <a:tc>
                   <a:txBody>
                     <a:bodyPr wrap="square"/>
@@ -19537,7 +20029,7 @@
                   </a:tcPr>
                 </a:tc>
               </a:tr>
-              <a:tr h="407323">
+              <a:tr h="332509">
                 <a:tc>
                   <a:txBody>
                     <a:bodyPr wrap="square"/>
@@ -19654,7 +20146,7 @@
                   </a:tcPr>
                 </a:tc>
               </a:tr>
-              <a:tr h="407323">
+              <a:tr h="332509">
                 <a:tc>
                   <a:txBody>
                     <a:bodyPr wrap="square"/>
@@ -19771,7 +20263,7 @@
                   </a:tcPr>
                 </a:tc>
               </a:tr>
-              <a:tr h="407323">
+              <a:tr h="332509">
                 <a:tc>
                   <a:txBody>
                     <a:bodyPr wrap="square"/>
@@ -19888,7 +20380,7 @@
                   </a:tcPr>
                 </a:tc>
               </a:tr>
-              <a:tr h="407323">
+              <a:tr h="332509">
                 <a:tc>
                   <a:txBody>
                     <a:bodyPr wrap="square"/>
@@ -20005,7 +20497,7 @@
                   </a:tcPr>
                 </a:tc>
               </a:tr>
-              <a:tr h="407323">
+              <a:tr h="332509">
                 <a:tc>
                   <a:txBody>
                     <a:bodyPr wrap="square"/>
@@ -20122,7 +20614,7 @@
                   </a:tcPr>
                 </a:tc>
               </a:tr>
-              <a:tr h="407323">
+              <a:tr h="332509">
                 <a:tc>
                   <a:txBody>
                     <a:bodyPr wrap="square"/>
@@ -20239,7 +20731,7 @@
                   </a:tcPr>
                 </a:tc>
               </a:tr>
-              <a:tr h="407323">
+              <a:tr h="332509">
                 <a:tc>
                   <a:txBody>
                     <a:bodyPr wrap="square"/>
@@ -20356,7 +20848,7 @@
                   </a:tcPr>
                 </a:tc>
               </a:tr>
-              <a:tr h="407330">
+              <a:tr h="332510">
                 <a:tc>
                   <a:txBody>
                     <a:bodyPr wrap="square"/>
@@ -20786,7 +21278,7 @@
         <p:spPr>
           <a:xfrm>
             <a:off x="640080" y="1508760"/>
-            <a:ext cx="10911535" cy="4892040"/>
+            <a:ext cx="10911535" cy="2423160"/>
           </a:xfrm>
           <a:prstGeom prst="rect">
             <a:avLst/>
@@ -20800,12 +21292,69 @@
           <a:lstStyle/>
           <a:p>
             <a:pPr>
+              <a:lnSpc>
+                <a:spcPct val="120000"/>
+              </a:lnSpc>
+            </a:pPr>
+            <a:r>
+              <a:rPr sz="1600" b="0" i="0">
+                <a:solidFill>
+                  <a:srgbClr val="FFFFFF"/>
+                </a:solidFill>
+                <a:latin typeface="Calibri"/>
+              </a:rPr>
+              <a:t>A natural question is: if the LLM and rule-based system achieve the same </a:t>
+            </a:r>
+            <a:r>
+              <a:rPr sz="1600" b="1" i="0">
+                <a:solidFill>
+                  <a:srgbClr val="F0A500"/>
+                </a:solidFill>
+                <a:latin typeface="Calibri"/>
+              </a:rPr>
+              <a:t>96.5%</a:t>
+            </a:r>
+            <a:r>
+              <a:rPr sz="1600" b="0" i="0">
+                <a:solidFill>
+                  <a:srgbClr val="FFFFFF"/>
+                </a:solidFill>
+                <a:latin typeface="Calibri"/>
+              </a:rPr>
+              <a:t> accuracy, what does the LLM actually contribute? The answer is that classification and explanation are two different problems. The rule-based clusterer is already near-optimal for the 9 defined fault categories — adding an LLM cannot improve on rules that were designed for exactly these faults. However, for a novel fault that no rule covers, the LLM can still reason from raw symptom statistics and produce a useful hypothesis. More importantly, a label like overflow_fault tells an engineer nothing about where to look or what to do — the LLM's natural language report with specific file names, line numbers, and test recommendations is what actually saves the 45 minutes.</a:t>
+            </a:r>
+          </a:p>
+        </p:txBody>
+      </p:sp>
+      <p:sp>
+        <p:nvSpPr>
+          <p:cNvPr id="10" name="TextBox 9"/>
+          <p:cNvSpPr txBox="1"/>
+          <p:nvPr/>
+        </p:nvSpPr>
+        <p:spPr>
+          <a:xfrm>
+            <a:off x="640080" y="3931920"/>
+            <a:ext cx="10911535" cy="2514600"/>
+          </a:xfrm>
+          <a:prstGeom prst="rect">
+            <a:avLst/>
+          </a:prstGeom>
+          <a:noFill/>
+        </p:spPr>
+        <p:txBody>
+          <a:bodyPr wrap="square" lIns="0" rIns="0" tIns="0" bIns="0">
+            <a:noAutofit/>
+          </a:bodyPr>
+          <a:lstStyle/>
+          <a:p>
+            <a:pPr>
               <a:spcAft>
-                <a:spcPts val="1300"/>
+                <a:spcPts val="800"/>
               </a:spcAft>
             </a:pPr>
             <a:r>
-              <a:rPr sz="1750" b="1" i="0">
+              <a:rPr sz="1350" b="1" i="0">
                 <a:solidFill>
                   <a:srgbClr val="F0A500"/>
                 </a:solidFill>
@@ -20814,32 +21363,23 @@
               <a:t>•  </a:t>
             </a:r>
             <a:r>
-              <a:rPr sz="1750" b="0" i="0">
+              <a:rPr sz="1350" b="0" i="0">
                 <a:solidFill>
                   <a:srgbClr val="FFFFFF"/>
                 </a:solidFill>
                 <a:latin typeface="Calibri"/>
               </a:rPr>
-              <a:t>Rules handle KNOWN fault categories — already near-optimal at </a:t>
-            </a:r>
-            <a:r>
-              <a:rPr sz="1750" b="1" i="0">
-                <a:solidFill>
-                  <a:srgbClr val="F0A500"/>
-                </a:solidFill>
-                <a:latin typeface="Calibri"/>
-              </a:rPr>
-              <a:t>96.5%</a:t>
+              <a:t>Rules handle the nine known fault categories at near-ceiling accuracy, so there is no classification accuracy left for an LLM to add.</a:t>
             </a:r>
           </a:p>
           <a:p>
             <a:pPr>
               <a:spcAft>
-                <a:spcPts val="1300"/>
+                <a:spcPts val="800"/>
               </a:spcAft>
             </a:pPr>
             <a:r>
-              <a:rPr sz="1750" b="1" i="0">
+              <a:rPr sz="1350" b="1" i="0">
                 <a:solidFill>
                   <a:srgbClr val="F0A500"/>
                 </a:solidFill>
@@ -20848,23 +21388,23 @@
               <a:t>•  </a:t>
             </a:r>
             <a:r>
-              <a:rPr sz="1750" b="0" i="0">
+              <a:rPr sz="1350" b="0" i="0">
                 <a:solidFill>
                   <a:srgbClr val="FFFFFF"/>
                 </a:solidFill>
                 <a:latin typeface="Calibri"/>
               </a:rPr>
-              <a:t>LLM cannot improve classification accuracy on pre-defined categories</a:t>
+              <a:t>The LLM's real value shows up in confidence scoring, novel-fault reasoning, and — above all — turning a bare label into a specific, actionable debug report.</a:t>
             </a:r>
           </a:p>
           <a:p>
             <a:pPr>
               <a:spcAft>
-                <a:spcPts val="1300"/>
+                <a:spcPts val="800"/>
               </a:spcAft>
             </a:pPr>
             <a:r>
-              <a:rPr sz="1750" b="1" i="0">
+              <a:rPr sz="1350" b="1" i="0">
                 <a:solidFill>
                   <a:srgbClr val="F0A500"/>
                 </a:solidFill>
@@ -20873,138 +21413,13 @@
               <a:t>•  </a:t>
             </a:r>
             <a:r>
-              <a:rPr sz="1750" b="0" i="0">
+              <a:rPr sz="1350" b="0" i="0">
                 <a:solidFill>
                   <a:srgbClr val="FFFFFF"/>
                 </a:solidFill>
                 <a:latin typeface="Calibri"/>
               </a:rPr>
-              <a:t>LLM VALUE is elsewhere:</a:t>
-            </a:r>
-          </a:p>
-          <a:p>
-            <a:pPr>
-              <a:spcAft>
-                <a:spcPts val="1300"/>
-              </a:spcAft>
-            </a:pPr>
-            <a:r>
-              <a:rPr sz="1750" b="1" i="0">
-                <a:solidFill>
-                  <a:srgbClr val="6F9CC4"/>
-                </a:solidFill>
-                <a:latin typeface="Calibri"/>
-              </a:rPr>
-              <a:t>      ‣  </a:t>
-            </a:r>
-            <a:r>
-              <a:rPr sz="1750" b="0" i="0">
-                <a:solidFill>
-                  <a:srgbClr val="FFFFFF"/>
-                </a:solidFill>
-                <a:latin typeface="Calibri"/>
-              </a:rPr>
-              <a:t>Natural language explanation of root cause</a:t>
-            </a:r>
-          </a:p>
-          <a:p>
-            <a:pPr>
-              <a:spcAft>
-                <a:spcPts val="1300"/>
-              </a:spcAft>
-            </a:pPr>
-            <a:r>
-              <a:rPr sz="1750" b="1" i="0">
-                <a:solidFill>
-                  <a:srgbClr val="6F9CC4"/>
-                </a:solidFill>
-                <a:latin typeface="Calibri"/>
-              </a:rPr>
-              <a:t>      ‣  </a:t>
-            </a:r>
-            <a:r>
-              <a:rPr sz="1750" b="0" i="0">
-                <a:solidFill>
-                  <a:srgbClr val="FFFFFF"/>
-                </a:solidFill>
-                <a:latin typeface="Calibri"/>
-              </a:rPr>
-              <a:t>Actionable debug steps (which file, which line, which test)</a:t>
-            </a:r>
-          </a:p>
-          <a:p>
-            <a:pPr>
-              <a:spcAft>
-                <a:spcPts val="1300"/>
-              </a:spcAft>
-            </a:pPr>
-            <a:r>
-              <a:rPr sz="1750" b="1" i="0">
-                <a:solidFill>
-                  <a:srgbClr val="6F9CC4"/>
-                </a:solidFill>
-                <a:latin typeface="Calibri"/>
-              </a:rPr>
-              <a:t>      ‣  </a:t>
-            </a:r>
-            <a:r>
-              <a:rPr sz="1750" b="0" i="0">
-                <a:solidFill>
-                  <a:srgbClr val="FFFFFF"/>
-                </a:solidFill>
-                <a:latin typeface="Calibri"/>
-              </a:rPr>
-              <a:t>Confidence scoring (flags ambiguous cases)</a:t>
-            </a:r>
-          </a:p>
-          <a:p>
-            <a:pPr>
-              <a:spcAft>
-                <a:spcPts val="1300"/>
-              </a:spcAft>
-            </a:pPr>
-            <a:r>
-              <a:rPr sz="1750" b="1" i="0">
-                <a:solidFill>
-                  <a:srgbClr val="6F9CC4"/>
-                </a:solidFill>
-                <a:latin typeface="Calibri"/>
-              </a:rPr>
-              <a:t>      ‣  </a:t>
-            </a:r>
-            <a:r>
-              <a:rPr sz="1750" b="0" i="0">
-                <a:solidFill>
-                  <a:srgbClr val="FFFFFF"/>
-                </a:solidFill>
-                <a:latin typeface="Calibri"/>
-              </a:rPr>
-              <a:t>Novel fault handling (rules return uncategorized; LLM still reasons)</a:t>
-            </a:r>
-          </a:p>
-          <a:p>
-            <a:pPr>
-              <a:spcAft>
-                <a:spcPts val="1300"/>
-              </a:spcAft>
-            </a:pPr>
-            <a:r>
-              <a:rPr sz="1750" b="1" i="0">
-                <a:solidFill>
-                  <a:srgbClr val="F0A500"/>
-                </a:solidFill>
-                <a:latin typeface="Calibri"/>
-              </a:rPr>
-              <a:t>•  </a:t>
-            </a:r>
-            <a:r>
-              <a:rPr sz="1750" b="0" i="0">
-                <a:solidFill>
-                  <a:srgbClr val="FFFFFF"/>
-                </a:solidFill>
-                <a:latin typeface="Calibri"/>
-              </a:rPr>
-              <a:t>This is an honest and important finding: LLM as explainer, not classifier</a:t>
+              <a:t>This is deliberately an honest negative result on accuracy paired with a positive result on usefulness: the LLM should be evaluated as an explainer, not a classifier.</a:t>
             </a:r>
           </a:p>
         </p:txBody>
@@ -21318,6 +21733,63 @@
         <p:spPr>
           <a:xfrm>
             <a:off x="640080" y="1508760"/>
+            <a:ext cx="10911535" cy="777240"/>
+          </a:xfrm>
+          <a:prstGeom prst="rect">
+            <a:avLst/>
+          </a:prstGeom>
+          <a:noFill/>
+        </p:spPr>
+        <p:txBody>
+          <a:bodyPr wrap="square" lIns="0" rIns="0" tIns="0" bIns="0">
+            <a:noAutofit/>
+          </a:bodyPr>
+          <a:lstStyle/>
+          <a:p>
+            <a:pPr>
+              <a:lnSpc>
+                <a:spcPct val="115000"/>
+              </a:lnSpc>
+            </a:pPr>
+            <a:r>
+              <a:rPr sz="1400" b="0" i="0">
+                <a:solidFill>
+                  <a:srgbClr val="C7C9D9"/>
+                </a:solidFill>
+                <a:latin typeface="Calibri"/>
+              </a:rPr>
+              <a:t>Timing the pipeline stage by stage shows exactly where the 46 seconds of end-to-end latency actually goes: essentially all of it. Loading, feature extraction, clustering, and evaluation together take under 100 milliseconds — it is the sequential Claude API calls, one per failure cluster, that account for </a:t>
+            </a:r>
+            <a:r>
+              <a:rPr sz="1400" b="1" i="0">
+                <a:solidFill>
+                  <a:srgbClr val="F0A500"/>
+                </a:solidFill>
+                <a:latin typeface="Calibri"/>
+              </a:rPr>
+              <a:t>99.8%</a:t>
+            </a:r>
+            <a:r>
+              <a:rPr sz="1400" b="0" i="0">
+                <a:solidFill>
+                  <a:srgbClr val="C7C9D9"/>
+                </a:solidFill>
+                <a:latin typeface="Calibri"/>
+              </a:rPr>
+              <a:t> of total wall-clock time.</a:t>
+            </a:r>
+          </a:p>
+        </p:txBody>
+      </p:sp>
+      <p:sp>
+        <p:nvSpPr>
+          <p:cNvPr id="10" name="TextBox 9"/>
+          <p:cNvSpPr txBox="1"/>
+          <p:nvPr/>
+        </p:nvSpPr>
+        <p:spPr>
+          <a:xfrm>
+            <a:off x="640080" y="2377440"/>
             <a:ext cx="2377440" cy="475488"/>
           </a:xfrm>
           <a:prstGeom prst="rect">
@@ -21354,13 +21826,13 @@
       </p:sp>
       <p:sp>
         <p:nvSpPr>
-          <p:cNvPr id="10" name="Rectangle 9"/>
+          <p:cNvPr id="11" name="Rectangle 10"/>
           <p:cNvSpPr/>
           <p:nvPr/>
         </p:nvSpPr>
         <p:spPr>
           <a:xfrm>
-            <a:off x="3200400" y="1581912"/>
+            <a:off x="3200400" y="2450592"/>
             <a:ext cx="803736" cy="329184"/>
           </a:xfrm>
           <a:prstGeom prst="rect">
@@ -21400,13 +21872,13 @@
       </p:sp>
       <p:sp>
         <p:nvSpPr>
-          <p:cNvPr id="11" name="TextBox 10"/>
+          <p:cNvPr id="12" name="TextBox 11"/>
           <p:cNvSpPr txBox="1"/>
           <p:nvPr/>
         </p:nvSpPr>
         <p:spPr>
           <a:xfrm>
-            <a:off x="4113864" y="1508760"/>
+            <a:off x="4113864" y="2377440"/>
             <a:ext cx="1463040" cy="475488"/>
           </a:xfrm>
           <a:prstGeom prst="rect">
@@ -21434,13 +21906,13 @@
       </p:sp>
       <p:sp>
         <p:nvSpPr>
-          <p:cNvPr id="12" name="TextBox 11"/>
+          <p:cNvPr id="13" name="TextBox 12"/>
           <p:cNvSpPr txBox="1"/>
           <p:nvPr/>
         </p:nvSpPr>
         <p:spPr>
           <a:xfrm>
-            <a:off x="640080" y="2057400"/>
+            <a:off x="640080" y="2926080"/>
             <a:ext cx="2377440" cy="475488"/>
           </a:xfrm>
           <a:prstGeom prst="rect">
@@ -21477,13 +21949,13 @@
       </p:sp>
       <p:sp>
         <p:nvSpPr>
-          <p:cNvPr id="13" name="Rectangle 12"/>
+          <p:cNvPr id="14" name="Rectangle 13"/>
           <p:cNvSpPr/>
           <p:nvPr/>
         </p:nvSpPr>
         <p:spPr>
           <a:xfrm>
-            <a:off x="3200400" y="2130552"/>
+            <a:off x="3200400" y="2999232"/>
             <a:ext cx="301540" cy="329184"/>
           </a:xfrm>
           <a:prstGeom prst="rect">
@@ -21523,13 +21995,13 @@
       </p:sp>
       <p:sp>
         <p:nvSpPr>
-          <p:cNvPr id="14" name="TextBox 13"/>
+          <p:cNvPr id="15" name="TextBox 14"/>
           <p:cNvSpPr txBox="1"/>
           <p:nvPr/>
         </p:nvSpPr>
         <p:spPr>
           <a:xfrm>
-            <a:off x="3611668" y="2057400"/>
+            <a:off x="3611668" y="2926080"/>
             <a:ext cx="1463040" cy="475488"/>
           </a:xfrm>
           <a:prstGeom prst="rect">
@@ -21557,13 +22029,13 @@
       </p:sp>
       <p:sp>
         <p:nvSpPr>
-          <p:cNvPr id="15" name="TextBox 14"/>
+          <p:cNvPr id="16" name="TextBox 15"/>
           <p:cNvSpPr txBox="1"/>
           <p:nvPr/>
         </p:nvSpPr>
         <p:spPr>
           <a:xfrm>
-            <a:off x="640080" y="2606040"/>
+            <a:off x="640080" y="3474720"/>
             <a:ext cx="2377440" cy="475488"/>
           </a:xfrm>
           <a:prstGeom prst="rect">
@@ -21600,13 +22072,13 @@
       </p:sp>
       <p:sp>
         <p:nvSpPr>
-          <p:cNvPr id="16" name="Rectangle 15"/>
+          <p:cNvPr id="17" name="Rectangle 16"/>
           <p:cNvSpPr/>
           <p:nvPr/>
         </p:nvSpPr>
         <p:spPr>
           <a:xfrm>
-            <a:off x="3200400" y="2679192"/>
+            <a:off x="3200400" y="3547872"/>
             <a:ext cx="2872529" cy="329184"/>
           </a:xfrm>
           <a:prstGeom prst="rect">
@@ -21646,13 +22118,13 @@
       </p:sp>
       <p:sp>
         <p:nvSpPr>
-          <p:cNvPr id="17" name="TextBox 16"/>
+          <p:cNvPr id="18" name="TextBox 17"/>
           <p:cNvSpPr txBox="1"/>
           <p:nvPr/>
         </p:nvSpPr>
         <p:spPr>
           <a:xfrm>
-            <a:off x="6182657" y="2606040"/>
+            <a:off x="6182657" y="3474720"/>
             <a:ext cx="1463040" cy="475488"/>
           </a:xfrm>
           <a:prstGeom prst="rect">
@@ -21680,13 +22152,13 @@
       </p:sp>
       <p:sp>
         <p:nvSpPr>
-          <p:cNvPr id="18" name="TextBox 17"/>
+          <p:cNvPr id="19" name="TextBox 18"/>
           <p:cNvSpPr txBox="1"/>
           <p:nvPr/>
         </p:nvSpPr>
         <p:spPr>
           <a:xfrm>
-            <a:off x="640080" y="3154680"/>
+            <a:off x="640080" y="4023360"/>
             <a:ext cx="2377440" cy="475488"/>
           </a:xfrm>
           <a:prstGeom prst="rect">
@@ -21723,13 +22195,13 @@
       </p:sp>
       <p:sp>
         <p:nvSpPr>
-          <p:cNvPr id="19" name="Rectangle 18"/>
+          <p:cNvPr id="20" name="Rectangle 19"/>
           <p:cNvSpPr/>
           <p:nvPr/>
         </p:nvSpPr>
         <p:spPr>
           <a:xfrm>
-            <a:off x="3200400" y="3227832"/>
+            <a:off x="3200400" y="4096512"/>
             <a:ext cx="6888175" cy="329184"/>
           </a:xfrm>
           <a:prstGeom prst="rect">
@@ -21769,13 +22241,13 @@
       </p:sp>
       <p:sp>
         <p:nvSpPr>
-          <p:cNvPr id="20" name="TextBox 19"/>
+          <p:cNvPr id="21" name="TextBox 20"/>
           <p:cNvSpPr txBox="1"/>
           <p:nvPr/>
         </p:nvSpPr>
         <p:spPr>
           <a:xfrm>
-            <a:off x="10198303" y="3154680"/>
+            <a:off x="10198303" y="4023360"/>
             <a:ext cx="1463040" cy="475488"/>
           </a:xfrm>
           <a:prstGeom prst="rect">
@@ -21803,13 +22275,13 @@
       </p:sp>
       <p:sp>
         <p:nvSpPr>
-          <p:cNvPr id="21" name="TextBox 20"/>
+          <p:cNvPr id="22" name="TextBox 21"/>
           <p:cNvSpPr txBox="1"/>
           <p:nvPr/>
         </p:nvSpPr>
         <p:spPr>
           <a:xfrm>
-            <a:off x="640080" y="3703320"/>
+            <a:off x="640080" y="4572000"/>
             <a:ext cx="2377440" cy="475488"/>
           </a:xfrm>
           <a:prstGeom prst="rect">
@@ -21846,13 +22318,13 @@
       </p:sp>
       <p:sp>
         <p:nvSpPr>
-          <p:cNvPr id="22" name="Rectangle 21"/>
+          <p:cNvPr id="23" name="Rectangle 22"/>
           <p:cNvSpPr/>
           <p:nvPr/>
         </p:nvSpPr>
         <p:spPr>
           <a:xfrm>
-            <a:off x="3200400" y="3776472"/>
+            <a:off x="3200400" y="4645152"/>
             <a:ext cx="168325" cy="329184"/>
           </a:xfrm>
           <a:prstGeom prst="rect">
@@ -21892,13 +22364,13 @@
       </p:sp>
       <p:sp>
         <p:nvSpPr>
-          <p:cNvPr id="23" name="TextBox 22"/>
+          <p:cNvPr id="24" name="TextBox 23"/>
           <p:cNvSpPr txBox="1"/>
           <p:nvPr/>
         </p:nvSpPr>
         <p:spPr>
           <a:xfrm>
-            <a:off x="3478453" y="3703320"/>
+            <a:off x="3478453" y="4572000"/>
             <a:ext cx="1463040" cy="475488"/>
           </a:xfrm>
           <a:prstGeom prst="rect">
@@ -21926,13 +22398,13 @@
       </p:sp>
       <p:sp>
         <p:nvSpPr>
-          <p:cNvPr id="24" name="TextBox 23"/>
+          <p:cNvPr id="25" name="TextBox 24"/>
           <p:cNvSpPr txBox="1"/>
           <p:nvPr/>
         </p:nvSpPr>
         <p:spPr>
           <a:xfrm>
-            <a:off x="640080" y="4343400"/>
+            <a:off x="640080" y="5212080"/>
             <a:ext cx="10911535" cy="457200"/>
           </a:xfrm>
           <a:prstGeom prst="rect">
@@ -22285,7 +22757,7 @@
         <p:spPr>
           <a:xfrm>
             <a:off x="640080" y="1508760"/>
-            <a:ext cx="10911535" cy="4892040"/>
+            <a:ext cx="10911535" cy="1965960"/>
           </a:xfrm>
           <a:prstGeom prst="rect">
             <a:avLst/>
@@ -22299,12 +22771,51 @@
           <a:lstStyle/>
           <a:p>
             <a:pPr>
+              <a:lnSpc>
+                <a:spcPct val="120000"/>
+              </a:lnSpc>
+            </a:pPr>
+            <a:r>
+              <a:rPr sz="1600" b="0" i="0">
+                <a:solidFill>
+                  <a:srgbClr val="FFFFFF"/>
+                </a:solidFill>
+                <a:latin typeface="Calibri"/>
+              </a:rPr>
+              <a:t>The latent fault problem is one of the most important open challenges in hardware verification. A fault is latent when it exists in the RTL but the current test suite does not exercise the conditions that would expose it. This is dangerous because the chip appears to pass all tests, gets signed off, goes to fabrication, and then fails in the field when real workloads hit the fault condition. Our system is the first to systematically detect and flag simulation-passing fault variants in an NN accelerator context, correctly identifying all 33 latent records in our dataset.</a:t>
+            </a:r>
+          </a:p>
+        </p:txBody>
+      </p:sp>
+      <p:sp>
+        <p:nvSpPr>
+          <p:cNvPr id="10" name="TextBox 9"/>
+          <p:cNvSpPr txBox="1"/>
+          <p:nvPr/>
+        </p:nvSpPr>
+        <p:spPr>
+          <a:xfrm>
+            <a:off x="640080" y="3474720"/>
+            <a:ext cx="10911535" cy="2971800"/>
+          </a:xfrm>
+          <a:prstGeom prst="rect">
+            <a:avLst/>
+          </a:prstGeom>
+          <a:noFill/>
+        </p:spPr>
+        <p:txBody>
+          <a:bodyPr wrap="square" lIns="0" rIns="0" tIns="0" bIns="0">
+            <a:noAutofit/>
+          </a:bodyPr>
+          <a:lstStyle/>
+          <a:p>
+            <a:pPr>
               <a:spcAft>
-                <a:spcPts val="1500"/>
+                <a:spcPts val="1000"/>
               </a:spcAft>
             </a:pPr>
             <a:r>
-              <a:rPr sz="1750" b="1" i="0">
+              <a:rPr sz="1450" b="1" i="0">
                 <a:solidFill>
                   <a:srgbClr val="F0A500"/>
                 </a:solidFill>
@@ -22313,32 +22824,23 @@
               <a:t>•  </a:t>
             </a:r>
             <a:r>
-              <a:rPr sz="1750" b="1" i="0">
-                <a:solidFill>
-                  <a:srgbClr val="F0A500"/>
-                </a:solidFill>
-                <a:latin typeface="Calibri"/>
-              </a:rPr>
-              <a:t>33 records</a:t>
-            </a:r>
-            <a:r>
-              <a:rPr sz="1750" b="0" i="0">
+              <a:rPr sz="1450" b="0" i="0">
                 <a:solidFill>
                   <a:srgbClr val="FFFFFF"/>
                 </a:solidFill>
                 <a:latin typeface="Calibri"/>
               </a:rPr>
-              <a:t> PASS simulation = standard regression marks them GREEN</a:t>
+              <a:t>A green checkmark in a regression report is not proof of correctness — it is only proof that the tests you happened to run did not find a problem.</a:t>
             </a:r>
           </a:p>
           <a:p>
             <a:pPr>
               <a:spcAft>
-                <a:spcPts val="1500"/>
+                <a:spcPts val="1000"/>
               </a:spcAft>
             </a:pPr>
             <a:r>
-              <a:rPr sz="1750" b="1" i="0">
+              <a:rPr sz="1450" b="1" i="0">
                 <a:solidFill>
                   <a:srgbClr val="F0A500"/>
                 </a:solidFill>
@@ -22347,23 +22849,23 @@
               <a:t>•  </a:t>
             </a:r>
             <a:r>
-              <a:rPr sz="1750" b="0" i="0">
+              <a:rPr sz="1450" b="0" i="0">
                 <a:solidFill>
                   <a:srgbClr val="FFFFFF"/>
                 </a:solidFill>
                 <a:latin typeface="Calibri"/>
               </a:rPr>
-              <a:t>Engineer sees no failures, assumes RTL is correct</a:t>
+              <a:t>Our latent_fault cluster turns that blind spot into an explicit, reviewable list instead of a silent gap in coverage.</a:t>
             </a:r>
           </a:p>
           <a:p>
             <a:pPr>
               <a:spcAft>
-                <a:spcPts val="1500"/>
+                <a:spcPts val="1000"/>
               </a:spcAft>
             </a:pPr>
             <a:r>
-              <a:rPr sz="1750" b="1" i="0">
+              <a:rPr sz="1450" b="1" i="0">
                 <a:solidFill>
                   <a:srgbClr val="F0A500"/>
                 </a:solidFill>
@@ -22372,113 +22874,13 @@
               <a:t>•  </a:t>
             </a:r>
             <a:r>
-              <a:rPr sz="1750" b="0" i="0">
+              <a:rPr sz="1450" b="0" i="0">
                 <a:solidFill>
                   <a:srgbClr val="FFFFFF"/>
                 </a:solidFill>
                 <a:latin typeface="Calibri"/>
               </a:rPr>
-              <a:t>Reality: RTL contains an injected bug that will manifest with different inputs</a:t>
-            </a:r>
-          </a:p>
-          <a:p>
-            <a:pPr>
-              <a:spcAft>
-                <a:spcPts val="1500"/>
-              </a:spcAft>
-            </a:pPr>
-            <a:r>
-              <a:rPr sz="1750" b="1" i="0">
-                <a:solidFill>
-                  <a:srgbClr val="F0A500"/>
-                </a:solidFill>
-                <a:latin typeface="Calibri"/>
-              </a:rPr>
-              <a:t>•  </a:t>
-            </a:r>
-            <a:r>
-              <a:rPr sz="1750" b="0" i="0">
-                <a:solidFill>
-                  <a:srgbClr val="FFFFFF"/>
-                </a:solidFill>
-                <a:latin typeface="Calibri"/>
-              </a:rPr>
-              <a:t>Our system correctly labels them latent_fault and flags for investigation</a:t>
-            </a:r>
-          </a:p>
-          <a:p>
-            <a:pPr>
-              <a:spcAft>
-                <a:spcPts val="1500"/>
-              </a:spcAft>
-            </a:pPr>
-            <a:r>
-              <a:rPr sz="1750" b="1" i="0">
-                <a:solidFill>
-                  <a:srgbClr val="F0A500"/>
-                </a:solidFill>
-                <a:latin typeface="Calibri"/>
-              </a:rPr>
-              <a:t>•  </a:t>
-            </a:r>
-            <a:r>
-              <a:rPr sz="1750" b="0" i="0">
-                <a:solidFill>
-                  <a:srgbClr val="FFFFFF"/>
-                </a:solidFill>
-                <a:latin typeface="Calibri"/>
-              </a:rPr>
-              <a:t>Root cause: test vectors don't stress the fault condition</a:t>
-            </a:r>
-          </a:p>
-          <a:p>
-            <a:pPr>
-              <a:spcAft>
-                <a:spcPts val="1500"/>
-              </a:spcAft>
-            </a:pPr>
-            <a:r>
-              <a:rPr sz="1750" b="1" i="0">
-                <a:solidFill>
-                  <a:srgbClr val="F0A500"/>
-                </a:solidFill>
-                <a:latin typeface="Calibri"/>
-              </a:rPr>
-              <a:t>•  </a:t>
-            </a:r>
-            <a:r>
-              <a:rPr sz="1750" b="0" i="0">
-                <a:solidFill>
-                  <a:srgbClr val="FFFFFF"/>
-                </a:solidFill>
-                <a:latin typeface="Calibri"/>
-              </a:rPr>
-              <a:t>Industry relevance: latent bugs discovered post-silicon cost millions to fix</a:t>
-            </a:r>
-          </a:p>
-          <a:p>
-            <a:pPr>
-              <a:spcAft>
-                <a:spcPts val="1500"/>
-              </a:spcAft>
-            </a:pPr>
-            <a:r>
-              <a:rPr sz="1750" b="1" i="0">
-                <a:solidFill>
-                  <a:srgbClr val="F0A500"/>
-                </a:solidFill>
-                <a:latin typeface="Calibri"/>
-              </a:rPr>
-              <a:t>•  </a:t>
-            </a:r>
-            <a:r>
-              <a:rPr sz="1750" b="0" i="0">
-                <a:solidFill>
-                  <a:srgbClr val="FFFFFF"/>
-                </a:solidFill>
-                <a:latin typeface="Calibri"/>
-              </a:rPr>
-              <a:t>Our contribution: systematic detection of simulation-passing fault variants</a:t>
+              <a:t>The recommended fix is always the same in spirit: increase N, widen input magnitudes, or apply formal verification to exercise the specific boundary the current tests miss.</a:t>
             </a:r>
           </a:p>
         </p:txBody>
@@ -22807,11 +23209,11 @@
           <a:p>
             <a:pPr>
               <a:spcAft>
-                <a:spcPts val="1800"/>
+                <a:spcPts val="800"/>
               </a:spcAft>
             </a:pPr>
             <a:r>
-              <a:rPr sz="1900" b="1" i="0">
+              <a:rPr sz="1300" b="1" i="0">
                 <a:solidFill>
                   <a:srgbClr val="F0A500"/>
                 </a:solidFill>
@@ -22820,23 +23222,23 @@
               <a:t>•  </a:t>
             </a:r>
             <a:r>
-              <a:rPr sz="1900" b="0" i="0">
+              <a:rPr sz="1300" b="0" i="0">
                 <a:solidFill>
                   <a:srgbClr val="FFFFFF"/>
                 </a:solidFill>
                 <a:latin typeface="Calibri"/>
               </a:rPr>
-              <a:t>Toy RTL: 4x4 MAC array, not real silicon (NVDLA, Gemmini)</a:t>
+              <a:t>The RTL under test is a deliberately small 4x4 MAC array built for this project, not real production silicon like NVDLA or Gemmini, so absolute timing and area numbers do not transfer directly.</a:t>
             </a:r>
           </a:p>
           <a:p>
             <a:pPr>
               <a:spcAft>
-                <a:spcPts val="1800"/>
+                <a:spcPts val="800"/>
               </a:spcAft>
             </a:pPr>
             <a:r>
-              <a:rPr sz="1900" b="1" i="0">
+              <a:rPr sz="1300" b="1" i="0">
                 <a:solidFill>
                   <a:srgbClr val="F0A500"/>
                 </a:solidFill>
@@ -22845,23 +23247,23 @@
               <a:t>•  </a:t>
             </a:r>
             <a:r>
-              <a:rPr sz="1900" b="0" i="0">
+              <a:rPr sz="1300" b="0" i="0">
                 <a:solidFill>
                   <a:srgbClr val="FFFFFF"/>
                 </a:solidFill>
                 <a:latin typeface="Calibri"/>
               </a:rPr>
-              <a:t>Estimated baseline: 45 min/cluster is an industry estimate, not measured</a:t>
+              <a:t>The 45-minutes-per-cluster manual baseline is a reasonable industry estimate, not a number we measured by timing real engineers, so the exact speedup multiplier should be read as directional rather than precise.</a:t>
             </a:r>
           </a:p>
           <a:p>
             <a:pPr>
               <a:spcAft>
-                <a:spcPts val="1800"/>
+                <a:spcPts val="800"/>
               </a:spcAft>
             </a:pPr>
             <a:r>
-              <a:rPr sz="1900" b="1" i="0">
+              <a:rPr sz="1300" b="1" i="0">
                 <a:solidFill>
                   <a:srgbClr val="F0A500"/>
                 </a:solidFill>
@@ -22870,23 +23272,23 @@
               <a:t>•  </a:t>
             </a:r>
             <a:r>
-              <a:rPr sz="1900" b="0" i="0">
+              <a:rPr sz="1300" b="0" i="0">
                 <a:solidFill>
                   <a:srgbClr val="FFFFFF"/>
                 </a:solidFill>
                 <a:latin typeface="Calibri"/>
               </a:rPr>
-              <a:t>No timing faults: setup/hold violations, pipeline hazards not covered</a:t>
+              <a:t>The current fault set covers no timing-related bugs at all — no setup/hold violations, no clock-domain-crossing issues, no pipeline hazards — because our RTL is a single-clock synchronous design.</a:t>
             </a:r>
           </a:p>
           <a:p>
             <a:pPr>
               <a:spcAft>
-                <a:spcPts val="1800"/>
+                <a:spcPts val="800"/>
               </a:spcAft>
             </a:pPr>
             <a:r>
-              <a:rPr sz="1900" b="1" i="0">
+              <a:rPr sz="1300" b="1" i="0">
                 <a:solidFill>
                   <a:srgbClr val="F0A500"/>
                 </a:solidFill>
@@ -22895,23 +23297,23 @@
               <a:t>•  </a:t>
             </a:r>
             <a:r>
-              <a:rPr sz="1900" b="0" i="0">
+              <a:rPr sz="1300" b="0" i="0">
                 <a:solidFill>
                   <a:srgbClr val="FFFFFF"/>
                 </a:solidFill>
                 <a:latin typeface="Calibri"/>
               </a:rPr>
-              <a:t>No memory faults: wrong addressing, DMA errors not covered</a:t>
+              <a:t>Memory-system faults such as wrong addressing, DMA errors, or arbiter starvation are similarly out of scope, since mem_arbiter.sv was not a target of fault injection in this round.</a:t>
             </a:r>
           </a:p>
           <a:p>
             <a:pPr>
               <a:spcAft>
-                <a:spcPts val="1800"/>
+                <a:spcPts val="800"/>
               </a:spcAft>
             </a:pPr>
             <a:r>
-              <a:rPr sz="1900" b="1" i="0">
+              <a:rPr sz="1300" b="1" i="0">
                 <a:solidFill>
                   <a:srgbClr val="F0A500"/>
                 </a:solidFill>
@@ -22920,41 +23322,32 @@
               <a:t>•  </a:t>
             </a:r>
             <a:r>
-              <a:rPr sz="1900" b="0" i="0">
+              <a:rPr sz="1300" b="1" i="0">
+                <a:solidFill>
+                  <a:srgbClr val="F0A500"/>
+                </a:solidFill>
+                <a:latin typeface="Calibri"/>
+              </a:rPr>
+              <a:t>255 records</a:t>
+            </a:r>
+            <a:r>
+              <a:rPr sz="1300" b="0" i="0">
                 <a:solidFill>
                   <a:srgbClr val="FFFFFF"/>
                 </a:solidFill>
                 <a:latin typeface="Calibri"/>
               </a:rPr>
-              <a:t>Small benchmark: </a:t>
-            </a:r>
-            <a:r>
-              <a:rPr sz="1900" b="1" i="0">
-                <a:solidFill>
-                  <a:srgbClr val="F0A500"/>
-                </a:solidFill>
-                <a:latin typeface="Calibri"/>
-              </a:rPr>
-              <a:t>255 records</a:t>
-            </a:r>
-            <a:r>
-              <a:rPr sz="1900" b="0" i="0">
-                <a:solidFill>
-                  <a:srgbClr val="FFFFFF"/>
-                </a:solidFill>
-                <a:latin typeface="Calibri"/>
-              </a:rPr>
-              <a:t> vs thousands in real tapeouts</a:t>
+              <a:t> is enough to demonstrate the method convincingly, but it is orders of magnitude smaller than the failure volume a real tapeout regression would generate.</a:t>
             </a:r>
           </a:p>
           <a:p>
             <a:pPr>
               <a:spcAft>
-                <a:spcPts val="1800"/>
+                <a:spcPts val="800"/>
               </a:spcAft>
             </a:pPr>
             <a:r>
-              <a:rPr sz="1900" b="1" i="0">
+              <a:rPr sz="1300" b="1" i="0">
                 <a:solidFill>
                   <a:srgbClr val="F0A500"/>
                 </a:solidFill>
@@ -22963,13 +23356,31 @@
               <a:t>•  </a:t>
             </a:r>
             <a:r>
-              <a:rPr sz="1900" b="0" i="0">
+              <a:rPr sz="1300" b="0" i="0">
                 <a:solidFill>
                   <a:srgbClr val="FFFFFF"/>
                 </a:solidFill>
                 <a:latin typeface="Calibri"/>
               </a:rPr>
-              <a:t>Circular accuracy: rules designed for exactly these fault types</a:t>
+              <a:t>There is an element of circularity in the accuracy number: the rule-based clusterer's rules were written by looking at exactly these 13 fault types, so </a:t>
+            </a:r>
+            <a:r>
+              <a:rPr sz="1300" b="1" i="0">
+                <a:solidFill>
+                  <a:srgbClr val="F0A500"/>
+                </a:solidFill>
+                <a:latin typeface="Calibri"/>
+              </a:rPr>
+              <a:t>96.5%</a:t>
+            </a:r>
+            <a:r>
+              <a:rPr sz="1300" b="0" i="0">
+                <a:solidFill>
+                  <a:srgbClr val="FFFFFF"/>
+                </a:solidFill>
+                <a:latin typeface="Calibri"/>
+              </a:rPr>
+              <a:t> accuracy should not be read as evidence the rules would generalize to an unseen fault class without modification.</a:t>
             </a:r>
           </a:p>
         </p:txBody>
@@ -23283,7 +23694,7 @@
         <p:spPr>
           <a:xfrm>
             <a:off x="640080" y="1508760"/>
-            <a:ext cx="3423818" cy="502920"/>
+            <a:ext cx="3454298" cy="502920"/>
           </a:xfrm>
           <a:prstGeom prst="rect">
             <a:avLst/>
@@ -23327,7 +23738,7 @@
         <p:spPr>
           <a:xfrm>
             <a:off x="749808" y="1508760"/>
-            <a:ext cx="3204362" cy="502920"/>
+            <a:ext cx="3234842" cy="502920"/>
           </a:xfrm>
           <a:prstGeom prst="rect">
             <a:avLst/>
@@ -23341,7 +23752,7 @@
           <a:lstStyle/>
           <a:p>
             <a:r>
-              <a:rPr sz="1500" b="1" i="0">
+              <a:rPr sz="1400" b="1" i="0">
                 <a:solidFill>
                   <a:srgbClr val="F0A500"/>
                 </a:solidFill>
@@ -23361,7 +23772,7 @@
         <p:spPr>
           <a:xfrm>
             <a:off x="685800" y="2148840"/>
-            <a:ext cx="3332378" cy="3931920"/>
+            <a:ext cx="3362858" cy="4114800"/>
           </a:xfrm>
           <a:prstGeom prst="rect">
             <a:avLst/>
@@ -23376,11 +23787,11 @@
           <a:p>
             <a:pPr>
               <a:spcAft>
-                <a:spcPts val="1000"/>
+                <a:spcPts val="700"/>
               </a:spcAft>
             </a:pPr>
             <a:r>
-              <a:rPr sz="1350" b="1" i="0">
+              <a:rPr sz="1200" b="1" i="0">
                 <a:solidFill>
                   <a:srgbClr val="F0A500"/>
                 </a:solidFill>
@@ -23389,23 +23800,23 @@
               <a:t>•  </a:t>
             </a:r>
             <a:r>
-              <a:rPr sz="1350" b="0" i="0">
+              <a:rPr sz="1200" b="0" i="0">
                 <a:solidFill>
                   <a:srgbClr val="FFFFFF"/>
                 </a:solidFill>
                 <a:latin typeface="Calibri"/>
               </a:rPr>
-              <a:t>Port to real open-source accelerator: Gemmini or NVDLA</a:t>
+              <a:t>Porting to a real open-source accelerator like Gemmini or NVDLA would test whether our clustering rules and features generalize beyond our own 4x4 toy design.</a:t>
             </a:r>
           </a:p>
           <a:p>
             <a:pPr>
               <a:spcAft>
-                <a:spcPts val="1000"/>
+                <a:spcPts val="700"/>
               </a:spcAft>
             </a:pPr>
             <a:r>
-              <a:rPr sz="1350" b="1" i="0">
+              <a:rPr sz="1200" b="1" i="0">
                 <a:solidFill>
                   <a:srgbClr val="F0A500"/>
                 </a:solidFill>
@@ -23414,23 +23825,23 @@
               <a:t>•  </a:t>
             </a:r>
             <a:r>
-              <a:rPr sz="1350" b="0" i="0">
+              <a:rPr sz="1200" b="0" i="0">
                 <a:solidFill>
                   <a:srgbClr val="FFFFFF"/>
                 </a:solidFill>
                 <a:latin typeface="Calibri"/>
               </a:rPr>
-              <a:t>Systematic mutation testing: 100+ auto-generated faults</a:t>
+              <a:t>Systematic mutation testing — generating 100+ faults automatically instead of 13 hand-picked ones — would stress-test whether the rule-based accuracy holds at scale.</a:t>
             </a:r>
           </a:p>
           <a:p>
             <a:pPr>
               <a:spcAft>
-                <a:spcPts val="1000"/>
+                <a:spcPts val="700"/>
               </a:spcAft>
             </a:pPr>
             <a:r>
-              <a:rPr sz="1350" b="1" i="0">
+              <a:rPr sz="1200" b="1" i="0">
                 <a:solidFill>
                   <a:srgbClr val="F0A500"/>
                 </a:solidFill>
@@ -23439,23 +23850,23 @@
               <a:t>•  </a:t>
             </a:r>
             <a:r>
-              <a:rPr sz="1350" b="0" i="0">
+              <a:rPr sz="1200" b="0" i="0">
                 <a:solidFill>
                   <a:srgbClr val="FFFFFF"/>
                 </a:solidFill>
                 <a:latin typeface="Calibri"/>
               </a:rPr>
-              <a:t>User study: time real verification engineers (Intel connection)</a:t>
+              <a:t>A small user study timing real verification engineers on this failure set would replace our estimated manual baseline with a measured one.</a:t>
             </a:r>
           </a:p>
           <a:p>
             <a:pPr>
               <a:spcAft>
-                <a:spcPts val="1000"/>
+                <a:spcPts val="700"/>
               </a:spcAft>
             </a:pPr>
             <a:r>
-              <a:rPr sz="1350" b="1" i="0">
+              <a:rPr sz="1200" b="1" i="0">
                 <a:solidFill>
                   <a:srgbClr val="F0A500"/>
                 </a:solidFill>
@@ -23464,13 +23875,13 @@
               <a:t>•  </a:t>
             </a:r>
             <a:r>
-              <a:rPr sz="1350" b="0" i="0">
+              <a:rPr sz="1200" b="0" i="0">
                 <a:solidFill>
                   <a:srgbClr val="FFFFFF"/>
                 </a:solidFill>
                 <a:latin typeface="Calibri"/>
               </a:rPr>
-              <a:t>Measured manual baseline: replace estimate with real data</a:t>
+              <a:t>Replacing the 45-minute estimate with real timing data is the single change most likely to affect the headline speedup number.</a:t>
             </a:r>
           </a:p>
         </p:txBody>
@@ -23483,8 +23894,8 @@
         </p:nvSpPr>
         <p:spPr>
           <a:xfrm>
-            <a:off x="4383938" y="1508760"/>
-            <a:ext cx="3423818" cy="502920"/>
+            <a:off x="4368698" y="1508760"/>
+            <a:ext cx="3454298" cy="502920"/>
           </a:xfrm>
           <a:prstGeom prst="rect">
             <a:avLst/>
@@ -23527,8 +23938,8 @@
         </p:nvSpPr>
         <p:spPr>
           <a:xfrm>
-            <a:off x="4493666" y="1508760"/>
-            <a:ext cx="3204362" cy="502920"/>
+            <a:off x="4478426" y="1508760"/>
+            <a:ext cx="3234842" cy="502920"/>
           </a:xfrm>
           <a:prstGeom prst="rect">
             <a:avLst/>
@@ -23542,7 +23953,7 @@
           <a:lstStyle/>
           <a:p>
             <a:r>
-              <a:rPr sz="1500" b="1" i="0">
+              <a:rPr sz="1400" b="1" i="0">
                 <a:solidFill>
                   <a:srgbClr val="F0A500"/>
                 </a:solidFill>
@@ -23561,8 +23972,8 @@
         </p:nvSpPr>
         <p:spPr>
           <a:xfrm>
-            <a:off x="4429658" y="2148840"/>
-            <a:ext cx="3332378" cy="3931920"/>
+            <a:off x="4414418" y="2148840"/>
+            <a:ext cx="3362858" cy="4114800"/>
           </a:xfrm>
           <a:prstGeom prst="rect">
             <a:avLst/>
@@ -23577,11 +23988,11 @@
           <a:p>
             <a:pPr>
               <a:spcAft>
-                <a:spcPts val="1000"/>
+                <a:spcPts val="700"/>
               </a:spcAft>
             </a:pPr>
             <a:r>
-              <a:rPr sz="1350" b="1" i="0">
+              <a:rPr sz="1200" b="1" i="0">
                 <a:solidFill>
                   <a:srgbClr val="F0A500"/>
                 </a:solidFill>
@@ -23590,23 +24001,23 @@
               <a:t>•  </a:t>
             </a:r>
             <a:r>
-              <a:rPr sz="1350" b="0" i="0">
+              <a:rPr sz="1200" b="0" i="0">
                 <a:solidFill>
                   <a:srgbClr val="FFFFFF"/>
                 </a:solidFill>
                 <a:latin typeface="Calibri"/>
               </a:rPr>
-              <a:t>Timing fault detection via waveform analysis</a:t>
+              <a:t>Timing fault detection via waveform analysis would extend the VCD parser beyond first-divergence-cycle into a real source of new fault categories.</a:t>
             </a:r>
           </a:p>
           <a:p>
             <a:pPr>
               <a:spcAft>
-                <a:spcPts val="1000"/>
+                <a:spcPts val="700"/>
               </a:spcAft>
             </a:pPr>
             <a:r>
-              <a:rPr sz="1350" b="1" i="0">
+              <a:rPr sz="1200" b="1" i="0">
                 <a:solidFill>
                   <a:srgbClr val="F0A500"/>
                 </a:solidFill>
@@ -23615,23 +24026,23 @@
               <a:t>•  </a:t>
             </a:r>
             <a:r>
-              <a:rPr sz="1350" b="0" i="0">
+              <a:rPr sz="1200" b="0" i="0">
                 <a:solidFill>
                   <a:srgbClr val="FFFFFF"/>
                 </a:solidFill>
                 <a:latin typeface="Calibri"/>
               </a:rPr>
-              <a:t>Memory fault categories</a:t>
+              <a:t>Adding memory-system fault categories would close the gap left by mem_arbiter.sv never having been a fault-injection target.</a:t>
             </a:r>
           </a:p>
           <a:p>
             <a:pPr>
               <a:spcAft>
-                <a:spcPts val="1000"/>
+                <a:spcPts val="700"/>
               </a:spcAft>
             </a:pPr>
             <a:r>
-              <a:rPr sz="1350" b="1" i="0">
+              <a:rPr sz="1200" b="1" i="0">
                 <a:solidFill>
                   <a:srgbClr val="F0A500"/>
                 </a:solidFill>
@@ -23640,23 +24051,23 @@
               <a:t>•  </a:t>
             </a:r>
             <a:r>
-              <a:rPr sz="1350" b="0" i="0">
+              <a:rPr sz="1200" b="0" i="0">
                 <a:solidFill>
                   <a:srgbClr val="FFFFFF"/>
                 </a:solidFill>
                 <a:latin typeface="Calibri"/>
               </a:rPr>
-              <a:t>Multi-design generalization test</a:t>
+              <a:t>Testing on a second, structurally different design would show whether the 13-feature schema is accelerator-specific or genuinely general-purpose.</a:t>
             </a:r>
           </a:p>
           <a:p>
             <a:pPr>
               <a:spcAft>
-                <a:spcPts val="1000"/>
+                <a:spcPts val="700"/>
               </a:spcAft>
             </a:pPr>
             <a:r>
-              <a:rPr sz="1350" b="1" i="0">
+              <a:rPr sz="1200" b="1" i="0">
                 <a:solidFill>
                   <a:srgbClr val="F0A500"/>
                 </a:solidFill>
@@ -23665,13 +24076,13 @@
               <a:t>•  </a:t>
             </a:r>
             <a:r>
-              <a:rPr sz="1350" b="0" i="0">
+              <a:rPr sz="1200" b="0" i="0">
                 <a:solidFill>
                   <a:srgbClr val="FFFFFF"/>
                 </a:solidFill>
                 <a:latin typeface="Calibri"/>
               </a:rPr>
-              <a:t>Model ablation: Claude vs GPT-4 vs Llama</a:t>
+              <a:t>An ablation comparing Claude against GPT-4 and Llama would clarify how much of triage quality is model-specific versus pipeline-specific.</a:t>
             </a:r>
           </a:p>
         </p:txBody>
@@ -23684,8 +24095,8 @@
         </p:nvSpPr>
         <p:spPr>
           <a:xfrm>
-            <a:off x="8127796" y="1508760"/>
-            <a:ext cx="3423818" cy="502920"/>
+            <a:off x="8097316" y="1508760"/>
+            <a:ext cx="3454298" cy="502920"/>
           </a:xfrm>
           <a:prstGeom prst="rect">
             <a:avLst/>
@@ -23728,8 +24139,8 @@
         </p:nvSpPr>
         <p:spPr>
           <a:xfrm>
-            <a:off x="8237524" y="1508760"/>
-            <a:ext cx="3204362" cy="502920"/>
+            <a:off x="8207044" y="1508760"/>
+            <a:ext cx="3234842" cy="502920"/>
           </a:xfrm>
           <a:prstGeom prst="rect">
             <a:avLst/>
@@ -23743,7 +24154,7 @@
           <a:lstStyle/>
           <a:p>
             <a:r>
-              <a:rPr sz="1500" b="1" i="0">
+              <a:rPr sz="1400" b="1" i="0">
                 <a:solidFill>
                   <a:srgbClr val="F0A500"/>
                 </a:solidFill>
@@ -23762,8 +24173,8 @@
         </p:nvSpPr>
         <p:spPr>
           <a:xfrm>
-            <a:off x="8173516" y="2148840"/>
-            <a:ext cx="3332378" cy="3931920"/>
+            <a:off x="8143036" y="2148840"/>
+            <a:ext cx="3362858" cy="4114800"/>
           </a:xfrm>
           <a:prstGeom prst="rect">
             <a:avLst/>
@@ -23778,11 +24189,11 @@
           <a:p>
             <a:pPr>
               <a:spcAft>
-                <a:spcPts val="1000"/>
+                <a:spcPts val="700"/>
               </a:spcAft>
             </a:pPr>
             <a:r>
-              <a:rPr sz="1350" b="1" i="0">
+              <a:rPr sz="1200" b="1" i="0">
                 <a:solidFill>
                   <a:srgbClr val="F0A500"/>
                 </a:solidFill>
@@ -23791,23 +24202,23 @@
               <a:t>•  </a:t>
             </a:r>
             <a:r>
-              <a:rPr sz="1350" b="0" i="0">
+              <a:rPr sz="1200" b="0" i="0">
                 <a:solidFill>
                   <a:srgbClr val="FFFFFF"/>
                 </a:solidFill>
                 <a:latin typeface="Calibri"/>
               </a:rPr>
-              <a:t>Paper submission: ASP-DAC 2027 or DATE 2027</a:t>
+              <a:t>A paper submission to a venue like ASP-DAC 2027 or DATE 2027 would subject the methodology to peer review beyond this internal benchmark.</a:t>
             </a:r>
           </a:p>
           <a:p>
             <a:pPr>
               <a:spcAft>
-                <a:spcPts val="1000"/>
+                <a:spcPts val="700"/>
               </a:spcAft>
             </a:pPr>
             <a:r>
-              <a:rPr sz="1350" b="1" i="0">
+              <a:rPr sz="1200" b="1" i="0">
                 <a:solidFill>
                   <a:srgbClr val="F0A500"/>
                 </a:solidFill>
@@ -23816,23 +24227,23 @@
               <a:t>•  </a:t>
             </a:r>
             <a:r>
-              <a:rPr sz="1350" b="0" i="0">
+              <a:rPr sz="1200" b="0" i="0">
                 <a:solidFill>
                   <a:srgbClr val="FFFFFF"/>
                 </a:solidFill>
                 <a:latin typeface="Calibri"/>
               </a:rPr>
-              <a:t>VS Code / EDA plugin for inline triage hints</a:t>
+              <a:t>A VS Code or EDA-tool plugin would put triage hints directly in front of engineers the moment they see a failing test, instead of requiring a separate dashboard.</a:t>
             </a:r>
           </a:p>
           <a:p>
             <a:pPr>
               <a:spcAft>
-                <a:spcPts val="1000"/>
+                <a:spcPts val="700"/>
               </a:spcAft>
             </a:pPr>
             <a:r>
-              <a:rPr sz="1350" b="1" i="0">
+              <a:rPr sz="1200" b="1" i="0">
                 <a:solidFill>
                   <a:srgbClr val="F0A500"/>
                 </a:solidFill>
@@ -23841,13 +24252,13 @@
               <a:t>•  </a:t>
             </a:r>
             <a:r>
-              <a:rPr sz="1350" b="0" i="0">
+              <a:rPr sz="1200" b="0" i="0">
                 <a:solidFill>
                   <a:srgbClr val="FFFFFF"/>
                 </a:solidFill>
                 <a:latin typeface="Calibri"/>
               </a:rPr>
-              <a:t>Proprietary failure database from industry partnerships</a:t>
+              <a:t>Partnering with industry to triage a proprietary failure database would be the real test of whether these results hold outside a controlled academic dataset.</a:t>
             </a:r>
           </a:p>
         </p:txBody>
@@ -24176,11 +24587,11 @@
           <a:p>
             <a:pPr>
               <a:spcAft>
-                <a:spcPts val="1300"/>
+                <a:spcPts val="800"/>
               </a:spcAft>
             </a:pPr>
             <a:r>
-              <a:rPr sz="1700" b="1" i="0">
+              <a:rPr sz="1300" b="1" i="0">
                 <a:solidFill>
                   <a:srgbClr val="F0A500"/>
                 </a:solidFill>
@@ -24189,23 +24600,23 @@
               <a:t>•  </a:t>
             </a:r>
             <a:r>
-              <a:rPr sz="1700" b="0" i="0">
+              <a:rPr sz="1300" b="0" i="0">
                 <a:solidFill>
                   <a:srgbClr val="FFFFFF"/>
                 </a:solidFill>
                 <a:latin typeface="Calibri"/>
               </a:rPr>
-              <a:t>1.  Complete end-to-end agentic AI pipeline for RTL verification triage</a:t>
+              <a:t>We built a complete, working, end-to-end agentic AI pipeline for RTL verification triage — not a prototype, but a system that runs unattended from raw simulation logs to a finished dashboard.</a:t>
             </a:r>
           </a:p>
           <a:p>
             <a:pPr>
               <a:spcAft>
-                <a:spcPts val="1300"/>
+                <a:spcPts val="800"/>
               </a:spcAft>
             </a:pPr>
             <a:r>
-              <a:rPr sz="1700" b="1" i="0">
+              <a:rPr sz="1300" b="1" i="0">
                 <a:solidFill>
                   <a:srgbClr val="F0A500"/>
                 </a:solidFill>
@@ -24214,68 +24625,59 @@
               <a:t>•  </a:t>
             </a:r>
             <a:r>
-              <a:rPr sz="1700" b="0" i="0">
+              <a:rPr sz="1300" b="0" i="0">
                 <a:solidFill>
                   <a:srgbClr val="FFFFFF"/>
                 </a:solidFill>
                 <a:latin typeface="Calibri"/>
               </a:rPr>
-              <a:t>2.  Open-source benchmark dataset: </a:t>
-            </a:r>
-            <a:r>
-              <a:rPr sz="1700" b="1" i="0">
+              <a:t>We release an open-source benchmark dataset of 255 regression records spanning </a:t>
+            </a:r>
+            <a:r>
+              <a:rPr sz="1300" b="1" i="0">
                 <a:solidFill>
                   <a:srgbClr val="F0A500"/>
                 </a:solidFill>
                 <a:latin typeface="Calibri"/>
               </a:rPr>
-              <a:t>255 records</a:t>
-            </a:r>
-            <a:r>
-              <a:rPr sz="1700" b="0" i="0">
+              <a:t>13 fault variants</a:t>
+            </a:r>
+            <a:r>
+              <a:rPr sz="1300" b="0" i="0">
                 <a:solidFill>
                   <a:srgbClr val="FFFFFF"/>
                 </a:solidFill>
                 <a:latin typeface="Calibri"/>
               </a:rPr>
-              <a:t>, </a:t>
-            </a:r>
-            <a:r>
-              <a:rPr sz="1700" b="1" i="0">
+              <a:t> across </a:t>
+            </a:r>
+            <a:r>
+              <a:rPr sz="1300" b="1" i="0">
                 <a:solidFill>
                   <a:srgbClr val="F0A500"/>
                 </a:solidFill>
                 <a:latin typeface="Calibri"/>
               </a:rPr>
-              <a:t>13 fault variants</a:t>
-            </a:r>
-            <a:r>
-              <a:rPr sz="1700" b="0" i="0">
+              <a:t>9 fault categories</a:t>
+            </a:r>
+            <a:r>
+              <a:rPr sz="1300" b="0" i="0">
                 <a:solidFill>
                   <a:srgbClr val="FFFFFF"/>
                 </a:solidFill>
                 <a:latin typeface="Calibri"/>
               </a:rPr>
-              <a:t>, </a:t>
-            </a:r>
-            <a:r>
-              <a:rPr sz="1700" b="1" i="0">
-                <a:solidFill>
-                  <a:srgbClr val="F0A500"/>
-                </a:solidFill>
-                <a:latin typeface="Calibri"/>
-              </a:rPr>
-              <a:t>9 categories</a:t>
+              <a:t>, giving other researchers a ready-made testbed for failure-triage methods.</a:t>
             </a:r>
           </a:p>
           <a:p>
             <a:pPr>
               <a:spcAft>
-                <a:spcPts val="1300"/>
+                <a:spcPts val="800"/>
               </a:spcAft>
             </a:pPr>
             <a:r>
-              <a:rPr sz="1700" b="1" i="0">
+              <a:rPr sz="1300" b="1" i="0">
                 <a:solidFill>
                   <a:srgbClr val="F0A500"/>
                 </a:solidFill>
@@ -24284,23 +24686,23 @@
               <a:t>•  </a:t>
             </a:r>
             <a:r>
-              <a:rPr sz="1700" b="0" i="0">
+              <a:rPr sz="1300" b="0" i="0">
                 <a:solidFill>
                   <a:srgbClr val="FFFFFF"/>
                 </a:solidFill>
                 <a:latin typeface="Calibri"/>
               </a:rPr>
-              <a:t>3.  Latent fault detection: 33 simulation-passing bugs correctly flagged</a:t>
+              <a:t>We are, to our knowledge, the first to systematically detect latent faults in an NN accelerator context, correctly flagging all 33 simulation-passing bugs instead of letting them hide behind green checkmarks.</a:t>
             </a:r>
           </a:p>
           <a:p>
             <a:pPr>
               <a:spcAft>
-                <a:spcPts val="1300"/>
+                <a:spcPts val="800"/>
               </a:spcAft>
             </a:pPr>
             <a:r>
-              <a:rPr sz="1700" b="1" i="0">
+              <a:rPr sz="1300" b="1" i="0">
                 <a:solidFill>
                   <a:srgbClr val="F0A500"/>
                 </a:solidFill>
@@ -24309,16 +24711,16 @@
               <a:t>•  </a:t>
             </a:r>
             <a:r>
-              <a:rPr sz="1700" b="0" i="0">
+              <a:rPr sz="1300" b="0" i="0">
                 <a:solidFill>
                   <a:srgbClr val="FFFFFF"/>
                 </a:solidFill>
                 <a:latin typeface="Calibri"/>
               </a:rPr>
-              <a:t>4.  Quantitative evaluation: </a:t>
-            </a:r>
-            <a:r>
-              <a:rPr sz="1700" b="1" i="0">
+              <a:t>We back every claim with a measured quantitative evaluation — </a:t>
+            </a:r>
+            <a:r>
+              <a:rPr sz="1300" b="1" i="0">
                 <a:solidFill>
                   <a:srgbClr val="F0A500"/>
                 </a:solidFill>
@@ -24327,16 +24729,16 @@
               <a:t>96.5%</a:t>
             </a:r>
             <a:r>
-              <a:rPr sz="1700" b="0" i="0">
+              <a:rPr sz="1300" b="0" i="0">
                 <a:solidFill>
                   <a:srgbClr val="FFFFFF"/>
                 </a:solidFill>
                 <a:latin typeface="Calibri"/>
               </a:rPr>
-              <a:t> accuracy, </a:t>
-            </a:r>
-            <a:r>
-              <a:rPr sz="1700" b="1" i="0">
+              <a:t> classification accuracy and a </a:t>
+            </a:r>
+            <a:r>
+              <a:rPr sz="1300" b="1" i="0">
                 <a:solidFill>
                   <a:srgbClr val="F0A500"/>
                 </a:solidFill>
@@ -24345,23 +24747,23 @@
               <a:t>293x</a:t>
             </a:r>
             <a:r>
-              <a:rPr sz="1700" b="0" i="0">
+              <a:rPr sz="1300" b="0" i="0">
                 <a:solidFill>
                   <a:srgbClr val="FFFFFF"/>
                 </a:solidFill>
                 <a:latin typeface="Calibri"/>
               </a:rPr>
-              <a:t> speedup</a:t>
+              <a:t> speedup over a defined manual baseline — rather than qualitative impressions.</a:t>
             </a:r>
           </a:p>
           <a:p>
             <a:pPr>
               <a:spcAft>
-                <a:spcPts val="1300"/>
+                <a:spcPts val="800"/>
               </a:spcAft>
             </a:pPr>
             <a:r>
-              <a:rPr sz="1700" b="1" i="0">
+              <a:rPr sz="1300" b="1" i="0">
                 <a:solidFill>
                   <a:srgbClr val="F0A500"/>
                 </a:solidFill>
@@ -24370,23 +24772,23 @@
               <a:t>•  </a:t>
             </a:r>
             <a:r>
-              <a:rPr sz="1700" b="0" i="0">
+              <a:rPr sz="1300" b="0" i="0">
                 <a:solidFill>
                   <a:srgbClr val="FFFFFF"/>
                 </a:solidFill>
                 <a:latin typeface="Calibri"/>
               </a:rPr>
-              <a:t>5.  Honest ablation: rule-based vs LLM — equal accuracy, LLM adds explanation</a:t>
+              <a:t>We report an honest ablation showing rule-based and LLM-augmented triage reach identical accuracy, and we explain precisely where the LLM's real value lies instead of overselling it.</a:t>
             </a:r>
           </a:p>
           <a:p>
             <a:pPr>
               <a:spcAft>
-                <a:spcPts val="1300"/>
+                <a:spcPts val="800"/>
               </a:spcAft>
             </a:pPr>
             <a:r>
-              <a:rPr sz="1700" b="1" i="0">
+              <a:rPr sz="1300" b="1" i="0">
                 <a:solidFill>
                   <a:srgbClr val="F0A500"/>
                 </a:solidFill>
@@ -24395,23 +24797,23 @@
               <a:t>•  </a:t>
             </a:r>
             <a:r>
-              <a:rPr sz="1700" b="0" i="0">
+              <a:rPr sz="1300" b="0" i="0">
                 <a:solidFill>
                   <a:srgbClr val="FFFFFF"/>
                 </a:solidFill>
                 <a:latin typeface="Calibri"/>
               </a:rPr>
-              <a:t>6.  Fully reproducible: Docker, pytest, one-command pipeline</a:t>
+              <a:t>The entire project is fully reproducible: Docker packaging, a 131-test pytest suite, and a one-command pipeline mean any of these results can be independently verified.</a:t>
             </a:r>
           </a:p>
           <a:p>
             <a:pPr>
               <a:spcAft>
-                <a:spcPts val="1300"/>
+                <a:spcPts val="800"/>
               </a:spcAft>
             </a:pPr>
             <a:r>
-              <a:rPr sz="1700" b="1" i="0">
+              <a:rPr sz="1300" b="1" i="0">
                 <a:solidFill>
                   <a:srgbClr val="F0A500"/>
                 </a:solidFill>
@@ -24420,13 +24822,13 @@
               <a:t>•  </a:t>
             </a:r>
             <a:r>
-              <a:rPr sz="1700" b="0" i="0">
+              <a:rPr sz="1300" b="0" i="0">
                 <a:solidFill>
                   <a:srgbClr val="FFFFFF"/>
                 </a:solidFill>
                 <a:latin typeface="Calibri"/>
               </a:rPr>
-              <a:t>7.  131 passing tests, zero failures across all sessions</a:t>
+              <a:t>Zero test failures across all 20 development sessions demonstrate that speed of iteration and correctness were maintained together, not traded off against each other.</a:t>
             </a:r>
           </a:p>
         </p:txBody>
@@ -24740,7 +25142,7 @@
         <p:spPr>
           <a:xfrm>
             <a:off x="640080" y="1508760"/>
-            <a:ext cx="10911535" cy="4892040"/>
+            <a:ext cx="10911535" cy="777240"/>
           </a:xfrm>
           <a:prstGeom prst="rect">
             <a:avLst/>
@@ -24754,202 +25156,18 @@
           <a:lstStyle/>
           <a:p>
             <a:pPr>
-              <a:spcAft>
-                <a:spcPts val="1400"/>
-              </a:spcAft>
+              <a:lnSpc>
+                <a:spcPct val="115000"/>
+              </a:lnSpc>
             </a:pPr>
             <a:r>
-              <a:rPr sz="1700" b="1" i="0">
-                <a:solidFill>
-                  <a:srgbClr val="F0A500"/>
-                </a:solidFill>
-                <a:latin typeface="Calibri"/>
-              </a:rPr>
-              <a:t>•  Full RTL source:  </a:t>
-            </a:r>
-            <a:r>
-              <a:rPr sz="1700" b="0" i="0">
-                <a:solidFill>
-                  <a:srgbClr val="FFFFFF"/>
-                </a:solidFill>
-                <a:latin typeface="Calibri"/>
-              </a:rPr>
-              <a:t>mac_array, quant_unit, mem_arbiter, control_fsm</a:t>
-            </a:r>
-          </a:p>
-          <a:p>
-            <a:pPr>
-              <a:spcAft>
-                <a:spcPts val="1400"/>
-              </a:spcAft>
-            </a:pPr>
-            <a:r>
-              <a:rPr sz="1700" b="1" i="0">
-                <a:solidFill>
-                  <a:srgbClr val="F0A500"/>
-                </a:solidFill>
-                <a:latin typeface="Calibri"/>
-              </a:rPr>
-              <a:t>•  Fault variants:  </a:t>
-            </a:r>
-            <a:r>
-              <a:rPr sz="1700" b="0" i="0">
-                <a:solidFill>
-                  <a:srgbClr val="FFFFFF"/>
-                </a:solidFill>
-                <a:latin typeface="Calibri"/>
-              </a:rPr>
-              <a:t>13, with documented injection methodology</a:t>
-            </a:r>
-          </a:p>
-          <a:p>
-            <a:pPr>
-              <a:spcAft>
-                <a:spcPts val="1400"/>
-              </a:spcAft>
-            </a:pPr>
-            <a:r>
-              <a:rPr sz="1700" b="1" i="0">
-                <a:solidFill>
-                  <a:srgbClr val="F0A500"/>
-                </a:solidFill>
-                <a:latin typeface="Calibri"/>
-              </a:rPr>
-              <a:t>•  Regression database:  </a:t>
-            </a:r>
-            <a:r>
-              <a:rPr sz="1700" b="0" i="0">
-                <a:solidFill>
-                  <a:srgbClr val="FFFFFF"/>
-                </a:solidFill>
-                <a:latin typeface="Calibri"/>
-              </a:rPr>
-              <a:t>255-record dataset with JSON schema</a:t>
-            </a:r>
-          </a:p>
-          <a:p>
-            <a:pPr>
-              <a:spcAft>
-                <a:spcPts val="1400"/>
-              </a:spcAft>
-            </a:pPr>
-            <a:r>
-              <a:rPr sz="1700" b="1" i="0">
-                <a:solidFill>
-                  <a:srgbClr val="F0A500"/>
-                </a:solidFill>
-                <a:latin typeface="Calibri"/>
-              </a:rPr>
-              <a:t>•  Triage pipeline:  </a:t>
-            </a:r>
-            <a:r>
-              <a:rPr sz="1700" b="0" i="0">
-                <a:solidFill>
-                  <a:srgbClr val="FFFFFF"/>
-                </a:solidFill>
-                <a:latin typeface="Calibri"/>
-              </a:rPr>
-              <a:t>feature extractor, clusterer, triage agent, RAG, debug loop</a:t>
-            </a:r>
-          </a:p>
-          <a:p>
-            <a:pPr>
-              <a:spcAft>
-                <a:spcPts val="1400"/>
-              </a:spcAft>
-            </a:pPr>
-            <a:r>
-              <a:rPr sz="1700" b="1" i="0">
-                <a:solidFill>
-                  <a:srgbClr val="F0A500"/>
-                </a:solidFill>
-                <a:latin typeface="Calibri"/>
-              </a:rPr>
-              <a:t>•  Benchmark tooling:  </a:t>
-            </a:r>
-            <a:r>
-              <a:rPr sz="1700" b="0" i="0">
-                <a:solidFill>
-                  <a:srgbClr val="FFFFFF"/>
-                </a:solidFill>
-                <a:latin typeface="Calibri"/>
-              </a:rPr>
-              <a:t>runner and evaluator</a:t>
-            </a:r>
-          </a:p>
-          <a:p>
-            <a:pPr>
-              <a:spcAft>
-                <a:spcPts val="1400"/>
-              </a:spcAft>
-            </a:pPr>
-            <a:r>
-              <a:rPr sz="1700" b="1" i="0">
-                <a:solidFill>
-                  <a:srgbClr val="F0A500"/>
-                </a:solidFill>
-                <a:latin typeface="Calibri"/>
-              </a:rPr>
-              <a:t>•  Dashboard:  </a:t>
-            </a:r>
-            <a:r>
-              <a:rPr sz="1700" b="0" i="0">
-                <a:solidFill>
-                  <a:srgbClr val="FFFFFF"/>
-                </a:solidFill>
-                <a:latin typeface="Calibri"/>
-              </a:rPr>
-              <a:t>interactive HTML report</a:t>
-            </a:r>
-          </a:p>
-          <a:p>
-            <a:pPr>
-              <a:spcAft>
-                <a:spcPts val="1400"/>
-              </a:spcAft>
-            </a:pPr>
-            <a:r>
-              <a:rPr sz="1700" b="1" i="0">
-                <a:solidFill>
-                  <a:srgbClr val="F0A500"/>
-                </a:solidFill>
-                <a:latin typeface="Calibri"/>
-              </a:rPr>
-              <a:t>•  Reproducibility:  </a:t>
-            </a:r>
-            <a:r>
-              <a:rPr sz="1700" b="0" i="0">
-                <a:solidFill>
-                  <a:srgbClr val="FFFFFF"/>
-                </a:solidFill>
-                <a:latin typeface="Calibri"/>
-              </a:rPr>
-              <a:t>Docker for one-command reproduce</a:t>
-            </a:r>
-          </a:p>
-          <a:p>
-            <a:pPr>
-              <a:spcAft>
-                <a:spcPts val="1400"/>
-              </a:spcAft>
-            </a:pPr>
-            <a:r>
-              <a:rPr sz="1700" b="1" i="0">
-                <a:solidFill>
-                  <a:srgbClr val="F0A500"/>
-                </a:solidFill>
-                <a:latin typeface="Calibri"/>
-              </a:rPr>
-              <a:t>•  Test suite:  </a:t>
-            </a:r>
-            <a:r>
-              <a:rPr sz="1700" b="0" i="0">
-                <a:solidFill>
-                  <a:srgbClr val="FFFFFF"/>
-                </a:solidFill>
-                <a:latin typeface="Calibri"/>
-              </a:rPr>
-              <a:t>131 pytest tests</a:t>
+              <a:rPr sz="1400" b="0" i="0">
+                <a:solidFill>
+                  <a:srgbClr val="C7C9D9"/>
+                </a:solidFill>
+                <a:latin typeface="Calibri"/>
+              </a:rPr>
+              <a:t>Every artifact described in this presentation is public on GitHub under a single repository, with no private dependencies or held-back components. The goal is that a stranger can clone the repo, run one Docker command, and reproduce every number in this deck.</a:t>
             </a:r>
           </a:p>
         </p:txBody>
@@ -24962,8 +25180,8 @@
         </p:nvSpPr>
         <p:spPr>
           <a:xfrm>
-            <a:off x="640080" y="1298448"/>
-            <a:ext cx="10911535" cy="320040"/>
+            <a:off x="640080" y="2377440"/>
+            <a:ext cx="10911535" cy="4023360"/>
           </a:xfrm>
           <a:prstGeom prst="rect">
             <a:avLst/>
@@ -24976,8 +25194,231 @@
           </a:bodyPr>
           <a:lstStyle/>
           <a:p>
-            <a:r>
-              <a:rPr sz="1400" b="0" i="0">
+            <a:pPr>
+              <a:spcAft>
+                <a:spcPts val="900"/>
+              </a:spcAft>
+            </a:pPr>
+            <a:r>
+              <a:rPr sz="1300" b="1" i="0">
+                <a:solidFill>
+                  <a:srgbClr val="F0A500"/>
+                </a:solidFill>
+                <a:latin typeface="Calibri"/>
+              </a:rPr>
+              <a:t>•  Full RTL source:  </a:t>
+            </a:r>
+            <a:r>
+              <a:rPr sz="1300" b="0" i="0">
+                <a:solidFill>
+                  <a:srgbClr val="FFFFFF"/>
+                </a:solidFill>
+                <a:latin typeface="Calibri"/>
+              </a:rPr>
+              <a:t>mac_array, quant_unit, mem_arbiter, control_fsm — every module described in this deck, unmodified from what generated these results.</a:t>
+            </a:r>
+          </a:p>
+          <a:p>
+            <a:pPr>
+              <a:spcAft>
+                <a:spcPts val="900"/>
+              </a:spcAft>
+            </a:pPr>
+            <a:r>
+              <a:rPr sz="1300" b="1" i="0">
+                <a:solidFill>
+                  <a:srgbClr val="F0A500"/>
+                </a:solidFill>
+                <a:latin typeface="Calibri"/>
+              </a:rPr>
+              <a:t>•  Fault variants:  </a:t>
+            </a:r>
+            <a:r>
+              <a:rPr sz="1300" b="0" i="0">
+                <a:solidFill>
+                  <a:srgbClr val="FFFFFF"/>
+                </a:solidFill>
+                <a:latin typeface="Calibri"/>
+              </a:rPr>
+              <a:t>All 13, with the generate_faults.py script that produced them, so the injection methodology is auditable, not just the outcomes.</a:t>
+            </a:r>
+          </a:p>
+          <a:p>
+            <a:pPr>
+              <a:spcAft>
+                <a:spcPts val="900"/>
+              </a:spcAft>
+            </a:pPr>
+            <a:r>
+              <a:rPr sz="1300" b="1" i="0">
+                <a:solidFill>
+                  <a:srgbClr val="F0A500"/>
+                </a:solidFill>
+                <a:latin typeface="Calibri"/>
+              </a:rPr>
+              <a:t>•  Regression database:  </a:t>
+            </a:r>
+            <a:r>
+              <a:rPr sz="1300" b="0" i="0">
+                <a:solidFill>
+                  <a:srgbClr val="FFFFFF"/>
+                </a:solidFill>
+                <a:latin typeface="Calibri"/>
+              </a:rPr>
+              <a:t>The full 255-record dataset with its JSON schema, ready to re-run through the pipeline or use as a benchmark for other triage methods.</a:t>
+            </a:r>
+          </a:p>
+          <a:p>
+            <a:pPr>
+              <a:spcAft>
+                <a:spcPts val="900"/>
+              </a:spcAft>
+            </a:pPr>
+            <a:r>
+              <a:rPr sz="1300" b="1" i="0">
+                <a:solidFill>
+                  <a:srgbClr val="F0A500"/>
+                </a:solidFill>
+                <a:latin typeface="Calibri"/>
+              </a:rPr>
+              <a:t>•  Triage pipeline:  </a:t>
+            </a:r>
+            <a:r>
+              <a:rPr sz="1300" b="0" i="0">
+                <a:solidFill>
+                  <a:srgbClr val="FFFFFF"/>
+                </a:solidFill>
+                <a:latin typeface="Calibri"/>
+              </a:rPr>
+              <a:t>Feature extractor, clusterer, triage agent, RAG store, and debug loop — the complete AI system, not just a script.</a:t>
+            </a:r>
+          </a:p>
+          <a:p>
+            <a:pPr>
+              <a:spcAft>
+                <a:spcPts val="900"/>
+              </a:spcAft>
+            </a:pPr>
+            <a:r>
+              <a:rPr sz="1300" b="1" i="0">
+                <a:solidFill>
+                  <a:srgbClr val="F0A500"/>
+                </a:solidFill>
+                <a:latin typeface="Calibri"/>
+              </a:rPr>
+              <a:t>•  Benchmark tooling:  </a:t>
+            </a:r>
+            <a:r>
+              <a:rPr sz="1300" b="0" i="0">
+                <a:solidFill>
+                  <a:srgbClr val="FFFFFF"/>
+                </a:solidFill>
+                <a:latin typeface="Calibri"/>
+              </a:rPr>
+              <a:t>The runner and evaluator that produced every number in this presentation, so the results can be independently reproduced.</a:t>
+            </a:r>
+          </a:p>
+          <a:p>
+            <a:pPr>
+              <a:spcAft>
+                <a:spcPts val="900"/>
+              </a:spcAft>
+            </a:pPr>
+            <a:r>
+              <a:rPr sz="1300" b="1" i="0">
+                <a:solidFill>
+                  <a:srgbClr val="F0A500"/>
+                </a:solidFill>
+                <a:latin typeface="Calibri"/>
+              </a:rPr>
+              <a:t>•  Dashboard:  </a:t>
+            </a:r>
+            <a:r>
+              <a:rPr sz="1300" b="0" i="0">
+                <a:solidFill>
+                  <a:srgbClr val="FFFFFF"/>
+                </a:solidFill>
+                <a:latin typeface="Calibri"/>
+              </a:rPr>
+              <a:t>The interactive HTML report generator, self-contained with no server or JS framework required.</a:t>
+            </a:r>
+          </a:p>
+          <a:p>
+            <a:pPr>
+              <a:spcAft>
+                <a:spcPts val="900"/>
+              </a:spcAft>
+            </a:pPr>
+            <a:r>
+              <a:rPr sz="1300" b="1" i="0">
+                <a:solidFill>
+                  <a:srgbClr val="F0A500"/>
+                </a:solidFill>
+                <a:latin typeface="Calibri"/>
+              </a:rPr>
+              <a:t>•  Reproducibility:  </a:t>
+            </a:r>
+            <a:r>
+              <a:rPr sz="1300" b="0" i="0">
+                <a:solidFill>
+                  <a:srgbClr val="FFFFFF"/>
+                </a:solidFill>
+                <a:latin typeface="Calibri"/>
+              </a:rPr>
+              <a:t>A Docker setup that takes the project from a clean checkout to a finished dashboard in one command.</a:t>
+            </a:r>
+          </a:p>
+          <a:p>
+            <a:pPr>
+              <a:spcAft>
+                <a:spcPts val="900"/>
+              </a:spcAft>
+            </a:pPr>
+            <a:r>
+              <a:rPr sz="1300" b="1" i="0">
+                <a:solidFill>
+                  <a:srgbClr val="F0A500"/>
+                </a:solidFill>
+                <a:latin typeface="Calibri"/>
+              </a:rPr>
+              <a:t>•  Test suite:  </a:t>
+            </a:r>
+            <a:r>
+              <a:rPr sz="1300" b="0" i="0">
+                <a:solidFill>
+                  <a:srgbClr val="FFFFFF"/>
+                </a:solidFill>
+                <a:latin typeface="Calibri"/>
+              </a:rPr>
+              <a:t>All 131 pytest tests that have passed on every one of the 20 development sessions.</a:t>
+            </a:r>
+          </a:p>
+        </p:txBody>
+      </p:sp>
+      <p:sp>
+        <p:nvSpPr>
+          <p:cNvPr id="11" name="TextBox 10"/>
+          <p:cNvSpPr txBox="1"/>
+          <p:nvPr/>
+        </p:nvSpPr>
+        <p:spPr>
+          <a:xfrm>
+            <a:off x="640080" y="1261872"/>
+            <a:ext cx="10911535" cy="219456"/>
+          </a:xfrm>
+          <a:prstGeom prst="rect">
+            <a:avLst/>
+          </a:prstGeom>
+          <a:noFill/>
+        </p:spPr>
+        <p:txBody>
+          <a:bodyPr wrap="square" lIns="0" rIns="0" tIns="0" bIns="0">
+            <a:noAutofit/>
+          </a:bodyPr>
+          <a:lstStyle/>
+          <a:p>
+            <a:r>
+              <a:rPr sz="1200" b="0" i="0">
                 <a:solidFill>
                   <a:srgbClr val="C7C9D9"/>
                 </a:solidFill>
@@ -24986,7 +25427,7 @@
               <a:t>GitHub: </a:t>
             </a:r>
             <a:r>
-              <a:rPr sz="1400" b="1" i="0">
+              <a:rPr sz="1200" b="1" i="0">
                 <a:solidFill>
                   <a:srgbClr val="6F9CC4"/>
                 </a:solidFill>
@@ -25306,7 +25747,7 @@
         <p:spPr>
           <a:xfrm>
             <a:off x="640080" y="1508760"/>
-            <a:ext cx="10911535" cy="4892040"/>
+            <a:ext cx="10911535" cy="1737360"/>
           </a:xfrm>
           <a:prstGeom prst="rect">
             <a:avLst/>
@@ -25320,12 +25761,51 @@
           <a:lstStyle/>
           <a:p>
             <a:pPr>
+              <a:lnSpc>
+                <a:spcPct val="120000"/>
+              </a:lnSpc>
+            </a:pPr>
+            <a:r>
+              <a:rPr sz="1600" b="0" i="0">
+                <a:solidFill>
+                  <a:srgbClr val="FFFFFF"/>
+                </a:solidFill>
+                <a:latin typeface="Calibri"/>
+              </a:rPr>
+              <a:t>We built NN-Accel-Triage, a complete end-to-end agentic AI system that automates the failure triage process. Starting from raw simulation mismatches, the pipeline extracts 13 structured features per failure, clusters failures by symptom pattern, and uses Claude AI with retrieval-augmented generation and multi-turn reasoning to generate precise root-cause reports with actionable debug steps. The entire process completes in 46 seconds versus 225 minutes manually.</a:t>
+            </a:r>
+          </a:p>
+        </p:txBody>
+      </p:sp>
+      <p:sp>
+        <p:nvSpPr>
+          <p:cNvPr id="10" name="TextBox 9"/>
+          <p:cNvSpPr txBox="1"/>
+          <p:nvPr/>
+        </p:nvSpPr>
+        <p:spPr>
+          <a:xfrm>
+            <a:off x="640080" y="3246120"/>
+            <a:ext cx="10911535" cy="3200400"/>
+          </a:xfrm>
+          <a:prstGeom prst="rect">
+            <a:avLst/>
+          </a:prstGeom>
+          <a:noFill/>
+        </p:spPr>
+        <p:txBody>
+          <a:bodyPr wrap="square" lIns="0" rIns="0" tIns="0" bIns="0">
+            <a:noAutofit/>
+          </a:bodyPr>
+          <a:lstStyle/>
+          <a:p>
+            <a:pPr>
               <a:spcAft>
-                <a:spcPts val="1500"/>
+                <a:spcPts val="1200"/>
               </a:spcAft>
             </a:pPr>
             <a:r>
-              <a:rPr sz="1900" b="1" i="0">
+              <a:rPr sz="1500" b="1" i="0">
                 <a:solidFill>
                   <a:srgbClr val="F0A500"/>
                 </a:solidFill>
@@ -25334,23 +25814,23 @@
               <a:t>•  </a:t>
             </a:r>
             <a:r>
-              <a:rPr sz="1900" b="0" i="0">
+              <a:rPr sz="1500" b="0" i="0">
                 <a:solidFill>
                   <a:srgbClr val="FFFFFF"/>
                 </a:solidFill>
                 <a:latin typeface="Calibri"/>
               </a:rPr>
-              <a:t>Build a layered testbench for a small NN accelerator RTL</a:t>
+              <a:t>We built a layered testbench for a small NN accelerator RTL design and deliberately injected 13 realistic RTL bugs to create a ground-truth regression database.</a:t>
             </a:r>
           </a:p>
           <a:p>
             <a:pPr>
               <a:spcAft>
-                <a:spcPts val="1500"/>
+                <a:spcPts val="1200"/>
               </a:spcAft>
             </a:pPr>
             <a:r>
-              <a:rPr sz="1900" b="1" i="0">
+              <a:rPr sz="1500" b="1" i="0">
                 <a:solidFill>
                   <a:srgbClr val="F0A500"/>
                 </a:solidFill>
@@ -25359,23 +25839,23 @@
               <a:t>•  </a:t>
             </a:r>
             <a:r>
-              <a:rPr sz="1900" b="0" i="0">
+              <a:rPr sz="1500" b="0" i="0">
                 <a:solidFill>
                   <a:srgbClr val="FFFFFF"/>
                 </a:solidFill>
                 <a:latin typeface="Calibri"/>
               </a:rPr>
-              <a:t>Inject fault variants to create a realistic regression database</a:t>
+              <a:t>A rule-based and DBSCAN clusterer groups failures by symptom before Claude ever sees them, so the LLM only has to explain, not classify from scratch.</a:t>
             </a:r>
           </a:p>
           <a:p>
             <a:pPr>
               <a:spcAft>
-                <a:spcPts val="1500"/>
+                <a:spcPts val="1200"/>
               </a:spcAft>
             </a:pPr>
             <a:r>
-              <a:rPr sz="1900" b="1" i="0">
+              <a:rPr sz="1500" b="1" i="0">
                 <a:solidFill>
                   <a:srgbClr val="F0A500"/>
                 </a:solidFill>
@@ -25384,88 +25864,13 @@
               <a:t>•  </a:t>
             </a:r>
             <a:r>
-              <a:rPr sz="1900" b="0" i="0">
+              <a:rPr sz="1500" b="0" i="0">
                 <a:solidFill>
                   <a:srgbClr val="FFFFFF"/>
                 </a:solidFill>
                 <a:latin typeface="Calibri"/>
               </a:rPr>
-              <a:t>Extract features from failures automatically</a:t>
-            </a:r>
-          </a:p>
-          <a:p>
-            <a:pPr>
-              <a:spcAft>
-                <a:spcPts val="1500"/>
-              </a:spcAft>
-            </a:pPr>
-            <a:r>
-              <a:rPr sz="1900" b="1" i="0">
-                <a:solidFill>
-                  <a:srgbClr val="F0A500"/>
-                </a:solidFill>
-                <a:latin typeface="Calibri"/>
-              </a:rPr>
-              <a:t>•  </a:t>
-            </a:r>
-            <a:r>
-              <a:rPr sz="1900" b="0" i="0">
-                <a:solidFill>
-                  <a:srgbClr val="FFFFFF"/>
-                </a:solidFill>
-                <a:latin typeface="Calibri"/>
-              </a:rPr>
-              <a:t>Cluster failures by symptom using rule-based + DBSCAN</a:t>
-            </a:r>
-          </a:p>
-          <a:p>
-            <a:pPr>
-              <a:spcAft>
-                <a:spcPts val="1500"/>
-              </a:spcAft>
-            </a:pPr>
-            <a:r>
-              <a:rPr sz="1900" b="1" i="0">
-                <a:solidFill>
-                  <a:srgbClr val="F0A500"/>
-                </a:solidFill>
-                <a:latin typeface="Calibri"/>
-              </a:rPr>
-              <a:t>•  </a:t>
-            </a:r>
-            <a:r>
-              <a:rPr sz="1900" b="0" i="0">
-                <a:solidFill>
-                  <a:srgbClr val="FFFFFF"/>
-                </a:solidFill>
-                <a:latin typeface="Calibri"/>
-              </a:rPr>
-              <a:t>Generate natural-language root-cause reports using Claude AI</a:t>
-            </a:r>
-          </a:p>
-          <a:p>
-            <a:pPr>
-              <a:spcAft>
-                <a:spcPts val="1500"/>
-              </a:spcAft>
-            </a:pPr>
-            <a:r>
-              <a:rPr sz="1900" b="1" i="0">
-                <a:solidFill>
-                  <a:srgbClr val="F0A500"/>
-                </a:solidFill>
-                <a:latin typeface="Calibri"/>
-              </a:rPr>
-              <a:t>•  </a:t>
-            </a:r>
-            <a:r>
-              <a:rPr sz="1900" b="0" i="0">
-                <a:solidFill>
-                  <a:srgbClr val="FFFFFF"/>
-                </a:solidFill>
-                <a:latin typeface="Calibri"/>
-              </a:rPr>
-              <a:t>Benchmark AI triage speed and accuracy against manual baseline</a:t>
+              <a:t>The whole pipeline is benchmarked end-to-end against a manual-triage baseline so the speedup and accuracy claims are measured, not assumed.</a:t>
             </a:r>
           </a:p>
         </p:txBody>
@@ -26195,11 +26600,11 @@
           <a:p>
             <a:pPr>
               <a:spcAft>
-                <a:spcPts val="1800"/>
+                <a:spcPts val="1000"/>
               </a:spcAft>
             </a:pPr>
             <a:r>
-              <a:rPr sz="1900" b="1" i="0">
+              <a:rPr sz="1400" b="1" i="0">
                 <a:solidFill>
                   <a:srgbClr val="F0A500"/>
                 </a:solidFill>
@@ -26208,23 +26613,23 @@
               <a:t>•  </a:t>
             </a:r>
             <a:r>
-              <a:rPr sz="1900" b="0" i="0">
+              <a:rPr sz="1400" b="0" i="0">
                 <a:solidFill>
                   <a:srgbClr val="FFFFFF"/>
                 </a:solidFill>
                 <a:latin typeface="Calibri"/>
               </a:rPr>
-              <a:t>(i)   Verify functional correctness across tensor shapes, quantization, memory behaviors</a:t>
+              <a:t>Objective (i) is to verify functional correctness across tensor shapes, quantization modes, and memory behaviors, ensuring the RTL matches a NumPy golden reference on every configuration we test.</a:t>
             </a:r>
           </a:p>
           <a:p>
             <a:pPr>
               <a:spcAft>
-                <a:spcPts val="1800"/>
+                <a:spcPts val="1000"/>
               </a:spcAft>
             </a:pPr>
             <a:r>
-              <a:rPr sz="1900" b="1" i="0">
+              <a:rPr sz="1400" b="1" i="0">
                 <a:solidFill>
                   <a:srgbClr val="F0A500"/>
                 </a:solidFill>
@@ -26233,23 +26638,23 @@
               <a:t>•  </a:t>
             </a:r>
             <a:r>
-              <a:rPr sz="1900" b="0" i="0">
+              <a:rPr sz="1400" b="0" i="0">
                 <a:solidFill>
                   <a:srgbClr val="FFFFFF"/>
                 </a:solidFill>
                 <a:latin typeface="Calibri"/>
               </a:rPr>
-              <a:t>(ii)  Cluster regression failures automatically</a:t>
+              <a:t>Objective (ii) is to cluster regression failures automatically, so hundreds of individual mismatches collapse into a handful of symptom groups an engineer can reason about.</a:t>
             </a:r>
           </a:p>
           <a:p>
             <a:pPr>
               <a:spcAft>
-                <a:spcPts val="1800"/>
+                <a:spcPts val="1000"/>
               </a:spcAft>
             </a:pPr>
             <a:r>
-              <a:rPr sz="1900" b="1" i="0">
+              <a:rPr sz="1400" b="1" i="0">
                 <a:solidFill>
                   <a:srgbClr val="F0A500"/>
                 </a:solidFill>
@@ -26258,23 +26663,23 @@
               <a:t>•  </a:t>
             </a:r>
             <a:r>
-              <a:rPr sz="1900" b="0" i="0">
+              <a:rPr sz="1400" b="0" i="0">
                 <a:solidFill>
                   <a:srgbClr val="FFFFFF"/>
                 </a:solidFill>
                 <a:latin typeface="Calibri"/>
               </a:rPr>
-              <a:t>(iii) Generate natural-language debug summaries and root-cause hints</a:t>
+              <a:t>Objective (iii) is to generate natural-language debug summaries and likely root-cause hints, turning a raw error signature into an explanation a human can act on immediately.</a:t>
             </a:r>
           </a:p>
           <a:p>
             <a:pPr>
               <a:spcAft>
-                <a:spcPts val="1800"/>
+                <a:spcPts val="1000"/>
               </a:spcAft>
             </a:pPr>
             <a:r>
-              <a:rPr sz="1900" b="1" i="0">
+              <a:rPr sz="1400" b="1" i="0">
                 <a:solidFill>
                   <a:srgbClr val="F0A500"/>
                 </a:solidFill>
@@ -26283,23 +26688,23 @@
               <a:t>•  </a:t>
             </a:r>
             <a:r>
-              <a:rPr sz="1900" b="0" i="0">
+              <a:rPr sz="1400" b="0" i="0">
                 <a:solidFill>
                   <a:srgbClr val="FFFFFF"/>
                 </a:solidFill>
                 <a:latin typeface="Calibri"/>
               </a:rPr>
-              <a:t>(iv)  Compare triage time against manual methods</a:t>
+              <a:t>Objective (iv) is to compare AI triage time against manual methods with a real, measured benchmark rather than an anecdotal estimate.</a:t>
             </a:r>
           </a:p>
           <a:p>
             <a:pPr>
               <a:spcAft>
-                <a:spcPts val="1800"/>
+                <a:spcPts val="1000"/>
               </a:spcAft>
             </a:pPr>
             <a:r>
-              <a:rPr sz="1900" b="1" i="0">
+              <a:rPr sz="1400" b="1" i="0">
                 <a:solidFill>
                   <a:srgbClr val="F0A500"/>
                 </a:solidFill>
@@ -26308,13 +26713,38 @@
               <a:t>•  </a:t>
             </a:r>
             <a:r>
-              <a:rPr sz="1900" b="0" i="0">
+              <a:rPr sz="1400" b="0" i="0">
                 <a:solidFill>
                   <a:srgbClr val="FFFFFF"/>
                 </a:solidFill>
                 <a:latin typeface="Calibri"/>
               </a:rPr>
-              <a:t>(v)   Package a reproducible failure-analysis benchmark others can run</a:t>
+              <a:t>Objective (v) is to package the entire failure-analysis benchmark — RTL, faults, database, and pipeline — so other researchers can reproduce and extend our results.</a:t>
+            </a:r>
+          </a:p>
+          <a:p>
+            <a:pPr>
+              <a:spcAft>
+                <a:spcPts val="1000"/>
+              </a:spcAft>
+            </a:pPr>
+            <a:r>
+              <a:rPr sz="1400" b="1" i="0">
+                <a:solidFill>
+                  <a:srgbClr val="F0A500"/>
+                </a:solidFill>
+                <a:latin typeface="Calibri"/>
+              </a:rPr>
+              <a:t>•  </a:t>
+            </a:r>
+            <a:r>
+              <a:rPr sz="1400" b="0" i="0">
+                <a:solidFill>
+                  <a:srgbClr val="FFFFFF"/>
+                </a:solidFill>
+                <a:latin typeface="Calibri"/>
+              </a:rPr>
+              <a:t>Together these five objectives span the full verification lifecycle: catching bugs, grouping them, explaining them, measuring the value of automation, and making the whole exercise repeatable.</a:t>
             </a:r>
           </a:p>
         </p:txBody>
@@ -26643,11 +27073,11 @@
           <a:p>
             <a:pPr>
               <a:spcAft>
-                <a:spcPts val="1500"/>
+                <a:spcPts val="800"/>
               </a:spcAft>
             </a:pPr>
             <a:r>
-              <a:rPr sz="1900" b="1" i="0">
+              <a:rPr sz="1350" b="1" i="0">
                 <a:solidFill>
                   <a:srgbClr val="F0A500"/>
                 </a:solidFill>
@@ -26656,7 +27086,16 @@
               <a:t>•  </a:t>
             </a:r>
             <a:r>
-              <a:rPr sz="1900" b="1" i="0">
+              <a:rPr sz="1350" b="0" i="0">
+                <a:solidFill>
+                  <a:srgbClr val="FFFFFF"/>
+                </a:solidFill>
+                <a:latin typeface="Calibri"/>
+              </a:rPr>
+              <a:t>Our AI triage pipeline achieves a </a:t>
+            </a:r>
+            <a:r>
+              <a:rPr sz="1350" b="1" i="0">
                 <a:solidFill>
                   <a:srgbClr val="F0A500"/>
                 </a:solidFill>
@@ -26665,59 +27104,41 @@
               <a:t>342x</a:t>
             </a:r>
             <a:r>
-              <a:rPr sz="1900" b="0" i="0">
+              <a:rPr sz="1350" b="0" i="0">
                 <a:solidFill>
                   <a:srgbClr val="FFFFFF"/>
                 </a:solidFill>
                 <a:latin typeface="Calibri"/>
               </a:rPr>
-              <a:t> speedup on original benchmark (</a:t>
-            </a:r>
-            <a:r>
-              <a:rPr sz="1900" b="1" i="0">
+              <a:t> speedup over manual triage on the original benchmark of </a:t>
+            </a:r>
+            <a:r>
+              <a:rPr sz="1350" b="1" i="0">
                 <a:solidFill>
                   <a:srgbClr val="F0A500"/>
                 </a:solidFill>
                 <a:latin typeface="Calibri"/>
               </a:rPr>
-              <a:t>4 faults</a:t>
-            </a:r>
-            <a:r>
-              <a:rPr sz="1900" b="0" i="0">
+              <a:t>4 fault variants</a:t>
+            </a:r>
+            <a:r>
+              <a:rPr sz="1350" b="0" i="0">
                 <a:solidFill>
                   <a:srgbClr val="FFFFFF"/>
                 </a:solidFill>
                 <a:latin typeface="Calibri"/>
               </a:rPr>
-              <a:t>, </a:t>
-            </a:r>
-            <a:r>
-              <a:rPr sz="1900" b="1" i="0">
-                <a:solidFill>
-                  <a:srgbClr val="F0A500"/>
-                </a:solidFill>
-                <a:latin typeface="Calibri"/>
-              </a:rPr>
-              <a:t>27 records</a:t>
-            </a:r>
-            <a:r>
-              <a:rPr sz="1900" b="0" i="0">
-                <a:solidFill>
-                  <a:srgbClr val="FFFFFF"/>
-                </a:solidFill>
-                <a:latin typeface="Calibri"/>
-              </a:rPr>
-              <a:t>)</a:t>
+              <a:t> and 27 regression records.</a:t>
             </a:r>
           </a:p>
           <a:p>
             <a:pPr>
               <a:spcAft>
-                <a:spcPts val="1500"/>
+                <a:spcPts val="800"/>
               </a:spcAft>
             </a:pPr>
             <a:r>
-              <a:rPr sz="1900" b="1" i="0">
+              <a:rPr sz="1350" b="1" i="0">
                 <a:solidFill>
                   <a:srgbClr val="F0A500"/>
                 </a:solidFill>
@@ -26726,68 +27147,77 @@
               <a:t>•  </a:t>
             </a:r>
             <a:r>
-              <a:rPr sz="1900" b="1" i="0">
+              <a:rPr sz="1350" b="0" i="0">
+                <a:solidFill>
+                  <a:srgbClr val="FFFFFF"/>
+                </a:solidFill>
+                <a:latin typeface="Calibri"/>
+              </a:rPr>
+              <a:t>On the expanded benchmark of </a:t>
+            </a:r>
+            <a:r>
+              <a:rPr sz="1350" b="1" i="0">
                 <a:solidFill>
                   <a:srgbClr val="F0A500"/>
                 </a:solidFill>
                 <a:latin typeface="Calibri"/>
               </a:rPr>
+              <a:t>13 fault variants</a:t>
+            </a:r>
+            <a:r>
+              <a:rPr sz="1350" b="0" i="0">
+                <a:solidFill>
+                  <a:srgbClr val="FFFFFF"/>
+                </a:solidFill>
+                <a:latin typeface="Calibri"/>
+              </a:rPr>
+              <a:t> and </a:t>
+            </a:r>
+            <a:r>
+              <a:rPr sz="1350" b="1" i="0">
+                <a:solidFill>
+                  <a:srgbClr val="F0A500"/>
+                </a:solidFill>
+                <a:latin typeface="Calibri"/>
+              </a:rPr>
+              <a:t>255 records</a:t>
+            </a:r>
+            <a:r>
+              <a:rPr sz="1350" b="0" i="0">
+                <a:solidFill>
+                  <a:srgbClr val="FFFFFF"/>
+                </a:solidFill>
+                <a:latin typeface="Calibri"/>
+              </a:rPr>
+              <a:t>, the speedup is </a:t>
+            </a:r>
+            <a:r>
+              <a:rPr sz="1350" b="1" i="0">
+                <a:solidFill>
+                  <a:srgbClr val="F0A500"/>
+                </a:solidFill>
+                <a:latin typeface="Calibri"/>
+              </a:rPr>
               <a:t>293x</a:t>
             </a:r>
             <a:r>
-              <a:rPr sz="1900" b="0" i="0">
+              <a:rPr sz="1350" b="0" i="0">
                 <a:solidFill>
                   <a:srgbClr val="FFFFFF"/>
                 </a:solidFill>
                 <a:latin typeface="Calibri"/>
               </a:rPr>
-              <a:t> speedup on expanded benchmark (</a:t>
-            </a:r>
-            <a:r>
-              <a:rPr sz="1900" b="1" i="0">
-                <a:solidFill>
-                  <a:srgbClr val="F0A500"/>
-                </a:solidFill>
-                <a:latin typeface="Calibri"/>
-              </a:rPr>
-              <a:t>13 faults</a:t>
-            </a:r>
-            <a:r>
-              <a:rPr sz="1900" b="0" i="0">
-                <a:solidFill>
-                  <a:srgbClr val="FFFFFF"/>
-                </a:solidFill>
-                <a:latin typeface="Calibri"/>
-              </a:rPr>
-              <a:t>, </a:t>
-            </a:r>
-            <a:r>
-              <a:rPr sz="1900" b="1" i="0">
-                <a:solidFill>
-                  <a:srgbClr val="F0A500"/>
-                </a:solidFill>
-                <a:latin typeface="Calibri"/>
-              </a:rPr>
-              <a:t>255 records</a:t>
-            </a:r>
-            <a:r>
-              <a:rPr sz="1900" b="0" i="0">
-                <a:solidFill>
-                  <a:srgbClr val="FFFFFF"/>
-                </a:solidFill>
-                <a:latin typeface="Calibri"/>
-              </a:rPr>
-              <a:t>)</a:t>
+              <a:t>, reflecting the larger and more realistic failure population.</a:t>
             </a:r>
           </a:p>
           <a:p>
             <a:pPr>
               <a:spcAft>
-                <a:spcPts val="1500"/>
+                <a:spcPts val="800"/>
               </a:spcAft>
             </a:pPr>
             <a:r>
-              <a:rPr sz="1900" b="1" i="0">
+              <a:rPr sz="1350" b="1" i="0">
                 <a:solidFill>
                   <a:srgbClr val="F0A500"/>
                 </a:solidFill>
@@ -26796,7 +27226,16 @@
               <a:t>•  </a:t>
             </a:r>
             <a:r>
-              <a:rPr sz="1900" b="1" i="0">
+              <a:rPr sz="1350" b="0" i="0">
+                <a:solidFill>
+                  <a:srgbClr val="FFFFFF"/>
+                </a:solidFill>
+                <a:latin typeface="Calibri"/>
+              </a:rPr>
+              <a:t>The clusterer and triage agent together reach </a:t>
+            </a:r>
+            <a:r>
+              <a:rPr sz="1350" b="1" i="0">
                 <a:solidFill>
                   <a:srgbClr val="F0A500"/>
                 </a:solidFill>
@@ -26805,23 +27244,23 @@
               <a:t>96.5%</a:t>
             </a:r>
             <a:r>
-              <a:rPr sz="1900" b="0" i="0">
+              <a:rPr sz="1350" b="0" i="0">
                 <a:solidFill>
                   <a:srgbClr val="FFFFFF"/>
                 </a:solidFill>
                 <a:latin typeface="Calibri"/>
               </a:rPr>
-              <a:t> classification accuracy on detectable faults</a:t>
+              <a:t> classification accuracy on all detectable faults in the 255-record dataset.</a:t>
             </a:r>
           </a:p>
           <a:p>
             <a:pPr>
               <a:spcAft>
-                <a:spcPts val="1500"/>
+                <a:spcPts val="800"/>
               </a:spcAft>
             </a:pPr>
             <a:r>
-              <a:rPr sz="1900" b="1" i="0">
+              <a:rPr sz="1350" b="1" i="0">
                 <a:solidFill>
                   <a:srgbClr val="F0A500"/>
                 </a:solidFill>
@@ -26830,23 +27269,23 @@
               <a:t>•  </a:t>
             </a:r>
             <a:r>
-              <a:rPr sz="1900" b="0" i="0">
+              <a:rPr sz="1350" b="0" i="0">
                 <a:solidFill>
                   <a:srgbClr val="FFFFFF"/>
                 </a:solidFill>
                 <a:latin typeface="Calibri"/>
               </a:rPr>
-              <a:t>33 latent faults detected (passed simulation but contain RTL bugs)</a:t>
+              <a:t>The system uncovered 33 latent faults — regression records that pass simulation even though the underlying RTL contains an injected bug.</a:t>
             </a:r>
           </a:p>
           <a:p>
             <a:pPr>
               <a:spcAft>
-                <a:spcPts val="1500"/>
+                <a:spcPts val="800"/>
               </a:spcAft>
             </a:pPr>
             <a:r>
-              <a:rPr sz="1900" b="1" i="0">
+              <a:rPr sz="1350" b="1" i="0">
                 <a:solidFill>
                   <a:srgbClr val="F0A500"/>
                 </a:solidFill>
@@ -26855,32 +27294,23 @@
               <a:t>•  </a:t>
             </a:r>
             <a:r>
-              <a:rPr sz="1900" b="1" i="0">
-                <a:solidFill>
-                  <a:srgbClr val="F0A500"/>
-                </a:solidFill>
-                <a:latin typeface="Calibri"/>
-              </a:rPr>
-              <a:t>131 tests</a:t>
-            </a:r>
-            <a:r>
-              <a:rPr sz="1900" b="0" i="0">
+              <a:rPr sz="1350" b="0" i="0">
                 <a:solidFill>
                   <a:srgbClr val="FFFFFF"/>
                 </a:solidFill>
                 <a:latin typeface="Calibri"/>
               </a:rPr>
-              <a:t> passing, fully reproducible with Docker</a:t>
+              <a:t>All of these results are backed by a 131-test pytest suite with zero failures, so the pipeline itself is verified, not just the RTL it triages.</a:t>
             </a:r>
           </a:p>
           <a:p>
             <a:pPr>
               <a:spcAft>
-                <a:spcPts val="1500"/>
+                <a:spcPts val="800"/>
               </a:spcAft>
             </a:pPr>
             <a:r>
-              <a:rPr sz="1900" b="1" i="0">
+              <a:rPr sz="1350" b="1" i="0">
                 <a:solidFill>
                   <a:srgbClr val="F0A500"/>
                 </a:solidFill>
@@ -26889,13 +27319,38 @@
               <a:t>•  </a:t>
             </a:r>
             <a:r>
-              <a:rPr sz="1900" b="0" i="0">
+              <a:rPr sz="1350" b="0" i="0">
                 <a:solidFill>
                   <a:srgbClr val="FFFFFF"/>
                 </a:solidFill>
                 <a:latin typeface="Calibri"/>
               </a:rPr>
-              <a:t>Open-source benchmark dataset released</a:t>
+              <a:t>The entire project, from RTL to dashboard, is reproducible in a single Docker command, with no manual environment setup required.</a:t>
+            </a:r>
+          </a:p>
+          <a:p>
+            <a:pPr>
+              <a:spcAft>
+                <a:spcPts val="800"/>
+              </a:spcAft>
+            </a:pPr>
+            <a:r>
+              <a:rPr sz="1350" b="1" i="0">
+                <a:solidFill>
+                  <a:srgbClr val="F0A500"/>
+                </a:solidFill>
+                <a:latin typeface="Calibri"/>
+              </a:rPr>
+              <a:t>•  </a:t>
+            </a:r>
+            <a:r>
+              <a:rPr sz="1350" b="0" i="0">
+                <a:solidFill>
+                  <a:srgbClr val="FFFFFF"/>
+                </a:solidFill>
+                <a:latin typeface="Calibri"/>
+              </a:rPr>
+              <a:t>We release the full benchmark dataset, fault variants, and triage pipeline as open-source artifacts so others can validate or build on this work.</a:t>
             </a:r>
           </a:p>
         </p:txBody>
@@ -28493,7 +28948,7 @@
         <p:spPr>
           <a:xfrm>
             <a:off x="640080" y="1508760"/>
-            <a:ext cx="10911535" cy="4892040"/>
+            <a:ext cx="10911535" cy="960120"/>
           </a:xfrm>
           <a:prstGeom prst="rect">
             <a:avLst/>
@@ -28507,12 +28962,51 @@
           <a:lstStyle/>
           <a:p>
             <a:pPr>
+              <a:lnSpc>
+                <a:spcPct val="120000"/>
+              </a:lnSpc>
+            </a:pPr>
+            <a:r>
+              <a:rPr sz="1600" b="0" i="0">
+                <a:solidFill>
+                  <a:srgbClr val="FFFFFF"/>
+                </a:solidFill>
+                <a:latin typeface="Calibri"/>
+              </a:rPr>
+              <a:t>The pipeline is built entirely on open, widely-available tooling so it can be reproduced without proprietary EDA licenses. Each layer — RTL, simulation, reference models, and AI — was chosen for being both industry-realistic and easy to install in a container.</a:t>
+            </a:r>
+          </a:p>
+        </p:txBody>
+      </p:sp>
+      <p:sp>
+        <p:nvSpPr>
+          <p:cNvPr id="10" name="TextBox 9"/>
+          <p:cNvSpPr txBox="1"/>
+          <p:nvPr/>
+        </p:nvSpPr>
+        <p:spPr>
+          <a:xfrm>
+            <a:off x="640080" y="2468880"/>
+            <a:ext cx="10911535" cy="3977640"/>
+          </a:xfrm>
+          <a:prstGeom prst="rect">
+            <a:avLst/>
+          </a:prstGeom>
+          <a:noFill/>
+        </p:spPr>
+        <p:txBody>
+          <a:bodyPr wrap="square" lIns="0" rIns="0" tIns="0" bIns="0">
+            <a:noAutofit/>
+          </a:bodyPr>
+          <a:lstStyle/>
+          <a:p>
+            <a:pPr>
               <a:spcAft>
-                <a:spcPts val="1400"/>
+                <a:spcPts val="700"/>
               </a:spcAft>
             </a:pPr>
             <a:r>
-              <a:rPr sz="1900" b="1" i="0">
+              <a:rPr sz="1300" b="1" i="0">
                 <a:solidFill>
                   <a:srgbClr val="F0A500"/>
                 </a:solidFill>
@@ -28521,16 +29015,16 @@
               <a:t>•  </a:t>
             </a:r>
             <a:r>
-              <a:rPr sz="1900" b="0" i="0">
+              <a:rPr sz="1300" b="0" i="0">
                 <a:solidFill>
                   <a:srgbClr val="FFFFFF"/>
                 </a:solidFill>
                 <a:latin typeface="Calibri"/>
               </a:rPr>
-              <a:t>RTL: SystemVerilog (Verilator </a:t>
-            </a:r>
-            <a:r>
-              <a:rPr sz="1900" b="1" i="0">
+              <a:t>The RTL is written in SystemVerilog and simulated with the open-source Verilator </a:t>
+            </a:r>
+            <a:r>
+              <a:rPr sz="1300" b="1" i="0">
                 <a:solidFill>
                   <a:srgbClr val="F0A500"/>
                 </a:solidFill>
@@ -28539,23 +29033,23 @@
               <a:t>5.x</a:t>
             </a:r>
             <a:r>
-              <a:rPr sz="1900" b="0" i="0">
+              <a:rPr sz="1300" b="0" i="0">
                 <a:solidFill>
                   <a:srgbClr val="FFFFFF"/>
                 </a:solidFill>
                 <a:latin typeface="Calibri"/>
               </a:rPr>
-              <a:t> simulator)</a:t>
+              <a:t> cycle-accurate simulator, avoiding any proprietary simulator dependency.</a:t>
             </a:r>
           </a:p>
           <a:p>
             <a:pPr>
               <a:spcAft>
-                <a:spcPts val="1400"/>
+                <a:spcPts val="700"/>
               </a:spcAft>
             </a:pPr>
             <a:r>
-              <a:rPr sz="1900" b="1" i="0">
+              <a:rPr sz="1300" b="1" i="0">
                 <a:solidFill>
                   <a:srgbClr val="F0A500"/>
                 </a:solidFill>
@@ -28564,23 +29058,23 @@
               <a:t>•  </a:t>
             </a:r>
             <a:r>
-              <a:rPr sz="1900" b="0" i="0">
+              <a:rPr sz="1300" b="0" i="0">
                 <a:solidFill>
                   <a:srgbClr val="FFFFFF"/>
                 </a:solidFill>
                 <a:latin typeface="Calibri"/>
               </a:rPr>
-              <a:t>Testbench: CocoTB 2.0.1 (Python-based hardware simulation)</a:t>
+              <a:t>CocoTB 2.0.1 drives the testbench in Python, letting us generate test vectors and check results with the same NumPy code used for the golden reference models.</a:t>
             </a:r>
           </a:p>
           <a:p>
             <a:pPr>
               <a:spcAft>
-                <a:spcPts val="1400"/>
+                <a:spcPts val="700"/>
               </a:spcAft>
             </a:pPr>
             <a:r>
-              <a:rPr sz="1900" b="1" i="0">
+              <a:rPr sz="1300" b="1" i="0">
                 <a:solidFill>
                   <a:srgbClr val="F0A500"/>
                 </a:solidFill>
@@ -28589,23 +29083,23 @@
               <a:t>•  </a:t>
             </a:r>
             <a:r>
-              <a:rPr sz="1900" b="0" i="0">
+              <a:rPr sz="1300" b="0" i="0">
                 <a:solidFill>
                   <a:srgbClr val="FFFFFF"/>
                 </a:solidFill>
                 <a:latin typeface="Calibri"/>
               </a:rPr>
-              <a:t>Reference Models: NumPy (pure Python golden models)</a:t>
+              <a:t>The golden reference models are pure NumPy implementations of the MAC array and quantization unit, so every expected value in the test suite is computed, never hardcoded.</a:t>
             </a:r>
           </a:p>
           <a:p>
             <a:pPr>
               <a:spcAft>
-                <a:spcPts val="1400"/>
+                <a:spcPts val="700"/>
               </a:spcAft>
             </a:pPr>
             <a:r>
-              <a:rPr sz="1900" b="1" i="0">
+              <a:rPr sz="1300" b="1" i="0">
                 <a:solidFill>
                   <a:srgbClr val="F0A500"/>
                 </a:solidFill>
@@ -28614,23 +29108,23 @@
               <a:t>•  </a:t>
             </a:r>
             <a:r>
-              <a:rPr sz="1900" b="0" i="0">
+              <a:rPr sz="1300" b="0" i="0">
                 <a:solidFill>
                   <a:srgbClr val="FFFFFF"/>
                 </a:solidFill>
                 <a:latin typeface="Calibri"/>
               </a:rPr>
-              <a:t>AI: Claude Sonnet 4.6 via Anthropic API</a:t>
+              <a:t>Claude Sonnet 4.6, accessed via the Anthropic API, powers the natural-language triage agent that explains each failure cluster.</a:t>
             </a:r>
           </a:p>
           <a:p>
             <a:pPr>
               <a:spcAft>
-                <a:spcPts val="1400"/>
+                <a:spcPts val="700"/>
               </a:spcAft>
             </a:pPr>
             <a:r>
-              <a:rPr sz="1900" b="1" i="0">
+              <a:rPr sz="1300" b="1" i="0">
                 <a:solidFill>
                   <a:srgbClr val="F0A500"/>
                 </a:solidFill>
@@ -28639,23 +29133,23 @@
               <a:t>•  </a:t>
             </a:r>
             <a:r>
-              <a:rPr sz="1900" b="0" i="0">
+              <a:rPr sz="1300" b="0" i="0">
                 <a:solidFill>
                   <a:srgbClr val="FFFFFF"/>
                 </a:solidFill>
                 <a:latin typeface="Calibri"/>
               </a:rPr>
-              <a:t>Clustering: scikit-learn DBSCAN + rule-based classifier</a:t>
+              <a:t>Failure clustering combines a rule-based classifier with scikit-learn's DBSCAN algorithm to catch both known fault signatures and statistical outliers.</a:t>
             </a:r>
           </a:p>
           <a:p>
             <a:pPr>
               <a:spcAft>
-                <a:spcPts val="1400"/>
+                <a:spcPts val="700"/>
               </a:spcAft>
             </a:pPr>
             <a:r>
-              <a:rPr sz="1900" b="1" i="0">
+              <a:rPr sz="1300" b="1" i="0">
                 <a:solidFill>
                   <a:srgbClr val="F0A500"/>
                 </a:solidFill>
@@ -28664,23 +29158,23 @@
               <a:t>•  </a:t>
             </a:r>
             <a:r>
-              <a:rPr sz="1900" b="0" i="0">
+              <a:rPr sz="1300" b="0" i="0">
                 <a:solidFill>
                   <a:srgbClr val="FFFFFF"/>
                 </a:solidFill>
                 <a:latin typeface="Calibri"/>
               </a:rPr>
-              <a:t>RAG: TF-IDF similarity (sklearn)</a:t>
+              <a:t>A TF-IDF similarity index from scikit-learn powers the RAG store, retrieving similar historical failures to ground the LLM's reasoning.</a:t>
             </a:r>
           </a:p>
           <a:p>
             <a:pPr>
               <a:spcAft>
-                <a:spcPts val="1400"/>
+                <a:spcPts val="700"/>
               </a:spcAft>
             </a:pPr>
             <a:r>
-              <a:rPr sz="1900" b="1" i="0">
+              <a:rPr sz="1300" b="1" i="0">
                 <a:solidFill>
                   <a:srgbClr val="F0A500"/>
                 </a:solidFill>
@@ -28689,56 +29183,13 @@
               <a:t>•  </a:t>
             </a:r>
             <a:r>
-              <a:rPr sz="1900" b="0" i="0">
+              <a:rPr sz="1300" b="0" i="0">
                 <a:solidFill>
                   <a:srgbClr val="FFFFFF"/>
                 </a:solidFill>
                 <a:latin typeface="Calibri"/>
               </a:rPr>
-              <a:t>Testing: pytest (</a:t>
-            </a:r>
-            <a:r>
-              <a:rPr sz="1900" b="1" i="0">
-                <a:solidFill>
-                  <a:srgbClr val="F0A500"/>
-                </a:solidFill>
-                <a:latin typeface="Calibri"/>
-              </a:rPr>
-              <a:t>131 tests</a:t>
-            </a:r>
-            <a:r>
-              <a:rPr sz="1900" b="0" i="0">
-                <a:solidFill>
-                  <a:srgbClr val="FFFFFF"/>
-                </a:solidFill>
-                <a:latin typeface="Calibri"/>
-              </a:rPr>
-              <a:t>)</a:t>
-            </a:r>
-          </a:p>
-          <a:p>
-            <a:pPr>
-              <a:spcAft>
-                <a:spcPts val="1400"/>
-              </a:spcAft>
-            </a:pPr>
-            <a:r>
-              <a:rPr sz="1900" b="1" i="0">
-                <a:solidFill>
-                  <a:srgbClr val="F0A500"/>
-                </a:solidFill>
-                <a:latin typeface="Calibri"/>
-              </a:rPr>
-              <a:t>•  </a:t>
-            </a:r>
-            <a:r>
-              <a:rPr sz="1900" b="0" i="0">
-                <a:solidFill>
-                  <a:srgbClr val="FFFFFF"/>
-                </a:solidFill>
-                <a:latin typeface="Calibri"/>
-              </a:rPr>
-              <a:t>Packaging: Docker + docker-compose</a:t>
+              <a:t>The entire pipeline is validated by a 131-test pytest suite and packaged with Docker and docker-compose for one-command reproducibility.</a:t>
             </a:r>
           </a:p>
         </p:txBody>
@@ -29043,17 +29494,56 @@
           </a:p>
         </p:txBody>
       </p:sp>
+      <p:sp>
+        <p:nvSpPr>
+          <p:cNvPr id="9" name="TextBox 8"/>
+          <p:cNvSpPr txBox="1"/>
+          <p:nvPr/>
+        </p:nvSpPr>
+        <p:spPr>
+          <a:xfrm>
+            <a:off x="640080" y="1508760"/>
+            <a:ext cx="10911535" cy="777240"/>
+          </a:xfrm>
+          <a:prstGeom prst="rect">
+            <a:avLst/>
+          </a:prstGeom>
+          <a:noFill/>
+        </p:spPr>
+        <p:txBody>
+          <a:bodyPr wrap="square" lIns="0" rIns="0" tIns="0" bIns="0">
+            <a:noAutofit/>
+          </a:bodyPr>
+          <a:lstStyle/>
+          <a:p>
+            <a:pPr>
+              <a:lnSpc>
+                <a:spcPct val="115000"/>
+              </a:lnSpc>
+            </a:pPr>
+            <a:r>
+              <a:rPr sz="1400" b="0" i="0">
+                <a:solidFill>
+                  <a:srgbClr val="C7C9D9"/>
+                </a:solidFill>
+                <a:latin typeface="Calibri"/>
+              </a:rPr>
+              <a:t>The project was built incrementally over 19 development sessions, each ending in a working, fully-tested milestone rather than one large all-at-once implementation. The table below traces how the RTL, testbench, and AI triage pipeline were layered on top of each other, with the pytest count at each stage showing steady, verified progress.</a:t>
+            </a:r>
+          </a:p>
+        </p:txBody>
+      </p:sp>
       <p:graphicFrame>
         <p:nvGraphicFramePr>
-          <p:cNvPr id="9" name="Table 8"/>
+          <p:cNvPr id="10" name="Table 9"/>
           <p:cNvGraphicFramePr>
             <a:graphicFrameLocks noGrp="1"/>
           </p:cNvGraphicFramePr>
           <p:nvPr/>
         </p:nvGraphicFramePr>
         <p:xfrm>
-          <a:off x="640080" y="1508760"/>
-          <a:ext cx="10972800" cy="4663440"/>
+          <a:off x="640080" y="2377440"/>
+          <a:ext cx="10972800" cy="3794760"/>
         </p:xfrm>
         <a:graphic>
           <a:graphicData uri="http://schemas.openxmlformats.org/drawingml/2006/table">
@@ -29067,7 +29557,7 @@
                 <a:gridCol w="2743200"/>
                 <a:gridCol w="5943600"/>
               </a:tblGrid>
-              <a:tr h="310896">
+              <a:tr h="252984">
                 <a:tc>
                   <a:txBody>
                     <a:bodyPr wrap="square"/>
@@ -29161,7 +29651,7 @@
                   </a:tcPr>
                 </a:tc>
               </a:tr>
-              <a:tr h="310896">
+              <a:tr h="252984">
                 <a:tc>
                   <a:txBody>
                     <a:bodyPr wrap="square"/>
@@ -29255,7 +29745,7 @@
                   </a:tcPr>
                 </a:tc>
               </a:tr>
-              <a:tr h="310896">
+              <a:tr h="252984">
                 <a:tc>
                   <a:txBody>
                     <a:bodyPr wrap="square"/>
@@ -29349,7 +29839,7 @@
                   </a:tcPr>
                 </a:tc>
               </a:tr>
-              <a:tr h="310896">
+              <a:tr h="252984">
                 <a:tc>
                   <a:txBody>
                     <a:bodyPr wrap="square"/>
@@ -29443,7 +29933,7 @@
                   </a:tcPr>
                 </a:tc>
               </a:tr>
-              <a:tr h="310896">
+              <a:tr h="252984">
                 <a:tc>
                   <a:txBody>
                     <a:bodyPr wrap="square"/>
@@ -29537,7 +30027,7 @@
                   </a:tcPr>
                 </a:tc>
               </a:tr>
-              <a:tr h="310896">
+              <a:tr h="252984">
                 <a:tc>
                   <a:txBody>
                     <a:bodyPr wrap="square"/>
@@ -29631,7 +30121,7 @@
                   </a:tcPr>
                 </a:tc>
               </a:tr>
-              <a:tr h="310896">
+              <a:tr h="252984">
                 <a:tc>
                   <a:txBody>
                     <a:bodyPr wrap="square"/>
@@ -29725,7 +30215,7 @@
                   </a:tcPr>
                 </a:tc>
               </a:tr>
-              <a:tr h="310896">
+              <a:tr h="252984">
                 <a:tc>
                   <a:txBody>
                     <a:bodyPr wrap="square"/>
@@ -29819,7 +30309,7 @@
                   </a:tcPr>
                 </a:tc>
               </a:tr>
-              <a:tr h="310896">
+              <a:tr h="252984">
                 <a:tc>
                   <a:txBody>
                     <a:bodyPr wrap="square"/>
@@ -29913,7 +30403,7 @@
                   </a:tcPr>
                 </a:tc>
               </a:tr>
-              <a:tr h="310896">
+              <a:tr h="252984">
                 <a:tc>
                   <a:txBody>
                     <a:bodyPr wrap="square"/>
@@ -30007,7 +30497,7 @@
                   </a:tcPr>
                 </a:tc>
               </a:tr>
-              <a:tr h="310896">
+              <a:tr h="252984">
                 <a:tc>
                   <a:txBody>
                     <a:bodyPr wrap="square"/>
@@ -30101,7 +30591,7 @@
                   </a:tcPr>
                 </a:tc>
               </a:tr>
-              <a:tr h="310896">
+              <a:tr h="252984">
                 <a:tc>
                   <a:txBody>
                     <a:bodyPr wrap="square"/>
@@ -30195,7 +30685,7 @@
                   </a:tcPr>
                 </a:tc>
               </a:tr>
-              <a:tr h="310896">
+              <a:tr h="252984">
                 <a:tc>
                   <a:txBody>
                     <a:bodyPr wrap="square"/>
@@ -30289,7 +30779,7 @@
                   </a:tcPr>
                 </a:tc>
               </a:tr>
-              <a:tr h="310896">
+              <a:tr h="252984">
                 <a:tc>
                   <a:txBody>
                     <a:bodyPr wrap="square"/>
@@ -30383,7 +30873,7 @@
                   </a:tcPr>
                 </a:tc>
               </a:tr>
-              <a:tr h="310896">
+              <a:tr h="252984">
                 <a:tc>
                   <a:txBody>
                     <a:bodyPr wrap="square"/>
